--- a/2026-Q4/04-TwoRighteousnesses/Week04-TwoRighteousnesses.pptx
+++ b/2026-Q4/04-TwoRighteousnesses/Week04-TwoRighteousnesses.pptx
@@ -4,6 +4,9 @@
   <p:sldMasterIdLst>
     <p:sldMasterId id="2147483648" r:id="rId1"/>
   </p:sldMasterIdLst>
+  <p:notesMasterIdLst>
+    <p:notesMasterId r:id="rId9"/>
+  </p:notesMasterIdLst>
   <p:sldIdLst>
     <p:sldId id="256" r:id="rId2"/>
     <p:sldId id="257" r:id="rId3"/>
@@ -13,10 +16,7 @@
     <p:sldId id="261" r:id="rId7"/>
     <p:sldId id="262" r:id="rId8"/>
   </p:sldIdLst>
-  <p:notesMasterIdLst>
-    <p:notesMasterId r:id="rId9"/>
-  </p:notesMasterIdLst>
-  <p:sldSz cx="9144000" cy="6858000"/>
+  <p:sldSz cx="9144000" cy="6858000" type="screen4x3"/>
   <p:notesSz cx="6858000" cy="9144000"/>
   <p:defaultTextStyle>
     <a:lvl1pPr marL="0" algn="l" defTabSz="914400" rtl="0" eaLnBrk="1" latinLnBrk="0" hangingPunct="1">
@@ -110,6 +110,11 @@
       </a:defRPr>
     </a:lvl9pPr>
   </p:defaultTextStyle>
+  <p:extLst>
+    <p:ext uri="{EFAFB233-063F-42B5-8137-9DF3F51BA10A}">
+      <p15:sldGuideLst xmlns:p15="http://schemas.microsoft.com/office/powerpoint/2012/main"/>
+    </p:ext>
+  </p:extLst>
 </p:presentation>
 </file>
 
@@ -135,234 +140,10 @@
           <a:chExt cx="0" cy="0"/>
         </a:xfrm>
       </p:grpSpPr>
-      <p:sp>
-        <p:nvSpPr>
-          <p:cNvPr id="2" name="Header Placeholder 1"/>
-          <p:cNvSpPr>
-            <a:spLocks noGrp="1"/>
-          </p:cNvSpPr>
-          <p:nvPr>
-            <p:ph type="hdr" sz="quarter"/>
-          </p:nvPr>
-        </p:nvSpPr>
-        <p:spPr>
-          <a:xfrm>
-            <a:off x="0" y="0"/>
-            <a:ext cx="2971800" cy="458788"/>
-          </a:xfrm>
-          <a:prstGeom prst="rect">
-            <a:avLst/>
-          </a:prstGeom>
-        </p:spPr>
-        <p:txBody>
-          <a:bodyPr vert="horz" lIns="91440" tIns="45720" rIns="91440" bIns="45720" rtlCol="0"/>
-          <a:lstStyle>
-            <a:lvl1pPr algn="l">
-              <a:defRPr sz="1200"/>
-            </a:lvl1pPr>
-          </a:lstStyle>
-          <a:p>
-            <a:endParaRPr lang="en-US"/>
-          </a:p>
-        </p:txBody>
-      </p:sp>
-      <p:sp>
-        <p:nvSpPr>
-          <p:cNvPr id="3" name="Date Placeholder 2"/>
-          <p:cNvSpPr>
-            <a:spLocks noGrp="1"/>
-          </p:cNvSpPr>
-          <p:nvPr>
-            <p:ph type="dt" idx="1"/>
-          </p:nvPr>
-        </p:nvSpPr>
-        <p:spPr>
-          <a:xfrm>
-            <a:off x="3884613" y="0"/>
-            <a:ext cx="2971800" cy="458788"/>
-          </a:xfrm>
-          <a:prstGeom prst="rect">
-            <a:avLst/>
-          </a:prstGeom>
-        </p:spPr>
-        <p:txBody>
-          <a:bodyPr vert="horz" lIns="91440" tIns="45720" rIns="91440" bIns="45720" rtlCol="0"/>
-          <a:lstStyle>
-            <a:lvl1pPr algn="r">
-              <a:defRPr sz="1200"/>
-            </a:lvl1pPr>
-          </a:lstStyle>
-          <a:p>
-            <a:fld id="{5282F153-3F37-0F45-9E97-73ACFA13230C}" type="datetimeFigureOut">
-              <a:rPr lang="en-US"/>
-              <a:t>7/23/19</a:t>
-            </a:fld>
-            <a:endParaRPr lang="en-US"/>
-          </a:p>
-        </p:txBody>
-      </p:sp>
-      <p:sp>
-        <p:nvSpPr>
-          <p:cNvPr id="4" name="Slide Image Placeholder 3"/>
-          <p:cNvSpPr>
-            <a:spLocks noGrp="1" noRot="1" noChangeAspect="1"/>
-          </p:cNvSpPr>
-          <p:nvPr>
-            <p:ph type="sldImg" idx="2"/>
-          </p:nvPr>
-        </p:nvSpPr>
-        <p:spPr>
-          <a:xfrm>
-            <a:off x="685800" y="1143000"/>
-            <a:ext cx="5486400" cy="3086100"/>
-          </a:xfrm>
-          <a:prstGeom prst="rect">
-            <a:avLst/>
-          </a:prstGeom>
-          <a:noFill/>
-          <a:ln w="12700">
-            <a:solidFill>
-              <a:prstClr val="black"/>
-            </a:solidFill>
-          </a:ln>
-        </p:spPr>
-        <p:txBody>
-          <a:bodyPr vert="horz" lIns="91440" tIns="45720" rIns="91440" bIns="45720" rtlCol="0" anchor="ctr"/>
-          <a:lstStyle/>
-          <a:p>
-            <a:endParaRPr lang="en-US"/>
-          </a:p>
-        </p:txBody>
-      </p:sp>
-      <p:sp>
-        <p:nvSpPr>
-          <p:cNvPr id="5" name="Notes Placeholder 4"/>
-          <p:cNvSpPr>
-            <a:spLocks noGrp="1"/>
-          </p:cNvSpPr>
-          <p:nvPr>
-            <p:ph type="body" sz="quarter" idx="3"/>
-          </p:nvPr>
-        </p:nvSpPr>
-        <p:spPr>
-          <a:xfrm>
-            <a:off x="685800" y="4400550"/>
-            <a:ext cx="5486400" cy="3600450"/>
-          </a:xfrm>
-          <a:prstGeom prst="rect">
-            <a:avLst/>
-          </a:prstGeom>
-        </p:spPr>
-        <p:txBody>
-          <a:bodyPr vert="horz" lIns="91440" tIns="45720" rIns="91440" bIns="45720" rtlCol="0"/>
-          <a:lstStyle/>
-          <a:p>
-            <a:pPr lvl="0"/>
-            <a:r>
-              <a:rPr lang="en-US"/>
-              <a:t>Click to edit Master text styles</a:t>
-            </a:r>
-          </a:p>
-          <a:p>
-            <a:pPr lvl="1"/>
-            <a:r>
-              <a:rPr lang="en-US"/>
-              <a:t>Second level</a:t>
-            </a:r>
-          </a:p>
-          <a:p>
-            <a:pPr lvl="2"/>
-            <a:r>
-              <a:rPr lang="en-US"/>
-              <a:t>Third level</a:t>
-            </a:r>
-          </a:p>
-          <a:p>
-            <a:pPr lvl="3"/>
-            <a:r>
-              <a:rPr lang="en-US"/>
-              <a:t>Fourth level</a:t>
-            </a:r>
-          </a:p>
-          <a:p>
-            <a:pPr lvl="4"/>
-            <a:r>
-              <a:rPr lang="en-US"/>
-              <a:t>Fifth level</a:t>
-            </a:r>
-          </a:p>
-        </p:txBody>
-      </p:sp>
-      <p:sp>
-        <p:nvSpPr>
-          <p:cNvPr id="6" name="Footer Placeholder 5"/>
-          <p:cNvSpPr>
-            <a:spLocks noGrp="1"/>
-          </p:cNvSpPr>
-          <p:nvPr>
-            <p:ph type="ftr" sz="quarter" idx="4"/>
-          </p:nvPr>
-        </p:nvSpPr>
-        <p:spPr>
-          <a:xfrm>
-            <a:off x="0" y="8685213"/>
-            <a:ext cx="2971800" cy="458787"/>
-          </a:xfrm>
-          <a:prstGeom prst="rect">
-            <a:avLst/>
-          </a:prstGeom>
-        </p:spPr>
-        <p:txBody>
-          <a:bodyPr vert="horz" lIns="91440" tIns="45720" rIns="91440" bIns="45720" rtlCol="0" anchor="b"/>
-          <a:lstStyle>
-            <a:lvl1pPr algn="l">
-              <a:defRPr sz="1200"/>
-            </a:lvl1pPr>
-          </a:lstStyle>
-          <a:p>
-            <a:endParaRPr lang="en-US"/>
-          </a:p>
-        </p:txBody>
-      </p:sp>
-      <p:sp>
-        <p:nvSpPr>
-          <p:cNvPr id="7" name="Slide Number Placeholder 6"/>
-          <p:cNvSpPr>
-            <a:spLocks noGrp="1"/>
-          </p:cNvSpPr>
-          <p:nvPr>
-            <p:ph type="sldNum" sz="quarter" idx="5"/>
-          </p:nvPr>
-        </p:nvSpPr>
-        <p:spPr>
-          <a:xfrm>
-            <a:off x="3884613" y="8685213"/>
-            <a:ext cx="2971800" cy="458787"/>
-          </a:xfrm>
-          <a:prstGeom prst="rect">
-            <a:avLst/>
-          </a:prstGeom>
-        </p:spPr>
-        <p:txBody>
-          <a:bodyPr vert="horz" lIns="91440" tIns="45720" rIns="91440" bIns="45720" rtlCol="0" anchor="b"/>
-          <a:lstStyle>
-            <a:lvl1pPr algn="r">
-              <a:defRPr sz="1200"/>
-            </a:lvl1pPr>
-          </a:lstStyle>
-          <a:p>
-            <a:fld id="{CE5E9CC1-C706-0F49-92D6-E571CC5EEA8F}" type="slidenum">
-              <a:rPr lang="en-US"/>
-              <a:t>‹#›</a:t>
-            </a:fld>
-            <a:endParaRPr lang="en-US"/>
-          </a:p>
-        </p:txBody>
-      </p:sp>
     </p:spTree>
     <p:extLst>
       <p:ext uri="{BB962C8B-B14F-4D97-AF65-F5344CB8AC3E}">
-        <p14:creationId xmlns:p14="http://schemas.microsoft.com/office/powerpoint/2010/main" val="1024086991"/>
+        <p14:creationId xmlns:p14="http://schemas.microsoft.com/office/powerpoint/2010/main" val="4234112333"/>
       </p:ext>
     </p:extLst>
   </p:cSld>
@@ -510,7 +291,6 @@
               <a:rPr lang="en-US" dirty="0"/>
               <a:t>[0:00] The pivot week. Say it plainly as they settle: “For three weeks we’ve seen that sincerity is not enough and results are not enough. If you’ve felt the ground get shaky — good. Today we put the ground back, and its name is grace.” This lecture is relief after diagnosis. Set that tone from the first sentence.</a:t>
             </a:r>
-            <a:endParaRPr lang="en-US" dirty="0"/>
           </a:p>
         </p:txBody>
       </p:sp>
@@ -602,7 +382,6 @@
 [CLICK] Matt 5:20 — Jesus is not asking the Pharisees to try harder at their own kind; he points past it entirely.
 [CLICK] Rom 10:3–4 — Israel’s failure: not too little zeal (10:2 says they had zeal), but zeal aimed at establishing their own. Land the danger sentence. Transition: “If righteousness is a gift, then knowing God is not an achievement either. So how is He known?”</a:t>
             </a:r>
-            <a:endParaRPr lang="en-US" dirty="0"/>
           </a:p>
         </p:txBody>
       </p:sp>
@@ -693,7 +472,6 @@
 [CLICK] BORN (20:00) — John 3: Nicodemus, a righteousness-of-man expert, is told he must be born from ABOVE. You cannot achieve a birth; it happens TO you. New creation begins in the spirit.
 [CLICK] WITNESSED (25:00) — Rom 8: the felt reality — the Spirit’s inner witness of belonging (8:16). This is assurance grounded in God’s work, not in our performance scorecard (answers Week 1’s “invisible even to its owner” unease). Land the summary: knowing God is His work IN you. Transition: “Now — why put this week HERE, right in the middle?”</a:t>
             </a:r>
-            <a:endParaRPr lang="en-US" dirty="0"/>
           </a:p>
         </p:txBody>
       </p:sp>
@@ -786,7 +564,6 @@
 [CLICK] The exodus order — this is the master pattern. Redeemed FIRST (Passover blood), tested SECOND (wilderness). Deut 8:2 comes in chapter 8, long after the rescue. The tests never bought the freedom.
 [CLICK] Eph 2:8–10 seals it: saved for good works, not by them. Same grace-then-life order. Land: mercy first, altar second.</a:t>
             </a:r>
-            <a:endParaRPr lang="en-US" dirty="0"/>
           </a:p>
         </p:txBody>
       </p:sp>
@@ -878,7 +655,6 @@
 [CLICK] The root: both keep score; both make my performance the measure. This is the insight discussion Q1 is fishing for — you can either teach it here and let discussion deepen it, or hold it and let them discover it. Your call by clock.
 [CLICK] Rom 8:1 — the gift removes the scoreboard. Same medicine for both patients. The “depend daily” line sets up discussion Q2.</a:t>
             </a:r>
-            <a:endParaRPr lang="en-US" dirty="0"/>
           </a:p>
         </p:txBody>
       </p:sp>
@@ -969,7 +745,6 @@
 Q2: The practical payoff of the whole week. Aim concrete: confession without wallowing; receiving forgiveness rather than re-earning it; serving from acceptance rather than for it; resting on a finished work when you fail by Tuesday afternoon. Seed if quiet: “What changes about how you pray after a bad day?”
 [CLICK] Ground rule.</a:t>
             </a:r>
-            <a:endParaRPr lang="en-US" dirty="0"/>
           </a:p>
         </p:txBody>
       </p:sp>
@@ -1061,7 +836,6 @@
 [CLICK] Carry sentence — have them say it with you; it is the course’s spine.
 [CLICK] Close on Rom 8:1 — send them out with no condemnation, not with a to-do list. Dismiss on time.</a:t>
             </a:r>
-            <a:endParaRPr lang="en-US" dirty="0"/>
           </a:p>
         </p:txBody>
       </p:sp>
@@ -1134,6 +908,11 @@
 <file path=ppt/slideMasters/slideMaster1.xml><?xml version="1.0" encoding="utf-8"?>
 <p:sldMaster xmlns:a="http://schemas.openxmlformats.org/drawingml/2006/main" xmlns:r="http://schemas.openxmlformats.org/officeDocument/2006/relationships" xmlns:p="http://schemas.openxmlformats.org/presentationml/2006/main">
   <p:cSld>
+    <p:bg>
+      <p:bgRef idx="1001">
+        <a:schemeClr val="bg1"/>
+      </p:bgRef>
+    </p:bg>
     <p:spTree>
       <p:nvGrpSpPr>
         <p:cNvPr id="1" name=""/>
@@ -1446,7 +1225,7 @@
           <a:bodyPr wrap="square" lIns="0" tIns="0" rIns="0" bIns="0" rtlCol="0" anchor="t"/>
           <a:lstStyle/>
           <a:p>
-            <a:pPr algn="ctr" indent="0" marL="0">
+            <a:pPr marL="0" indent="0" algn="ctr">
               <a:buNone/>
             </a:pPr>
             <a:r>
@@ -1458,7 +1237,7 @@
                 <a:ea typeface="Arial" pitchFamily="34" charset="-122"/>
                 <a:cs typeface="Arial" pitchFamily="34" charset="-120"/>
               </a:rPr>
-              <a:t>The Obedience of Faith — Week 4  ·  Unit II: Discernment</a:t>
+              <a:t>The Obedience of Faith - Week 4  ·  Unit II: Discernment</a:t>
             </a:r>
             <a:endParaRPr lang="en-US" sz="1600" dirty="0"/>
           </a:p>
@@ -1485,7 +1264,7 @@
           <a:bodyPr wrap="square" lIns="0" tIns="0" rIns="0" bIns="0" rtlCol="0" anchor="t"/>
           <a:lstStyle/>
           <a:p>
-            <a:pPr algn="ctr" indent="0" marL="0">
+            <a:pPr marL="0" indent="0" algn="ctr">
               <a:buNone/>
             </a:pPr>
             <a:r>
@@ -1524,7 +1303,7 @@
           <a:bodyPr wrap="square" lIns="0" tIns="0" rIns="0" bIns="0" rtlCol="0" anchor="t"/>
           <a:lstStyle/>
           <a:p>
-            <a:pPr algn="ctr" indent="0" marL="0">
+            <a:pPr marL="0" indent="0" algn="ctr">
               <a:buNone/>
             </a:pPr>
             <a:r>
@@ -1563,11 +1342,11 @@
           <a:bodyPr wrap="square" lIns="0" tIns="0" rIns="0" bIns="0" rtlCol="0" anchor="t"/>
           <a:lstStyle/>
           <a:p>
-            <a:pPr algn="ctr" indent="0" marL="0">
+            <a:pPr marL="0" indent="0" algn="ctr">
               <a:buNone/>
             </a:pPr>
             <a:r>
-              <a:rPr lang="en-US" sz="1900" i="1" dirty="0">
+              <a:rPr lang="en-US" sz="2000" i="1" dirty="0">
                 <a:solidFill>
                   <a:srgbClr val="000000"/>
                 </a:solidFill>
@@ -1577,17 +1356,14 @@
               </a:rPr>
               <a:t>“For ignoring the righteousness that comes from God, and seeking instead to establish their own righteousness, they did not submit to God’s righteousness.”</a:t>
             </a:r>
-            <a:pPr algn="ctr" indent="0" marL="0">
+            <a:endParaRPr lang="en-US" dirty="0"/>
+          </a:p>
+          <a:p>
+            <a:pPr marL="0" indent="0" algn="ctr">
               <a:buNone/>
             </a:pPr>
-            <a:endParaRPr lang="en-US" sz="1600" dirty="0"/>
-          </a:p>
-          <a:p>
-            <a:pPr algn="ctr" indent="0" marL="0">
-              <a:buNone/>
-            </a:pPr>
-            <a:r>
-              <a:rPr lang="en-US" sz="1800" dirty="0">
+            <a:r>
+              <a:rPr lang="en-US" sz="2000" dirty="0">
                 <a:solidFill>
                   <a:srgbClr val="000000"/>
                 </a:solidFill>
@@ -1597,7 +1373,7 @@
               </a:rPr>
               <a:t>(Romans 10:3)</a:t>
             </a:r>
-            <a:endParaRPr lang="en-US" sz="1600" dirty="0"/>
+            <a:endParaRPr lang="en-US" dirty="0"/>
           </a:p>
         </p:txBody>
       </p:sp>
@@ -1622,18 +1398,18 @@
           <a:bodyPr wrap="square" lIns="0" tIns="0" rIns="0" bIns="0" rtlCol="0" anchor="t"/>
           <a:lstStyle/>
           <a:p>
-            <a:pPr algn="ctr" indent="0" marL="0">
+            <a:pPr marL="0" indent="0" algn="ctr">
               <a:buNone/>
             </a:pPr>
             <a:r>
-              <a:rPr lang="en-US" sz="1600" b="1" u="sng" dirty="0">
+              <a:rPr lang="en-US" sz="2000" b="1" u="sng" dirty="0">
                 <a:solidFill>
                   <a:srgbClr val="4F81BD"/>
                 </a:solidFill>
                 <a:latin typeface="Arial" pitchFamily="34" charset="0"/>
                 <a:ea typeface="Arial" pitchFamily="34" charset="-122"/>
                 <a:cs typeface="Arial" pitchFamily="34" charset="-120"/>
-                <a:hlinkClick r:id="rId1" invalidUrl="" action="" tgtFrame="" tooltip="" history="1" highlightClick="0" endSnd="0">
+                <a:hlinkClick r:id="rId3">
                   <a:extLst>
                     <a:ext uri="{A12FA001-AC4F-418D-AE19-62706E023703}">
                       <ahyp:hlinkClr xmlns:ahyp="http://schemas.microsoft.com/office/drawing/2018/hyperlinkcolor" val="tx"/>
@@ -1641,9 +1417,38 @@
                   </a:extLst>
                 </a:hlinkClick>
               </a:rPr>
-              <a:t>https://tinyurl.com/TeachTheWord</a:t>
-            </a:r>
-            <a:endParaRPr lang="en-US" sz="1600" dirty="0"/>
+              <a:t>https://</a:t>
+            </a:r>
+            <a:r>
+              <a:rPr lang="en-US" sz="2000" b="1" u="sng" dirty="0" err="1">
+                <a:solidFill>
+                  <a:srgbClr val="4F81BD"/>
+                </a:solidFill>
+                <a:latin typeface="Arial" pitchFamily="34" charset="0"/>
+                <a:ea typeface="Arial" pitchFamily="34" charset="-122"/>
+                <a:cs typeface="Arial" pitchFamily="34" charset="-120"/>
+                <a:hlinkClick r:id="rId3">
+                  <a:extLst>
+                    <a:ext uri="{A12FA001-AC4F-418D-AE19-62706E023703}">
+                      <ahyp:hlinkClr xmlns:ahyp="http://schemas.microsoft.com/office/drawing/2018/hyperlinkcolor" val="tx"/>
+                    </a:ext>
+                  </a:extLst>
+                </a:hlinkClick>
+              </a:rPr>
+              <a:t>TeachTheWord</a:t>
+            </a:r>
+            <a:r>
+              <a:rPr lang="en-US" sz="2000" b="1" u="sng" dirty="0" err="1">
+                <a:solidFill>
+                  <a:srgbClr val="4F81BD"/>
+                </a:solidFill>
+                <a:latin typeface="Arial" pitchFamily="34" charset="0"/>
+                <a:ea typeface="Arial" pitchFamily="34" charset="-122"/>
+                <a:cs typeface="Arial" pitchFamily="34" charset="-120"/>
+              </a:rPr>
+              <a:t>.Church</a:t>
+            </a:r>
+            <a:endParaRPr lang="en-US" sz="2000" dirty="0"/>
           </a:p>
         </p:txBody>
       </p:sp>
@@ -1693,7 +1498,7 @@
           <a:bodyPr wrap="square" lIns="0" tIns="0" rIns="0" bIns="0" rtlCol="0" anchor="t"/>
           <a:lstStyle/>
           <a:p>
-            <a:pPr algn="l" indent="0" marL="0">
+            <a:pPr marL="0" indent="0" algn="l">
               <a:buNone/>
             </a:pPr>
             <a:r>
@@ -1732,11 +1537,11 @@
           <a:bodyPr wrap="square" lIns="0" tIns="0" rIns="0" bIns="0" rtlCol="0" anchor="t"/>
           <a:lstStyle/>
           <a:p>
-            <a:pPr algn="l" indent="0" marL="0">
+            <a:pPr marL="0" indent="0" algn="l">
               <a:buNone/>
             </a:pPr>
             <a:r>
-              <a:rPr lang="en-US" sz="1300" b="1" dirty="0">
+              <a:rPr lang="en-US" sz="2000" b="1" dirty="0">
                 <a:solidFill>
                   <a:srgbClr val="4F81BD"/>
                 </a:solidFill>
@@ -1746,7 +1551,7 @@
               </a:rPr>
               <a:t>Every person lives under one or the other</a:t>
             </a:r>
-            <a:endParaRPr lang="en-US" sz="1600" dirty="0"/>
+            <a:endParaRPr lang="en-US" sz="2800" dirty="0"/>
           </a:p>
         </p:txBody>
       </p:sp>
@@ -1758,7 +1563,7 @@
         </p:nvSpPr>
         <p:spPr>
           <a:xfrm>
-            <a:off x="365760" y="1234440"/>
+            <a:off x="365760" y="1143000"/>
             <a:ext cx="4114800" cy="2788920"/>
           </a:xfrm>
           <a:prstGeom prst="roundRect">
@@ -1776,6 +1581,13 @@
             <a:prstDash val="solid"/>
           </a:ln>
         </p:spPr>
+        <p:txBody>
+          <a:bodyPr/>
+          <a:lstStyle/>
+          <a:p>
+            <a:endParaRPr lang="en-US"/>
+          </a:p>
+        </p:txBody>
       </p:sp>
       <p:sp>
         <p:nvSpPr>
@@ -1785,7 +1597,7 @@
         </p:nvSpPr>
         <p:spPr>
           <a:xfrm>
-            <a:off x="502920" y="1371600"/>
+            <a:off x="502920" y="1280160"/>
             <a:ext cx="3840480" cy="457200"/>
           </a:xfrm>
           <a:prstGeom prst="rect">
@@ -1798,7 +1610,7 @@
           <a:bodyPr wrap="square" lIns="0" tIns="0" rIns="0" bIns="0" rtlCol="0" anchor="t"/>
           <a:lstStyle/>
           <a:p>
-            <a:pPr algn="l" indent="0" marL="0">
+            <a:pPr marL="0" indent="0" algn="l">
               <a:buNone/>
             </a:pPr>
             <a:r>
@@ -1824,7 +1636,7 @@
         </p:nvSpPr>
         <p:spPr>
           <a:xfrm>
-            <a:off x="502920" y="1874520"/>
+            <a:off x="502920" y="1600200"/>
             <a:ext cx="3840480" cy="2057400"/>
           </a:xfrm>
           <a:prstGeom prst="rect">
@@ -1837,71 +1649,66 @@
           <a:bodyPr wrap="square" lIns="0" tIns="0" rIns="0" bIns="0" rtlCol="0" anchor="t"/>
           <a:lstStyle/>
           <a:p>
-            <a:pPr algn="l" indent="0" marL="0">
+            <a:pPr marL="285750" indent="-285750" algn="l">
+              <a:buFont typeface="Arial" panose="020B0604020202020204" pitchFamily="34" charset="0"/>
+              <a:buChar char="•"/>
+            </a:pPr>
+            <a:r>
+              <a:rPr lang="en-US" sz="1400" dirty="0">
+                <a:solidFill>
+                  <a:srgbClr val="000000"/>
+                </a:solidFill>
+                <a:latin typeface="Arial" pitchFamily="34" charset="0"/>
+                <a:ea typeface="Arial" pitchFamily="34" charset="-122"/>
+                <a:cs typeface="Arial" pitchFamily="34" charset="-120"/>
+              </a:rPr>
+              <a:t>Built on self-trust; depends on performance.
+Measures worth by effort, comparison, behavior.
+The righteousness of the scribes and Pharisees.
+Strong on the outside </a:t>
+            </a:r>
+            <a:r>
+              <a:rPr lang="en-US" sz="1400" dirty="0">
+                <a:solidFill>
+                  <a:srgbClr val="000000"/>
+                </a:solidFill>
+                <a:latin typeface="Arial" pitchFamily="34" charset="0"/>
+                <a:ea typeface="Arial" pitchFamily="34" charset="-122"/>
+                <a:cs typeface="Arial" pitchFamily="34" charset="-120"/>
+                <a:sym typeface="Wingdings" pitchFamily="2" charset="2"/>
+              </a:rPr>
+              <a:t></a:t>
+            </a:r>
+            <a:r>
+              <a:rPr lang="en-US" sz="1400" dirty="0">
+                <a:solidFill>
+                  <a:srgbClr val="000000"/>
+                </a:solidFill>
+                <a:latin typeface="Arial" pitchFamily="34" charset="0"/>
+                <a:ea typeface="Arial" pitchFamily="34" charset="-122"/>
+                <a:cs typeface="Arial" pitchFamily="34" charset="-120"/>
+              </a:rPr>
+              <a:t> cannot stand before God.</a:t>
+            </a:r>
+          </a:p>
+          <a:p>
+            <a:pPr marL="0" indent="0" algn="l">
               <a:buNone/>
             </a:pPr>
             <a:r>
-              <a:rPr lang="en-US" sz="1350" dirty="0">
-                <a:solidFill>
-                  <a:srgbClr val="000000"/>
-                </a:solidFill>
-                <a:latin typeface="Arial" pitchFamily="34" charset="0"/>
-                <a:ea typeface="Arial" pitchFamily="34" charset="-122"/>
-                <a:cs typeface="Arial" pitchFamily="34" charset="-120"/>
-              </a:rPr>
-              <a:t>Built on self-trust; depends on performance.
+              <a:rPr lang="en-US" sz="1400" dirty="0">
+                <a:solidFill>
+                  <a:srgbClr val="000000"/>
+                </a:solidFill>
+                <a:latin typeface="Arial" pitchFamily="34" charset="0"/>
+                <a:ea typeface="Arial" pitchFamily="34" charset="-122"/>
+                <a:cs typeface="Arial" pitchFamily="34" charset="-120"/>
+              </a:rPr>
+              <a:t>
 </a:t>
             </a:r>
-            <a:pPr algn="l" indent="0" marL="0">
-              <a:buNone/>
-            </a:pPr>
-            <a:r>
-              <a:rPr lang="en-US" sz="1350" dirty="0">
-                <a:solidFill>
-                  <a:srgbClr val="000000"/>
-                </a:solidFill>
-                <a:latin typeface="Arial" pitchFamily="34" charset="0"/>
-                <a:ea typeface="Arial" pitchFamily="34" charset="-122"/>
-                <a:cs typeface="Arial" pitchFamily="34" charset="-120"/>
-              </a:rPr>
-              <a:t>Measures worth by effort, comparison, behavior.
-</a:t>
-            </a:r>
-            <a:pPr algn="l" indent="0" marL="0">
-              <a:buNone/>
-            </a:pPr>
-            <a:r>
-              <a:rPr lang="en-US" sz="1350" dirty="0">
-                <a:solidFill>
-                  <a:srgbClr val="000000"/>
-                </a:solidFill>
-                <a:latin typeface="Arial" pitchFamily="34" charset="0"/>
-                <a:ea typeface="Arial" pitchFamily="34" charset="-122"/>
-                <a:cs typeface="Arial" pitchFamily="34" charset="-120"/>
-              </a:rPr>
-              <a:t>The righteousness of the scribes and Pharisees.
-</a:t>
-            </a:r>
-            <a:pPr algn="l" indent="0" marL="0">
-              <a:buNone/>
-            </a:pPr>
-            <a:r>
-              <a:rPr lang="en-US" sz="1350" dirty="0">
-                <a:solidFill>
-                  <a:srgbClr val="000000"/>
-                </a:solidFill>
-                <a:latin typeface="Arial" pitchFamily="34" charset="0"/>
-                <a:ea typeface="Arial" pitchFamily="34" charset="-122"/>
-                <a:cs typeface="Arial" pitchFamily="34" charset="-120"/>
-              </a:rPr>
-              <a:t>Strong on the outside — cannot stand before God.
-</a:t>
-            </a:r>
-            <a:pPr algn="l" indent="0" marL="0">
-              <a:buNone/>
-            </a:pPr>
-            <a:r>
-              <a:rPr lang="en-US" sz="1450" b="1" dirty="0">
+            <a:r>
+              <a:rPr lang="en-US" sz="1600" b="1" dirty="0">
                 <a:solidFill>
                   <a:srgbClr val="B0413E"/>
                 </a:solidFill>
@@ -1911,7 +1718,7 @@
               </a:rPr>
               <a:t>Says: “prove yourself.”</a:t>
             </a:r>
-            <a:endParaRPr lang="en-US" sz="1600" dirty="0"/>
+            <a:endParaRPr lang="en-US" dirty="0"/>
           </a:p>
         </p:txBody>
       </p:sp>
@@ -1923,7 +1730,7 @@
         </p:nvSpPr>
         <p:spPr>
           <a:xfrm>
-            <a:off x="4663440" y="1234440"/>
+            <a:off x="4663440" y="1143000"/>
             <a:ext cx="4114800" cy="2788920"/>
           </a:xfrm>
           <a:prstGeom prst="roundRect">
@@ -1936,6 +1743,13 @@
           </a:solidFill>
           <a:ln/>
         </p:spPr>
+        <p:txBody>
+          <a:bodyPr/>
+          <a:lstStyle/>
+          <a:p>
+            <a:endParaRPr lang="en-US"/>
+          </a:p>
+        </p:txBody>
       </p:sp>
       <p:sp>
         <p:nvSpPr>
@@ -1945,7 +1759,7 @@
         </p:nvSpPr>
         <p:spPr>
           <a:xfrm>
-            <a:off x="4800600" y="1371600"/>
+            <a:off x="4800600" y="1280160"/>
             <a:ext cx="3840480" cy="457200"/>
           </a:xfrm>
           <a:prstGeom prst="rect">
@@ -1958,7 +1772,7 @@
           <a:bodyPr wrap="square" lIns="0" tIns="0" rIns="0" bIns="0" rtlCol="0" anchor="t"/>
           <a:lstStyle/>
           <a:p>
-            <a:pPr algn="l" indent="0" marL="0">
+            <a:pPr marL="0" indent="0" algn="l">
               <a:buNone/>
             </a:pPr>
             <a:r>
@@ -1984,7 +1798,7 @@
         </p:nvSpPr>
         <p:spPr>
           <a:xfrm>
-            <a:off x="4800600" y="1874520"/>
+            <a:off x="4800600" y="1600200"/>
             <a:ext cx="3840480" cy="2057400"/>
           </a:xfrm>
           <a:prstGeom prst="rect">
@@ -1997,71 +1811,54 @@
           <a:bodyPr wrap="square" lIns="0" tIns="0" rIns="0" bIns="0" rtlCol="0" anchor="t"/>
           <a:lstStyle/>
           <a:p>
-            <a:pPr algn="l" indent="0" marL="0">
+            <a:pPr marL="285750" indent="-285750" algn="l">
+              <a:buFont typeface="Arial" panose="020B0604020202020204" pitchFamily="34" charset="0"/>
+              <a:buChar char="•"/>
+            </a:pPr>
+            <a:r>
+              <a:rPr lang="en-US" sz="1400" dirty="0">
+                <a:solidFill>
+                  <a:srgbClr val="FFFFFF"/>
+                </a:solidFill>
+                <a:latin typeface="Arial" pitchFamily="34" charset="0"/>
+                <a:ea typeface="Arial" pitchFamily="34" charset="-122"/>
+                <a:cs typeface="Arial" pitchFamily="34" charset="-120"/>
+              </a:rPr>
+              <a:t>Does not come from us </a:t>
+            </a:r>
+            <a:r>
+              <a:rPr lang="en-US" sz="1400" dirty="0">
+                <a:solidFill>
+                  <a:srgbClr val="FFFFFF"/>
+                </a:solidFill>
+                <a:latin typeface="Arial" pitchFamily="34" charset="0"/>
+                <a:ea typeface="Arial" pitchFamily="34" charset="-122"/>
+                <a:cs typeface="Arial" pitchFamily="34" charset="-120"/>
+                <a:sym typeface="Wingdings" pitchFamily="2" charset="2"/>
+              </a:rPr>
+              <a:t></a:t>
+            </a:r>
+            <a:r>
+              <a:rPr lang="en-US" sz="1400" dirty="0">
+                <a:solidFill>
+                  <a:srgbClr val="FFFFFF"/>
+                </a:solidFill>
+                <a:latin typeface="Arial" pitchFamily="34" charset="0"/>
+                <a:ea typeface="Arial" pitchFamily="34" charset="-122"/>
+                <a:cs typeface="Arial" pitchFamily="34" charset="-120"/>
+              </a:rPr>
+              <a:t> it comes from Him.
+Given by grace, received through faith, grounded in Christ.
+Begins not with what we do, but what Christ has done.
+Produces a new life that changes how we live.</a:t>
+            </a:r>
+          </a:p>
+          <a:p>
+            <a:pPr marL="0" indent="0" algn="l">
               <a:buNone/>
             </a:pPr>
             <a:r>
-              <a:rPr lang="en-US" sz="1350" dirty="0">
-                <a:solidFill>
-                  <a:srgbClr val="FFFFFF"/>
-                </a:solidFill>
-                <a:latin typeface="Arial" pitchFamily="34" charset="0"/>
-                <a:ea typeface="Arial" pitchFamily="34" charset="-122"/>
-                <a:cs typeface="Arial" pitchFamily="34" charset="-120"/>
-              </a:rPr>
-              <a:t>Does not come from us — it comes from Him.
-</a:t>
-            </a:r>
-            <a:pPr algn="l" indent="0" marL="0">
-              <a:buNone/>
-            </a:pPr>
-            <a:r>
-              <a:rPr lang="en-US" sz="1350" dirty="0">
-                <a:solidFill>
-                  <a:srgbClr val="FFFFFF"/>
-                </a:solidFill>
-                <a:latin typeface="Arial" pitchFamily="34" charset="0"/>
-                <a:ea typeface="Arial" pitchFamily="34" charset="-122"/>
-                <a:cs typeface="Arial" pitchFamily="34" charset="-120"/>
-              </a:rPr>
-              <a:t>Given by grace, received through faith, grounded in Christ.
-</a:t>
-            </a:r>
-            <a:pPr algn="l" indent="0" marL="0">
-              <a:buNone/>
-            </a:pPr>
-            <a:r>
-              <a:rPr lang="en-US" sz="1350" dirty="0">
-                <a:solidFill>
-                  <a:srgbClr val="FFFFFF"/>
-                </a:solidFill>
-                <a:latin typeface="Arial" pitchFamily="34" charset="0"/>
-                <a:ea typeface="Arial" pitchFamily="34" charset="-122"/>
-                <a:cs typeface="Arial" pitchFamily="34" charset="-120"/>
-              </a:rPr>
-              <a:t>Begins not with what we do, but what Christ has done.
-</a:t>
-            </a:r>
-            <a:pPr algn="l" indent="0" marL="0">
-              <a:buNone/>
-            </a:pPr>
-            <a:r>
-              <a:rPr lang="en-US" sz="1350" dirty="0">
-                <a:solidFill>
-                  <a:srgbClr val="FFFFFF"/>
-                </a:solidFill>
-                <a:latin typeface="Arial" pitchFamily="34" charset="0"/>
-                <a:ea typeface="Arial" pitchFamily="34" charset="-122"/>
-                <a:cs typeface="Arial" pitchFamily="34" charset="-120"/>
-              </a:rPr>
-              <a:t>Produces a new life that changes how we live.
-</a:t>
-            </a:r>
-            <a:pPr algn="l" indent="0" marL="0">
-              <a:buNone/>
-            </a:pPr>
-            <a:r>
-              <a:rPr lang="en-US" sz="1450" b="1" dirty="0">
+              <a:rPr lang="en-US" sz="1600" b="1" dirty="0">
                 <a:solidFill>
                   <a:srgbClr val="C9A227"/>
                 </a:solidFill>
@@ -2096,11 +1893,11 @@
           <a:bodyPr wrap="square" lIns="0" tIns="0" rIns="0" bIns="0" rtlCol="0" anchor="t"/>
           <a:lstStyle/>
           <a:p>
-            <a:pPr algn="l" indent="0" marL="0">
+            <a:pPr marL="0" indent="0" algn="l">
               <a:buNone/>
             </a:pPr>
             <a:r>
-              <a:rPr lang="en-US" sz="1500" b="1" i="1" dirty="0">
+              <a:rPr lang="en-US" b="1" i="1" dirty="0">
                 <a:solidFill>
                   <a:srgbClr val="000000"/>
                 </a:solidFill>
@@ -2110,11 +1907,8 @@
               </a:rPr>
               <a:t>“Unless your righteousness goes beyond that of the experts in the law and the Pharisees, you will never enter the kingdom of heaven.” </a:t>
             </a:r>
-            <a:pPr algn="l" indent="0" marL="0">
-              <a:buNone/>
-            </a:pPr>
-            <a:r>
-              <a:rPr lang="en-US" sz="1400" b="1" dirty="0">
+            <a:r>
+              <a:rPr lang="en-US" b="1" dirty="0">
                 <a:solidFill>
                   <a:srgbClr val="000000"/>
                 </a:solidFill>
@@ -2124,11 +1918,8 @@
               </a:rPr>
               <a:t>(Matthew 5:20)</a:t>
             </a:r>
-            <a:pPr algn="l" indent="0" marL="0">
-              <a:buNone/>
-            </a:pPr>
-            <a:r>
-              <a:rPr lang="en-US" sz="1400" b="1" dirty="0">
+            <a:r>
+              <a:rPr lang="en-US" b="1" dirty="0">
                 <a:solidFill>
                   <a:srgbClr val="1F497D"/>
                 </a:solidFill>
@@ -2136,9 +1927,32 @@
                 <a:ea typeface="Arial" pitchFamily="34" charset="-122"/>
                 <a:cs typeface="Arial" pitchFamily="34" charset="-120"/>
               </a:rPr>
-              <a:t>  Not more rule-keeping — a different kind of righteousness altogether.</a:t>
-            </a:r>
-            <a:endParaRPr lang="en-US" sz="1600" dirty="0"/>
+              <a:t>  Not more rule-keeping </a:t>
+            </a:r>
+            <a:r>
+              <a:rPr lang="en-US" b="1" dirty="0">
+                <a:solidFill>
+                  <a:srgbClr val="1F497D"/>
+                </a:solidFill>
+                <a:latin typeface="Arial" pitchFamily="34" charset="0"/>
+                <a:ea typeface="Arial" pitchFamily="34" charset="-122"/>
+                <a:cs typeface="Arial" pitchFamily="34" charset="-120"/>
+                <a:sym typeface="Wingdings" pitchFamily="2" charset="2"/>
+              </a:rPr>
+              <a:t></a:t>
+            </a:r>
+            <a:r>
+              <a:rPr lang="en-US" b="1" dirty="0">
+                <a:solidFill>
+                  <a:srgbClr val="1F497D"/>
+                </a:solidFill>
+                <a:latin typeface="Arial" pitchFamily="34" charset="0"/>
+                <a:ea typeface="Arial" pitchFamily="34" charset="-122"/>
+                <a:cs typeface="Arial" pitchFamily="34" charset="-120"/>
+              </a:rPr>
+              <a:t> a different kind of righteousness altogether.</a:t>
+            </a:r>
+            <a:endParaRPr lang="en-US" sz="2000" dirty="0"/>
           </a:p>
         </p:txBody>
       </p:sp>
@@ -2151,7 +1965,7 @@
         <p:spPr>
           <a:xfrm>
             <a:off x="365760" y="5257800"/>
-            <a:ext cx="8412480" cy="1005840"/>
+            <a:ext cx="8412480" cy="1203290"/>
           </a:xfrm>
           <a:prstGeom prst="rect">
             <a:avLst/>
@@ -2163,11 +1977,11 @@
           <a:bodyPr wrap="square" lIns="0" tIns="0" rIns="0" bIns="0" rtlCol="0" anchor="t"/>
           <a:lstStyle/>
           <a:p>
-            <a:pPr algn="l" indent="0" marL="0">
+            <a:pPr marL="0" indent="0" algn="l">
               <a:buNone/>
             </a:pPr>
             <a:r>
-              <a:rPr lang="en-US" sz="1500" b="1" i="1" dirty="0">
+              <a:rPr lang="en-US" b="1" i="1" dirty="0">
                 <a:solidFill>
                   <a:srgbClr val="000000"/>
                 </a:solidFill>
@@ -2177,31 +1991,25 @@
               </a:rPr>
               <a:t>“Christ is the end of the law, with the result that there is righteousness for everyone who believes.” </a:t>
             </a:r>
-            <a:pPr algn="l" indent="0" marL="0">
+            <a:r>
+              <a:rPr lang="en-US" b="1" dirty="0">
+                <a:solidFill>
+                  <a:srgbClr val="000000"/>
+                </a:solidFill>
+                <a:latin typeface="Arial" pitchFamily="34" charset="0"/>
+                <a:ea typeface="Arial" pitchFamily="34" charset="-122"/>
+                <a:cs typeface="Arial" pitchFamily="34" charset="-120"/>
+              </a:rPr>
+              <a:t>(Romans 10:4)</a:t>
+            </a:r>
+            <a:endParaRPr lang="en-US" sz="2000" dirty="0"/>
+          </a:p>
+          <a:p>
+            <a:pPr marL="0" indent="0" algn="l">
               <a:buNone/>
             </a:pPr>
             <a:r>
-              <a:rPr lang="en-US" sz="1400" b="1" dirty="0">
-                <a:solidFill>
-                  <a:srgbClr val="000000"/>
-                </a:solidFill>
-                <a:latin typeface="Arial" pitchFamily="34" charset="0"/>
-                <a:ea typeface="Arial" pitchFamily="34" charset="-122"/>
-                <a:cs typeface="Arial" pitchFamily="34" charset="-120"/>
-              </a:rPr>
-              <a:t>(Romans 10:4)</a:t>
-            </a:r>
-            <a:pPr algn="l" indent="0" marL="0">
-              <a:buNone/>
-            </a:pPr>
-            <a:endParaRPr lang="en-US" sz="1600" dirty="0"/>
-          </a:p>
-          <a:p>
-            <a:pPr algn="l" indent="0" marL="0">
-              <a:buNone/>
-            </a:pPr>
-            <a:r>
-              <a:rPr lang="en-US" sz="1400" b="1" dirty="0">
+              <a:rPr lang="en-US" b="1" dirty="0">
                 <a:solidFill>
                   <a:srgbClr val="1F497D"/>
                 </a:solidFill>
@@ -2209,9 +2017,32 @@
                 <a:ea typeface="Arial" pitchFamily="34" charset="-122"/>
                 <a:cs typeface="Arial" pitchFamily="34" charset="-120"/>
               </a:rPr>
-              <a:t>The danger: a person can be serious, religious, and sincere — and still miss God by building his own.</a:t>
-            </a:r>
-            <a:endParaRPr lang="en-US" sz="1600" dirty="0"/>
+              <a:t>The danger: a person can be serious, religious, and sincere </a:t>
+            </a:r>
+            <a:r>
+              <a:rPr lang="en-US" b="1" dirty="0">
+                <a:solidFill>
+                  <a:srgbClr val="1F497D"/>
+                </a:solidFill>
+                <a:latin typeface="Arial" pitchFamily="34" charset="0"/>
+                <a:ea typeface="Arial" pitchFamily="34" charset="-122"/>
+                <a:cs typeface="Arial" pitchFamily="34" charset="-120"/>
+                <a:sym typeface="Wingdings" pitchFamily="2" charset="2"/>
+              </a:rPr>
+              <a:t> </a:t>
+            </a:r>
+            <a:r>
+              <a:rPr lang="en-US" b="1" dirty="0">
+                <a:solidFill>
+                  <a:srgbClr val="1F497D"/>
+                </a:solidFill>
+                <a:latin typeface="Arial" pitchFamily="34" charset="0"/>
+                <a:ea typeface="Arial" pitchFamily="34" charset="-122"/>
+                <a:cs typeface="Arial" pitchFamily="34" charset="-120"/>
+              </a:rPr>
+              <a:t>and still miss God by building his own.</a:t>
+            </a:r>
+            <a:endParaRPr lang="en-US" sz="2000" dirty="0"/>
           </a:p>
         </p:txBody>
       </p:sp>
@@ -2229,26 +2060,26 @@
               <p:cTn id="2" dur="indefinite" nodeType="mainSeq">
                 <p:childTnLst>
                   <p:par>
-                    <p:cTn id="15" fill="hold">
+                    <p:cTn id="3" fill="hold">
                       <p:stCondLst>
                         <p:cond delay="indefinite"/>
                       </p:stCondLst>
                       <p:childTnLst>
                         <p:par>
-                          <p:cTn id="16" fill="hold">
+                          <p:cTn id="4" fill="hold">
                             <p:stCondLst>
                               <p:cond delay="0"/>
                             </p:stCondLst>
                             <p:childTnLst>
                               <p:par>
-                                <p:cTn id="3" presetID="42" presetClass="entr" presetSubtype="0" fill="hold" grpId="0" nodeType="clickEffect">
+                                <p:cTn id="5" presetID="42" presetClass="entr" presetSubtype="0" fill="hold" nodeType="clickEffect">
                                   <p:stCondLst>
                                     <p:cond delay="0"/>
                                   </p:stCondLst>
                                   <p:childTnLst>
                                     <p:set>
                                       <p:cBhvr>
-                                        <p:cTn id="4" dur="1" fill="hold">
+                                        <p:cTn id="6" dur="1" fill="hold">
                                           <p:stCondLst>
                                             <p:cond delay="0"/>
                                           </p:stCondLst>
@@ -2266,7 +2097,7 @@
                                     </p:set>
                                     <p:animEffect transition="in" filter="fade">
                                       <p:cBhvr>
-                                        <p:cTn id="5" dur="1000"/>
+                                        <p:cTn id="7" dur="1000"/>
                                         <p:tgtEl>
                                           <p:spTgt spid="4"/>
                                         </p:tgtEl>
@@ -2274,7 +2105,7 @@
                                     </p:animEffect>
                                     <p:anim calcmode="lin" valueType="num">
                                       <p:cBhvr>
-                                        <p:cTn id="6" dur="1000" fill="hold"/>
+                                        <p:cTn id="8" dur="1000" fill="hold"/>
                                         <p:tgtEl>
                                           <p:spTgt spid="4"/>
                                         </p:tgtEl>
@@ -2299,14 +2130,14 @@
                                 </p:cTn>
                               </p:par>
                               <p:par>
-                                <p:cTn id="7" presetID="42" presetClass="entr" presetSubtype="0" fill="hold" grpId="0" nodeType="withEffect">
+                                <p:cTn id="9" presetID="42" presetClass="entr" presetSubtype="0" fill="hold" nodeType="withEffect">
                                   <p:stCondLst>
                                     <p:cond delay="0"/>
                                   </p:stCondLst>
                                   <p:childTnLst>
                                     <p:set>
                                       <p:cBhvr>
-                                        <p:cTn id="8" dur="1" fill="hold">
+                                        <p:cTn id="10" dur="1" fill="hold">
                                           <p:stCondLst>
                                             <p:cond delay="0"/>
                                           </p:stCondLst>
@@ -2324,7 +2155,7 @@
                                     </p:set>
                                     <p:animEffect transition="in" filter="fade">
                                       <p:cBhvr>
-                                        <p:cTn id="9" dur="1000"/>
+                                        <p:cTn id="11" dur="1000"/>
                                         <p:tgtEl>
                                           <p:spTgt spid="5"/>
                                         </p:tgtEl>
@@ -2332,7 +2163,7 @@
                                     </p:animEffect>
                                     <p:anim calcmode="lin" valueType="num">
                                       <p:cBhvr>
-                                        <p:cTn id="10" dur="1000" fill="hold"/>
+                                        <p:cTn id="12" dur="1000" fill="hold"/>
                                         <p:tgtEl>
                                           <p:spTgt spid="5"/>
                                         </p:tgtEl>
@@ -2357,14 +2188,14 @@
                                 </p:cTn>
                               </p:par>
                               <p:par>
-                                <p:cTn id="11" presetID="42" presetClass="entr" presetSubtype="0" fill="hold" grpId="0" nodeType="withEffect">
+                                <p:cTn id="13" presetID="42" presetClass="entr" presetSubtype="0" fill="hold" nodeType="withEffect">
                                   <p:stCondLst>
                                     <p:cond delay="0"/>
                                   </p:stCondLst>
                                   <p:childTnLst>
                                     <p:set>
                                       <p:cBhvr>
-                                        <p:cTn id="12" dur="1" fill="hold">
+                                        <p:cTn id="14" dur="1" fill="hold">
                                           <p:stCondLst>
                                             <p:cond delay="0"/>
                                           </p:stCondLst>
@@ -2382,7 +2213,7 @@
                                     </p:set>
                                     <p:animEffect transition="in" filter="fade">
                                       <p:cBhvr>
-                                        <p:cTn id="13" dur="1000"/>
+                                        <p:cTn id="15" dur="1000"/>
                                         <p:tgtEl>
                                           <p:spTgt spid="6"/>
                                         </p:tgtEl>
@@ -2390,7 +2221,7 @@
                                     </p:animEffect>
                                     <p:anim calcmode="lin" valueType="num">
                                       <p:cBhvr>
-                                        <p:cTn id="14" dur="1000" fill="hold"/>
+                                        <p:cTn id="16" dur="1000" fill="hold"/>
                                         <p:tgtEl>
                                           <p:spTgt spid="6"/>
                                         </p:tgtEl>
@@ -2421,26 +2252,26 @@
                     </p:cTn>
                   </p:par>
                   <p:par>
-                    <p:cTn id="29" fill="hold">
+                    <p:cTn id="17" fill="hold">
                       <p:stCondLst>
                         <p:cond delay="indefinite"/>
                       </p:stCondLst>
                       <p:childTnLst>
                         <p:par>
-                          <p:cTn id="30" fill="hold">
+                          <p:cTn id="18" fill="hold">
                             <p:stCondLst>
                               <p:cond delay="0"/>
                             </p:stCondLst>
                             <p:childTnLst>
                               <p:par>
-                                <p:cTn id="17" presetID="42" presetClass="entr" presetSubtype="0" fill="hold" grpId="0" nodeType="clickEffect">
+                                <p:cTn id="19" presetID="42" presetClass="entr" presetSubtype="0" fill="hold" nodeType="clickEffect">
                                   <p:stCondLst>
                                     <p:cond delay="0"/>
                                   </p:stCondLst>
                                   <p:childTnLst>
                                     <p:set>
                                       <p:cBhvr>
-                                        <p:cTn id="18" dur="1" fill="hold">
+                                        <p:cTn id="20" dur="1" fill="hold">
                                           <p:stCondLst>
                                             <p:cond delay="0"/>
                                           </p:stCondLst>
@@ -2458,7 +2289,7 @@
                                     </p:set>
                                     <p:animEffect transition="in" filter="fade">
                                       <p:cBhvr>
-                                        <p:cTn id="19" dur="1000"/>
+                                        <p:cTn id="21" dur="1000"/>
                                         <p:tgtEl>
                                           <p:spTgt spid="7"/>
                                         </p:tgtEl>
@@ -2466,7 +2297,7 @@
                                     </p:animEffect>
                                     <p:anim calcmode="lin" valueType="num">
                                       <p:cBhvr>
-                                        <p:cTn id="20" dur="1000" fill="hold"/>
+                                        <p:cTn id="22" dur="1000" fill="hold"/>
                                         <p:tgtEl>
                                           <p:spTgt spid="7"/>
                                         </p:tgtEl>
@@ -2491,14 +2322,14 @@
                                 </p:cTn>
                               </p:par>
                               <p:par>
-                                <p:cTn id="21" presetID="42" presetClass="entr" presetSubtype="0" fill="hold" grpId="0" nodeType="withEffect">
+                                <p:cTn id="23" presetID="42" presetClass="entr" presetSubtype="0" fill="hold" nodeType="withEffect">
                                   <p:stCondLst>
                                     <p:cond delay="0"/>
                                   </p:stCondLst>
                                   <p:childTnLst>
                                     <p:set>
                                       <p:cBhvr>
-                                        <p:cTn id="22" dur="1" fill="hold">
+                                        <p:cTn id="24" dur="1" fill="hold">
                                           <p:stCondLst>
                                             <p:cond delay="0"/>
                                           </p:stCondLst>
@@ -2516,7 +2347,7 @@
                                     </p:set>
                                     <p:animEffect transition="in" filter="fade">
                                       <p:cBhvr>
-                                        <p:cTn id="23" dur="1000"/>
+                                        <p:cTn id="25" dur="1000"/>
                                         <p:tgtEl>
                                           <p:spTgt spid="8"/>
                                         </p:tgtEl>
@@ -2524,7 +2355,7 @@
                                     </p:animEffect>
                                     <p:anim calcmode="lin" valueType="num">
                                       <p:cBhvr>
-                                        <p:cTn id="24" dur="1000" fill="hold"/>
+                                        <p:cTn id="26" dur="1000" fill="hold"/>
                                         <p:tgtEl>
                                           <p:spTgt spid="8"/>
                                         </p:tgtEl>
@@ -2549,14 +2380,14 @@
                                 </p:cTn>
                               </p:par>
                               <p:par>
-                                <p:cTn id="25" presetID="42" presetClass="entr" presetSubtype="0" fill="hold" grpId="0" nodeType="withEffect">
+                                <p:cTn id="27" presetID="42" presetClass="entr" presetSubtype="0" fill="hold" nodeType="withEffect">
                                   <p:stCondLst>
                                     <p:cond delay="0"/>
                                   </p:stCondLst>
                                   <p:childTnLst>
                                     <p:set>
                                       <p:cBhvr>
-                                        <p:cTn id="26" dur="1" fill="hold">
+                                        <p:cTn id="28" dur="1" fill="hold">
                                           <p:stCondLst>
                                             <p:cond delay="0"/>
                                           </p:stCondLst>
@@ -2574,7 +2405,7 @@
                                     </p:set>
                                     <p:animEffect transition="in" filter="fade">
                                       <p:cBhvr>
-                                        <p:cTn id="27" dur="1000"/>
+                                        <p:cTn id="29" dur="1000"/>
                                         <p:tgtEl>
                                           <p:spTgt spid="9"/>
                                         </p:tgtEl>
@@ -2582,7 +2413,7 @@
                                     </p:animEffect>
                                     <p:anim calcmode="lin" valueType="num">
                                       <p:cBhvr>
-                                        <p:cTn id="28" dur="1000" fill="hold"/>
+                                        <p:cTn id="30" dur="1000" fill="hold"/>
                                         <p:tgtEl>
                                           <p:spTgt spid="9"/>
                                         </p:tgtEl>
@@ -2613,26 +2444,26 @@
                     </p:cTn>
                   </p:par>
                   <p:par>
-                    <p:cTn id="35" fill="hold">
+                    <p:cTn id="31" fill="hold">
                       <p:stCondLst>
                         <p:cond delay="indefinite"/>
                       </p:stCondLst>
                       <p:childTnLst>
                         <p:par>
-                          <p:cTn id="36" fill="hold">
+                          <p:cTn id="32" fill="hold">
                             <p:stCondLst>
                               <p:cond delay="0"/>
                             </p:stCondLst>
                             <p:childTnLst>
                               <p:par>
-                                <p:cTn id="31" presetID="42" presetClass="entr" presetSubtype="0" fill="hold" grpId="0" nodeType="clickEffect">
+                                <p:cTn id="33" presetID="42" presetClass="entr" presetSubtype="0" fill="hold" nodeType="clickEffect">
                                   <p:stCondLst>
                                     <p:cond delay="0"/>
                                   </p:stCondLst>
                                   <p:childTnLst>
                                     <p:set>
                                       <p:cBhvr>
-                                        <p:cTn id="32" dur="1" fill="hold">
+                                        <p:cTn id="34" dur="1" fill="hold">
                                           <p:stCondLst>
                                             <p:cond delay="0"/>
                                           </p:stCondLst>
@@ -2650,7 +2481,7 @@
                                     </p:set>
                                     <p:animEffect transition="in" filter="fade">
                                       <p:cBhvr>
-                                        <p:cTn id="33" dur="1000"/>
+                                        <p:cTn id="35" dur="1000"/>
                                         <p:tgtEl>
                                           <p:spTgt spid="10"/>
                                         </p:tgtEl>
@@ -2658,7 +2489,7 @@
                                     </p:animEffect>
                                     <p:anim calcmode="lin" valueType="num">
                                       <p:cBhvr>
-                                        <p:cTn id="34" dur="1000" fill="hold"/>
+                                        <p:cTn id="36" dur="1000" fill="hold"/>
                                         <p:tgtEl>
                                           <p:spTgt spid="10"/>
                                         </p:tgtEl>
@@ -2689,26 +2520,26 @@
                     </p:cTn>
                   </p:par>
                   <p:par>
-                    <p:cTn id="41" fill="hold">
+                    <p:cTn id="37" fill="hold">
                       <p:stCondLst>
                         <p:cond delay="indefinite"/>
                       </p:stCondLst>
                       <p:childTnLst>
                         <p:par>
-                          <p:cTn id="42" fill="hold">
+                          <p:cTn id="38" fill="hold">
                             <p:stCondLst>
                               <p:cond delay="0"/>
                             </p:stCondLst>
                             <p:childTnLst>
                               <p:par>
-                                <p:cTn id="37" presetID="42" presetClass="entr" presetSubtype="0" fill="hold" grpId="0" nodeType="clickEffect">
+                                <p:cTn id="39" presetID="42" presetClass="entr" presetSubtype="0" fill="hold" nodeType="clickEffect">
                                   <p:stCondLst>
                                     <p:cond delay="0"/>
                                   </p:stCondLst>
                                   <p:childTnLst>
                                     <p:set>
                                       <p:cBhvr>
-                                        <p:cTn id="38" dur="1" fill="hold">
+                                        <p:cTn id="40" dur="1" fill="hold">
                                           <p:stCondLst>
                                             <p:cond delay="0"/>
                                           </p:stCondLst>
@@ -2726,7 +2557,7 @@
                                     </p:set>
                                     <p:animEffect transition="in" filter="fade">
                                       <p:cBhvr>
-                                        <p:cTn id="39" dur="1000"/>
+                                        <p:cTn id="41" dur="1000"/>
                                         <p:tgtEl>
                                           <p:spTgt spid="11"/>
                                         </p:tgtEl>
@@ -2734,7 +2565,7 @@
                                     </p:animEffect>
                                     <p:anim calcmode="lin" valueType="num">
                                       <p:cBhvr>
-                                        <p:cTn id="40" dur="1000" fill="hold"/>
+                                        <p:cTn id="42" dur="1000" fill="hold"/>
                                         <p:tgtEl>
                                           <p:spTgt spid="11"/>
                                         </p:tgtEl>
@@ -2827,7 +2658,7 @@
           <a:bodyPr wrap="square" lIns="0" tIns="0" rIns="0" bIns="0" rtlCol="0" anchor="t"/>
           <a:lstStyle/>
           <a:p>
-            <a:pPr algn="l" indent="0" marL="0">
+            <a:pPr marL="0" indent="0" algn="l">
               <a:buNone/>
             </a:pPr>
             <a:r>
@@ -2866,11 +2697,11 @@
           <a:bodyPr wrap="square" lIns="0" tIns="0" rIns="0" bIns="0" rtlCol="0" anchor="t"/>
           <a:lstStyle/>
           <a:p>
-            <a:pPr algn="l" indent="0" marL="0">
+            <a:pPr marL="0" indent="0" algn="l">
               <a:buNone/>
             </a:pPr>
             <a:r>
-              <a:rPr lang="en-US" sz="1300" b="1" dirty="0">
+              <a:rPr lang="en-US" sz="2000" b="1" dirty="0">
                 <a:solidFill>
                   <a:srgbClr val="4F81BD"/>
                 </a:solidFill>
@@ -2878,9 +2709,32 @@
                 <a:ea typeface="Arial" pitchFamily="34" charset="-122"/>
                 <a:cs typeface="Arial" pitchFamily="34" charset="-120"/>
               </a:rPr>
-              <a:t>Promised, then given — an inside work</a:t>
-            </a:r>
-            <a:endParaRPr lang="en-US" sz="1600" dirty="0"/>
+              <a:t>Promised, then given </a:t>
+            </a:r>
+            <a:r>
+              <a:rPr lang="en-US" sz="2000" b="1" dirty="0">
+                <a:solidFill>
+                  <a:srgbClr val="4F81BD"/>
+                </a:solidFill>
+                <a:latin typeface="Arial" pitchFamily="34" charset="0"/>
+                <a:ea typeface="Arial" pitchFamily="34" charset="-122"/>
+                <a:cs typeface="Arial" pitchFamily="34" charset="-120"/>
+                <a:sym typeface="Wingdings" pitchFamily="2" charset="2"/>
+              </a:rPr>
+              <a:t></a:t>
+            </a:r>
+            <a:r>
+              <a:rPr lang="en-US" sz="2000" b="1" dirty="0">
+                <a:solidFill>
+                  <a:srgbClr val="4F81BD"/>
+                </a:solidFill>
+                <a:latin typeface="Arial" pitchFamily="34" charset="0"/>
+                <a:ea typeface="Arial" pitchFamily="34" charset="-122"/>
+                <a:cs typeface="Arial" pitchFamily="34" charset="-120"/>
+              </a:rPr>
+              <a:t> an inside work</a:t>
+            </a:r>
+            <a:endParaRPr lang="en-US" sz="2800" dirty="0"/>
           </a:p>
         </p:txBody>
       </p:sp>
@@ -2892,7 +2746,7 @@
         </p:nvSpPr>
         <p:spPr>
           <a:xfrm>
-            <a:off x="365760" y="1280160"/>
+            <a:off x="375808" y="1169629"/>
             <a:ext cx="1600200" cy="1325880"/>
           </a:xfrm>
           <a:prstGeom prst="roundRect">
@@ -2910,6 +2764,13 @@
             <a:prstDash val="solid"/>
           </a:ln>
         </p:spPr>
+        <p:txBody>
+          <a:bodyPr/>
+          <a:lstStyle/>
+          <a:p>
+            <a:endParaRPr lang="en-US"/>
+          </a:p>
+        </p:txBody>
       </p:sp>
       <p:sp>
         <p:nvSpPr>
@@ -2919,7 +2780,7 @@
         </p:nvSpPr>
         <p:spPr>
           <a:xfrm>
-            <a:off x="365760" y="1572768"/>
+            <a:off x="375808" y="1462237"/>
             <a:ext cx="1600200" cy="822960"/>
           </a:xfrm>
           <a:prstGeom prst="rect">
@@ -2932,11 +2793,11 @@
           <a:bodyPr wrap="square" lIns="0" tIns="0" rIns="0" bIns="0" rtlCol="0" anchor="t"/>
           <a:lstStyle/>
           <a:p>
-            <a:pPr algn="ctr" indent="0" marL="0">
+            <a:pPr marL="0" indent="0" algn="ctr">
               <a:buNone/>
             </a:pPr>
             <a:r>
-              <a:rPr lang="en-US" sz="1500" b="1" dirty="0">
+              <a:rPr lang="en-US" sz="2000" b="1" dirty="0">
                 <a:solidFill>
                   <a:srgbClr val="FFFFFF"/>
                 </a:solidFill>
@@ -2947,11 +2808,8 @@
               <a:t>PROMISED
 </a:t>
             </a:r>
-            <a:pPr algn="ctr" indent="0" marL="0">
-              <a:buNone/>
-            </a:pPr>
-            <a:r>
-              <a:rPr lang="en-US" sz="950" i="1" dirty="0">
+            <a:r>
+              <a:rPr lang="en-US" sz="1400" i="1" dirty="0">
                 <a:solidFill>
                   <a:srgbClr val="FFFFFF"/>
                 </a:solidFill>
@@ -2961,7 +2819,7 @@
               </a:rPr>
               <a:t>Jeremiah 31:31–34</a:t>
             </a:r>
-            <a:endParaRPr lang="en-US" sz="1600" dirty="0"/>
+            <a:endParaRPr lang="en-US" sz="2400" dirty="0"/>
           </a:p>
         </p:txBody>
       </p:sp>
@@ -2973,7 +2831,7 @@
         </p:nvSpPr>
         <p:spPr>
           <a:xfrm>
-            <a:off x="2148840" y="1353312"/>
+            <a:off x="2158888" y="1242781"/>
             <a:ext cx="6629400" cy="1188720"/>
           </a:xfrm>
           <a:prstGeom prst="rect">
@@ -2986,21 +2844,93 @@
           <a:bodyPr wrap="square" lIns="0" tIns="0" rIns="0" bIns="0" rtlCol="0" anchor="ctr"/>
           <a:lstStyle/>
           <a:p>
-            <a:pPr algn="l" indent="0" marL="0">
+            <a:pPr marL="0" indent="0" algn="l">
               <a:buNone/>
             </a:pPr>
             <a:r>
-              <a:rPr lang="en-US" sz="1350" dirty="0">
-                <a:solidFill>
-                  <a:srgbClr val="000000"/>
-                </a:solidFill>
-                <a:latin typeface="Arial" pitchFamily="34" charset="0"/>
-                <a:ea typeface="Arial" pitchFamily="34" charset="-122"/>
-                <a:cs typeface="Arial" pitchFamily="34" charset="-120"/>
-              </a:rPr>
-              <a:t>A new covenant: “I will put my law within them… write it on their hearts.” The result: “they will all know me.” Not information — relationship.</a:t>
-            </a:r>
-            <a:endParaRPr lang="en-US" sz="1600" dirty="0"/>
+              <a:rPr lang="en-US" dirty="0">
+                <a:solidFill>
+                  <a:srgbClr val="000000"/>
+                </a:solidFill>
+                <a:latin typeface="Arial" pitchFamily="34" charset="0"/>
+                <a:ea typeface="Arial" pitchFamily="34" charset="-122"/>
+                <a:cs typeface="Arial" pitchFamily="34" charset="-120"/>
+              </a:rPr>
+              <a:t>A new covenant: </a:t>
+            </a:r>
+            <a:r>
+              <a:rPr lang="en-US" i="1" dirty="0">
+                <a:solidFill>
+                  <a:srgbClr val="000000"/>
+                </a:solidFill>
+                <a:latin typeface="Arial" pitchFamily="34" charset="0"/>
+                <a:ea typeface="Arial" pitchFamily="34" charset="-122"/>
+                <a:cs typeface="Arial" pitchFamily="34" charset="-120"/>
+              </a:rPr>
+              <a:t>“I will put my law within them… write it on their hearts.”</a:t>
+            </a:r>
+            <a:r>
+              <a:rPr lang="en-US" dirty="0">
+                <a:solidFill>
+                  <a:srgbClr val="000000"/>
+                </a:solidFill>
+                <a:latin typeface="Arial" pitchFamily="34" charset="0"/>
+                <a:ea typeface="Arial" pitchFamily="34" charset="-122"/>
+                <a:cs typeface="Arial" pitchFamily="34" charset="-120"/>
+              </a:rPr>
+              <a:t> The result: </a:t>
+            </a:r>
+            <a:r>
+              <a:rPr lang="en-US" i="1" dirty="0">
+                <a:solidFill>
+                  <a:srgbClr val="000000"/>
+                </a:solidFill>
+                <a:latin typeface="Arial" pitchFamily="34" charset="0"/>
+                <a:ea typeface="Arial" pitchFamily="34" charset="-122"/>
+                <a:cs typeface="Arial" pitchFamily="34" charset="-120"/>
+              </a:rPr>
+              <a:t>“they will all know me.” </a:t>
+            </a:r>
+          </a:p>
+          <a:p>
+            <a:pPr marL="0" indent="0" algn="l">
+              <a:buNone/>
+            </a:pPr>
+            <a:r>
+              <a:rPr lang="en-US" dirty="0">
+                <a:solidFill>
+                  <a:srgbClr val="000000"/>
+                </a:solidFill>
+                <a:latin typeface="Arial" pitchFamily="34" charset="0"/>
+                <a:ea typeface="Arial" pitchFamily="34" charset="-122"/>
+                <a:cs typeface="Arial" pitchFamily="34" charset="-120"/>
+              </a:rPr>
+              <a:t>Not information </a:t>
+            </a:r>
+            <a:r>
+              <a:rPr lang="en-US" dirty="0">
+                <a:solidFill>
+                  <a:srgbClr val="000000"/>
+                </a:solidFill>
+                <a:latin typeface="Arial" pitchFamily="34" charset="0"/>
+                <a:ea typeface="Arial" pitchFamily="34" charset="-122"/>
+                <a:cs typeface="Arial" pitchFamily="34" charset="-120"/>
+                <a:sym typeface="Wingdings" pitchFamily="2" charset="2"/>
+              </a:rPr>
+              <a:t></a:t>
+            </a:r>
+            <a:r>
+              <a:rPr lang="en-US" dirty="0">
+                <a:solidFill>
+                  <a:srgbClr val="000000"/>
+                </a:solidFill>
+                <a:latin typeface="Arial" pitchFamily="34" charset="0"/>
+                <a:ea typeface="Arial" pitchFamily="34" charset="-122"/>
+                <a:cs typeface="Arial" pitchFamily="34" charset="-120"/>
+              </a:rPr>
+              <a:t> relationship.</a:t>
+            </a:r>
+            <a:endParaRPr lang="en-US" dirty="0"/>
           </a:p>
         </p:txBody>
       </p:sp>
@@ -3012,7 +2942,7 @@
         </p:nvSpPr>
         <p:spPr>
           <a:xfrm>
-            <a:off x="365760" y="2788920"/>
+            <a:off x="375808" y="2678389"/>
             <a:ext cx="1600200" cy="1325880"/>
           </a:xfrm>
           <a:prstGeom prst="roundRect">
@@ -3032,6 +2962,13 @@
             <a:prstDash val="solid"/>
           </a:ln>
         </p:spPr>
+        <p:txBody>
+          <a:bodyPr/>
+          <a:lstStyle/>
+          <a:p>
+            <a:endParaRPr lang="en-US"/>
+          </a:p>
+        </p:txBody>
       </p:sp>
       <p:sp>
         <p:nvSpPr>
@@ -3041,7 +2978,7 @@
         </p:nvSpPr>
         <p:spPr>
           <a:xfrm>
-            <a:off x="365760" y="3081528"/>
+            <a:off x="375808" y="2970997"/>
             <a:ext cx="1600200" cy="822960"/>
           </a:xfrm>
           <a:prstGeom prst="rect">
@@ -3054,11 +2991,11 @@
           <a:bodyPr wrap="square" lIns="0" tIns="0" rIns="0" bIns="0" rtlCol="0" anchor="t"/>
           <a:lstStyle/>
           <a:p>
-            <a:pPr algn="ctr" indent="0" marL="0">
+            <a:pPr marL="0" indent="0" algn="ctr">
               <a:buNone/>
             </a:pPr>
             <a:r>
-              <a:rPr lang="en-US" sz="1500" b="1" dirty="0">
+              <a:rPr lang="en-US" sz="2000" b="1" dirty="0">
                 <a:solidFill>
                   <a:srgbClr val="FFFFFF"/>
                 </a:solidFill>
@@ -3069,11 +3006,8 @@
               <a:t>BORN
 </a:t>
             </a:r>
-            <a:pPr algn="ctr" indent="0" marL="0">
-              <a:buNone/>
-            </a:pPr>
-            <a:r>
-              <a:rPr lang="en-US" sz="950" i="1" dirty="0">
+            <a:r>
+              <a:rPr lang="en-US" sz="1600" i="1" dirty="0">
                 <a:solidFill>
                   <a:srgbClr val="FFFFFF"/>
                 </a:solidFill>
@@ -3083,7 +3017,7 @@
               </a:rPr>
               <a:t>John 3:3–6</a:t>
             </a:r>
-            <a:endParaRPr lang="en-US" sz="1600" dirty="0"/>
+            <a:endParaRPr lang="en-US" sz="2400" dirty="0"/>
           </a:p>
         </p:txBody>
       </p:sp>
@@ -3095,7 +3029,7 @@
         </p:nvSpPr>
         <p:spPr>
           <a:xfrm>
-            <a:off x="2148840" y="2862072"/>
+            <a:off x="2158888" y="2751541"/>
             <a:ext cx="6629400" cy="1188720"/>
           </a:xfrm>
           <a:prstGeom prst="rect">
@@ -3108,21 +3042,60 @@
           <a:bodyPr wrap="square" lIns="0" tIns="0" rIns="0" bIns="0" rtlCol="0" anchor="ctr"/>
           <a:lstStyle/>
           <a:p>
-            <a:pPr algn="l" indent="0" marL="0">
+            <a:pPr marL="0" indent="0" algn="l">
               <a:buNone/>
             </a:pPr>
             <a:r>
-              <a:rPr lang="en-US" sz="1350" dirty="0">
-                <a:solidFill>
-                  <a:srgbClr val="000000"/>
-                </a:solidFill>
-                <a:latin typeface="Arial" pitchFamily="34" charset="0"/>
-                <a:ea typeface="Arial" pitchFamily="34" charset="-122"/>
-                <a:cs typeface="Arial" pitchFamily="34" charset="-120"/>
-              </a:rPr>
-              <a:t>“Unless a person is born from above…”  “What is born of the Spirit is spirit.” The Spirit brings life to the human spirit — a new creation (2 Cor 5:17).</a:t>
-            </a:r>
-            <a:endParaRPr lang="en-US" sz="1600" dirty="0"/>
+              <a:rPr lang="en-US" i="1" dirty="0">
+                <a:solidFill>
+                  <a:srgbClr val="000000"/>
+                </a:solidFill>
+                <a:latin typeface="Arial" pitchFamily="34" charset="0"/>
+                <a:ea typeface="Arial" pitchFamily="34" charset="-122"/>
+                <a:cs typeface="Arial" pitchFamily="34" charset="-120"/>
+              </a:rPr>
+              <a:t>“Unless a person is born from above…”  “What is born of the Spirit is spirit.” </a:t>
+            </a:r>
+          </a:p>
+          <a:p>
+            <a:pPr marL="0" indent="0" algn="l">
+              <a:buNone/>
+            </a:pPr>
+            <a:r>
+              <a:rPr lang="en-US" dirty="0">
+                <a:solidFill>
+                  <a:srgbClr val="000000"/>
+                </a:solidFill>
+                <a:latin typeface="Arial" pitchFamily="34" charset="0"/>
+                <a:ea typeface="Arial" pitchFamily="34" charset="-122"/>
+                <a:cs typeface="Arial" pitchFamily="34" charset="-120"/>
+              </a:rPr>
+              <a:t>The Spirit brings life to the human spirit </a:t>
+            </a:r>
+            <a:r>
+              <a:rPr lang="en-US" dirty="0">
+                <a:solidFill>
+                  <a:srgbClr val="000000"/>
+                </a:solidFill>
+                <a:latin typeface="Arial" pitchFamily="34" charset="0"/>
+                <a:ea typeface="Arial" pitchFamily="34" charset="-122"/>
+                <a:cs typeface="Arial" pitchFamily="34" charset="-120"/>
+                <a:sym typeface="Wingdings" pitchFamily="2" charset="2"/>
+              </a:rPr>
+              <a:t></a:t>
+            </a:r>
+            <a:r>
+              <a:rPr lang="en-US" dirty="0">
+                <a:solidFill>
+                  <a:srgbClr val="000000"/>
+                </a:solidFill>
+                <a:latin typeface="Arial" pitchFamily="34" charset="0"/>
+                <a:ea typeface="Arial" pitchFamily="34" charset="-122"/>
+                <a:cs typeface="Arial" pitchFamily="34" charset="-120"/>
+              </a:rPr>
+              <a:t> a new creation (2 Cor 5:17).</a:t>
+            </a:r>
+            <a:endParaRPr lang="en-US" sz="2400" dirty="0"/>
           </a:p>
         </p:txBody>
       </p:sp>
@@ -3134,7 +3107,7 @@
         </p:nvSpPr>
         <p:spPr>
           <a:xfrm>
-            <a:off x="365760" y="4297680"/>
+            <a:off x="375808" y="4187149"/>
             <a:ext cx="1600200" cy="1325880"/>
           </a:xfrm>
           <a:prstGeom prst="roundRect">
@@ -3154,6 +3127,13 @@
             <a:prstDash val="solid"/>
           </a:ln>
         </p:spPr>
+        <p:txBody>
+          <a:bodyPr/>
+          <a:lstStyle/>
+          <a:p>
+            <a:endParaRPr lang="en-US"/>
+          </a:p>
+        </p:txBody>
       </p:sp>
       <p:sp>
         <p:nvSpPr>
@@ -3163,7 +3143,7 @@
         </p:nvSpPr>
         <p:spPr>
           <a:xfrm>
-            <a:off x="365760" y="4590288"/>
+            <a:off x="375808" y="4479757"/>
             <a:ext cx="1600200" cy="822960"/>
           </a:xfrm>
           <a:prstGeom prst="rect">
@@ -3176,11 +3156,11 @@
           <a:bodyPr wrap="square" lIns="0" tIns="0" rIns="0" bIns="0" rtlCol="0" anchor="t"/>
           <a:lstStyle/>
           <a:p>
-            <a:pPr algn="ctr" indent="0" marL="0">
+            <a:pPr marL="0" indent="0" algn="ctr">
               <a:buNone/>
             </a:pPr>
             <a:r>
-              <a:rPr lang="en-US" sz="1500" b="1" dirty="0">
+              <a:rPr lang="en-US" sz="2000" b="1" dirty="0">
                 <a:solidFill>
                   <a:srgbClr val="FFFFFF"/>
                 </a:solidFill>
@@ -3191,11 +3171,8 @@
               <a:t>WITNESSED
 </a:t>
             </a:r>
-            <a:pPr algn="ctr" indent="0" marL="0">
-              <a:buNone/>
-            </a:pPr>
-            <a:r>
-              <a:rPr lang="en-US" sz="950" i="1" dirty="0">
+            <a:r>
+              <a:rPr lang="en-US" sz="1400" i="1" dirty="0">
                 <a:solidFill>
                   <a:srgbClr val="FFFFFF"/>
                 </a:solidFill>
@@ -3205,7 +3182,7 @@
               </a:rPr>
               <a:t>Romans 8:2, 9–16</a:t>
             </a:r>
-            <a:endParaRPr lang="en-US" sz="1600" dirty="0"/>
+            <a:endParaRPr lang="en-US" sz="2400" dirty="0"/>
           </a:p>
         </p:txBody>
       </p:sp>
@@ -3217,7 +3194,7 @@
         </p:nvSpPr>
         <p:spPr>
           <a:xfrm>
-            <a:off x="2148840" y="4370832"/>
+            <a:off x="2158888" y="4260301"/>
             <a:ext cx="6629400" cy="1188720"/>
           </a:xfrm>
           <a:prstGeom prst="rect">
@@ -3230,21 +3207,71 @@
           <a:bodyPr wrap="square" lIns="0" tIns="0" rIns="0" bIns="0" rtlCol="0" anchor="ctr"/>
           <a:lstStyle/>
           <a:p>
-            <a:pPr algn="l" indent="0" marL="0">
+            <a:pPr marL="0" indent="0" algn="l">
               <a:buNone/>
             </a:pPr>
             <a:r>
-              <a:rPr lang="en-US" sz="1350" dirty="0">
-                <a:solidFill>
-                  <a:srgbClr val="000000"/>
-                </a:solidFill>
-                <a:latin typeface="Arial" pitchFamily="34" charset="0"/>
-                <a:ea typeface="Arial" pitchFamily="34" charset="-122"/>
-                <a:cs typeface="Arial" pitchFamily="34" charset="-120"/>
-              </a:rPr>
-              <a:t>The Spirit sets free from sin and death, dwells inside, gives life — and “bears witness to our spirit that we are God’s children.” Spirit-to-spirit knowing.</a:t>
-            </a:r>
-            <a:endParaRPr lang="en-US" sz="1600" dirty="0"/>
+              <a:rPr lang="en-US" dirty="0">
+                <a:solidFill>
+                  <a:srgbClr val="000000"/>
+                </a:solidFill>
+                <a:latin typeface="Arial" pitchFamily="34" charset="0"/>
+                <a:ea typeface="Arial" pitchFamily="34" charset="-122"/>
+                <a:cs typeface="Arial" pitchFamily="34" charset="-120"/>
+              </a:rPr>
+              <a:t>The Spirit sets free from sin and death, dwells inside, gives life </a:t>
+            </a:r>
+            <a:r>
+              <a:rPr lang="en-US" dirty="0">
+                <a:solidFill>
+                  <a:srgbClr val="000000"/>
+                </a:solidFill>
+                <a:latin typeface="Arial" pitchFamily="34" charset="0"/>
+                <a:ea typeface="Arial" pitchFamily="34" charset="-122"/>
+                <a:cs typeface="Arial" pitchFamily="34" charset="-120"/>
+                <a:sym typeface="Wingdings" pitchFamily="2" charset="2"/>
+              </a:rPr>
+              <a:t></a:t>
+            </a:r>
+            <a:r>
+              <a:rPr lang="en-US" dirty="0">
+                <a:solidFill>
+                  <a:srgbClr val="000000"/>
+                </a:solidFill>
+                <a:latin typeface="Arial" pitchFamily="34" charset="0"/>
+                <a:ea typeface="Arial" pitchFamily="34" charset="-122"/>
+                <a:cs typeface="Arial" pitchFamily="34" charset="-120"/>
+              </a:rPr>
+              <a:t> and </a:t>
+            </a:r>
+            <a:r>
+              <a:rPr lang="en-US" i="1" dirty="0">
+                <a:solidFill>
+                  <a:srgbClr val="000000"/>
+                </a:solidFill>
+                <a:latin typeface="Arial" pitchFamily="34" charset="0"/>
+                <a:ea typeface="Arial" pitchFamily="34" charset="-122"/>
+                <a:cs typeface="Arial" pitchFamily="34" charset="-120"/>
+              </a:rPr>
+              <a:t>“bears witness to our spirit that we are God’s children.” </a:t>
+            </a:r>
+          </a:p>
+          <a:p>
+            <a:pPr marL="0" indent="0" algn="l">
+              <a:buNone/>
+            </a:pPr>
+            <a:r>
+              <a:rPr lang="en-US" dirty="0">
+                <a:solidFill>
+                  <a:srgbClr val="000000"/>
+                </a:solidFill>
+                <a:latin typeface="Arial" pitchFamily="34" charset="0"/>
+                <a:ea typeface="Arial" pitchFamily="34" charset="-122"/>
+                <a:cs typeface="Arial" pitchFamily="34" charset="-120"/>
+              </a:rPr>
+              <a:t>Spirit-to-spirit knowing.</a:t>
+            </a:r>
+            <a:endParaRPr lang="en-US" sz="2400" dirty="0"/>
           </a:p>
         </p:txBody>
       </p:sp>
@@ -3256,7 +3283,7 @@
         </p:nvSpPr>
         <p:spPr>
           <a:xfrm>
-            <a:off x="365760" y="5943600"/>
+            <a:off x="375808" y="5833069"/>
             <a:ext cx="8412480" cy="640080"/>
           </a:xfrm>
           <a:prstGeom prst="rect">
@@ -3269,11 +3296,11 @@
           <a:bodyPr wrap="square" lIns="0" tIns="0" rIns="0" bIns="0" rtlCol="0" anchor="t"/>
           <a:lstStyle/>
           <a:p>
-            <a:pPr algn="l" indent="0" marL="0">
+            <a:pPr marL="0" indent="0" algn="l">
               <a:buNone/>
             </a:pPr>
             <a:r>
-              <a:rPr lang="en-US" sz="1500" b="1" dirty="0">
+              <a:rPr lang="en-US" b="1" dirty="0">
                 <a:solidFill>
                   <a:srgbClr val="1F497D"/>
                 </a:solidFill>
@@ -3283,21 +3310,41 @@
               </a:rPr>
               <a:t>Knowing God is His work in you, not your climb toward Him. </a:t>
             </a:r>
-            <a:pPr algn="l" indent="0" marL="0">
-              <a:buNone/>
-            </a:pPr>
-            <a:r>
-              <a:rPr lang="en-US" sz="1400" i="1" dirty="0">
-                <a:solidFill>
-                  <a:srgbClr val="000000"/>
-                </a:solidFill>
-                <a:latin typeface="Arial" pitchFamily="34" charset="0"/>
-                <a:ea typeface="Arial" pitchFamily="34" charset="-122"/>
-                <a:cs typeface="Arial" pitchFamily="34" charset="-120"/>
-              </a:rPr>
-              <a:t>“They will ALL know me” — from the least to the greatest.</a:t>
-            </a:r>
-            <a:endParaRPr lang="en-US" sz="1600" dirty="0"/>
+            <a:r>
+              <a:rPr lang="en-US" i="1" dirty="0">
+                <a:solidFill>
+                  <a:srgbClr val="000000"/>
+                </a:solidFill>
+                <a:latin typeface="Arial" pitchFamily="34" charset="0"/>
+                <a:ea typeface="Arial" pitchFamily="34" charset="-122"/>
+                <a:cs typeface="Arial" pitchFamily="34" charset="-120"/>
+              </a:rPr>
+              <a:t>“They will ALL know me” </a:t>
+            </a:r>
+            <a:r>
+              <a:rPr lang="en-US" i="1" dirty="0">
+                <a:solidFill>
+                  <a:srgbClr val="000000"/>
+                </a:solidFill>
+                <a:latin typeface="Arial" pitchFamily="34" charset="0"/>
+                <a:ea typeface="Arial" pitchFamily="34" charset="-122"/>
+                <a:cs typeface="Arial" pitchFamily="34" charset="-120"/>
+                <a:sym typeface="Wingdings" pitchFamily="2" charset="2"/>
+              </a:rPr>
+              <a:t></a:t>
+            </a:r>
+            <a:r>
+              <a:rPr lang="en-US" i="1" dirty="0">
+                <a:solidFill>
+                  <a:srgbClr val="000000"/>
+                </a:solidFill>
+                <a:latin typeface="Arial" pitchFamily="34" charset="0"/>
+                <a:ea typeface="Arial" pitchFamily="34" charset="-122"/>
+                <a:cs typeface="Arial" pitchFamily="34" charset="-120"/>
+              </a:rPr>
+              <a:t> from the least to the greatest.</a:t>
+            </a:r>
+            <a:endParaRPr lang="en-US" sz="2000" dirty="0"/>
           </a:p>
         </p:txBody>
       </p:sp>
@@ -3315,26 +3362,26 @@
               <p:cTn id="2" dur="indefinite" nodeType="mainSeq">
                 <p:childTnLst>
                   <p:par>
-                    <p:cTn id="15" fill="hold">
+                    <p:cTn id="3" fill="hold">
                       <p:stCondLst>
                         <p:cond delay="indefinite"/>
                       </p:stCondLst>
                       <p:childTnLst>
                         <p:par>
-                          <p:cTn id="16" fill="hold">
+                          <p:cTn id="4" fill="hold">
                             <p:stCondLst>
                               <p:cond delay="0"/>
                             </p:stCondLst>
                             <p:childTnLst>
                               <p:par>
-                                <p:cTn id="3" presetID="42" presetClass="entr" presetSubtype="0" fill="hold" grpId="0" nodeType="clickEffect">
+                                <p:cTn id="5" presetID="42" presetClass="entr" presetSubtype="0" fill="hold" nodeType="clickEffect">
                                   <p:stCondLst>
                                     <p:cond delay="0"/>
                                   </p:stCondLst>
                                   <p:childTnLst>
                                     <p:set>
                                       <p:cBhvr>
-                                        <p:cTn id="4" dur="1" fill="hold">
+                                        <p:cTn id="6" dur="1" fill="hold">
                                           <p:stCondLst>
                                             <p:cond delay="0"/>
                                           </p:stCondLst>
@@ -3352,7 +3399,7 @@
                                     </p:set>
                                     <p:animEffect transition="in" filter="fade">
                                       <p:cBhvr>
-                                        <p:cTn id="5" dur="1000"/>
+                                        <p:cTn id="7" dur="1000"/>
                                         <p:tgtEl>
                                           <p:spTgt spid="4"/>
                                         </p:tgtEl>
@@ -3360,7 +3407,7 @@
                                     </p:animEffect>
                                     <p:anim calcmode="lin" valueType="num">
                                       <p:cBhvr>
-                                        <p:cTn id="6" dur="1000" fill="hold"/>
+                                        <p:cTn id="8" dur="1000" fill="hold"/>
                                         <p:tgtEl>
                                           <p:spTgt spid="4"/>
                                         </p:tgtEl>
@@ -3385,14 +3432,14 @@
                                 </p:cTn>
                               </p:par>
                               <p:par>
-                                <p:cTn id="7" presetID="42" presetClass="entr" presetSubtype="0" fill="hold" grpId="0" nodeType="withEffect">
+                                <p:cTn id="9" presetID="42" presetClass="entr" presetSubtype="0" fill="hold" nodeType="withEffect">
                                   <p:stCondLst>
                                     <p:cond delay="0"/>
                                   </p:stCondLst>
                                   <p:childTnLst>
                                     <p:set>
                                       <p:cBhvr>
-                                        <p:cTn id="8" dur="1" fill="hold">
+                                        <p:cTn id="10" dur="1" fill="hold">
                                           <p:stCondLst>
                                             <p:cond delay="0"/>
                                           </p:stCondLst>
@@ -3410,7 +3457,7 @@
                                     </p:set>
                                     <p:animEffect transition="in" filter="fade">
                                       <p:cBhvr>
-                                        <p:cTn id="9" dur="1000"/>
+                                        <p:cTn id="11" dur="1000"/>
                                         <p:tgtEl>
                                           <p:spTgt spid="5"/>
                                         </p:tgtEl>
@@ -3418,7 +3465,7 @@
                                     </p:animEffect>
                                     <p:anim calcmode="lin" valueType="num">
                                       <p:cBhvr>
-                                        <p:cTn id="10" dur="1000" fill="hold"/>
+                                        <p:cTn id="12" dur="1000" fill="hold"/>
                                         <p:tgtEl>
                                           <p:spTgt spid="5"/>
                                         </p:tgtEl>
@@ -3443,14 +3490,14 @@
                                 </p:cTn>
                               </p:par>
                               <p:par>
-                                <p:cTn id="11" presetID="42" presetClass="entr" presetSubtype="0" fill="hold" grpId="0" nodeType="withEffect">
+                                <p:cTn id="13" presetID="42" presetClass="entr" presetSubtype="0" fill="hold" nodeType="withEffect">
                                   <p:stCondLst>
                                     <p:cond delay="0"/>
                                   </p:stCondLst>
                                   <p:childTnLst>
                                     <p:set>
                                       <p:cBhvr>
-                                        <p:cTn id="12" dur="1" fill="hold">
+                                        <p:cTn id="14" dur="1" fill="hold">
                                           <p:stCondLst>
                                             <p:cond delay="0"/>
                                           </p:stCondLst>
@@ -3468,7 +3515,7 @@
                                     </p:set>
                                     <p:animEffect transition="in" filter="fade">
                                       <p:cBhvr>
-                                        <p:cTn id="13" dur="1000"/>
+                                        <p:cTn id="15" dur="1000"/>
                                         <p:tgtEl>
                                           <p:spTgt spid="6"/>
                                         </p:tgtEl>
@@ -3476,7 +3523,7 @@
                                     </p:animEffect>
                                     <p:anim calcmode="lin" valueType="num">
                                       <p:cBhvr>
-                                        <p:cTn id="14" dur="1000" fill="hold"/>
+                                        <p:cTn id="16" dur="1000" fill="hold"/>
                                         <p:tgtEl>
                                           <p:spTgt spid="6"/>
                                         </p:tgtEl>
@@ -3507,26 +3554,26 @@
                     </p:cTn>
                   </p:par>
                   <p:par>
-                    <p:cTn id="29" fill="hold">
+                    <p:cTn id="17" fill="hold">
                       <p:stCondLst>
                         <p:cond delay="indefinite"/>
                       </p:stCondLst>
                       <p:childTnLst>
                         <p:par>
-                          <p:cTn id="30" fill="hold">
+                          <p:cTn id="18" fill="hold">
                             <p:stCondLst>
                               <p:cond delay="0"/>
                             </p:stCondLst>
                             <p:childTnLst>
                               <p:par>
-                                <p:cTn id="17" presetID="42" presetClass="entr" presetSubtype="0" fill="hold" grpId="0" nodeType="clickEffect">
+                                <p:cTn id="19" presetID="42" presetClass="entr" presetSubtype="0" fill="hold" nodeType="clickEffect">
                                   <p:stCondLst>
                                     <p:cond delay="0"/>
                                   </p:stCondLst>
                                   <p:childTnLst>
                                     <p:set>
                                       <p:cBhvr>
-                                        <p:cTn id="18" dur="1" fill="hold">
+                                        <p:cTn id="20" dur="1" fill="hold">
                                           <p:stCondLst>
                                             <p:cond delay="0"/>
                                           </p:stCondLst>
@@ -3544,7 +3591,7 @@
                                     </p:set>
                                     <p:animEffect transition="in" filter="fade">
                                       <p:cBhvr>
-                                        <p:cTn id="19" dur="1000"/>
+                                        <p:cTn id="21" dur="1000"/>
                                         <p:tgtEl>
                                           <p:spTgt spid="7"/>
                                         </p:tgtEl>
@@ -3552,7 +3599,7 @@
                                     </p:animEffect>
                                     <p:anim calcmode="lin" valueType="num">
                                       <p:cBhvr>
-                                        <p:cTn id="20" dur="1000" fill="hold"/>
+                                        <p:cTn id="22" dur="1000" fill="hold"/>
                                         <p:tgtEl>
                                           <p:spTgt spid="7"/>
                                         </p:tgtEl>
@@ -3577,14 +3624,14 @@
                                 </p:cTn>
                               </p:par>
                               <p:par>
-                                <p:cTn id="21" presetID="42" presetClass="entr" presetSubtype="0" fill="hold" grpId="0" nodeType="withEffect">
+                                <p:cTn id="23" presetID="42" presetClass="entr" presetSubtype="0" fill="hold" nodeType="withEffect">
                                   <p:stCondLst>
                                     <p:cond delay="0"/>
                                   </p:stCondLst>
                                   <p:childTnLst>
                                     <p:set>
                                       <p:cBhvr>
-                                        <p:cTn id="22" dur="1" fill="hold">
+                                        <p:cTn id="24" dur="1" fill="hold">
                                           <p:stCondLst>
                                             <p:cond delay="0"/>
                                           </p:stCondLst>
@@ -3602,7 +3649,7 @@
                                     </p:set>
                                     <p:animEffect transition="in" filter="fade">
                                       <p:cBhvr>
-                                        <p:cTn id="23" dur="1000"/>
+                                        <p:cTn id="25" dur="1000"/>
                                         <p:tgtEl>
                                           <p:spTgt spid="8"/>
                                         </p:tgtEl>
@@ -3610,7 +3657,7 @@
                                     </p:animEffect>
                                     <p:anim calcmode="lin" valueType="num">
                                       <p:cBhvr>
-                                        <p:cTn id="24" dur="1000" fill="hold"/>
+                                        <p:cTn id="26" dur="1000" fill="hold"/>
                                         <p:tgtEl>
                                           <p:spTgt spid="8"/>
                                         </p:tgtEl>
@@ -3635,14 +3682,14 @@
                                 </p:cTn>
                               </p:par>
                               <p:par>
-                                <p:cTn id="25" presetID="42" presetClass="entr" presetSubtype="0" fill="hold" grpId="0" nodeType="withEffect">
+                                <p:cTn id="27" presetID="42" presetClass="entr" presetSubtype="0" fill="hold" nodeType="withEffect">
                                   <p:stCondLst>
                                     <p:cond delay="0"/>
                                   </p:stCondLst>
                                   <p:childTnLst>
                                     <p:set>
                                       <p:cBhvr>
-                                        <p:cTn id="26" dur="1" fill="hold">
+                                        <p:cTn id="28" dur="1" fill="hold">
                                           <p:stCondLst>
                                             <p:cond delay="0"/>
                                           </p:stCondLst>
@@ -3660,7 +3707,7 @@
                                     </p:set>
                                     <p:animEffect transition="in" filter="fade">
                                       <p:cBhvr>
-                                        <p:cTn id="27" dur="1000"/>
+                                        <p:cTn id="29" dur="1000"/>
                                         <p:tgtEl>
                                           <p:spTgt spid="9"/>
                                         </p:tgtEl>
@@ -3668,7 +3715,7 @@
                                     </p:animEffect>
                                     <p:anim calcmode="lin" valueType="num">
                                       <p:cBhvr>
-                                        <p:cTn id="28" dur="1000" fill="hold"/>
+                                        <p:cTn id="30" dur="1000" fill="hold"/>
                                         <p:tgtEl>
                                           <p:spTgt spid="9"/>
                                         </p:tgtEl>
@@ -3699,26 +3746,26 @@
                     </p:cTn>
                   </p:par>
                   <p:par>
-                    <p:cTn id="43" fill="hold">
+                    <p:cTn id="31" fill="hold">
                       <p:stCondLst>
                         <p:cond delay="indefinite"/>
                       </p:stCondLst>
                       <p:childTnLst>
                         <p:par>
-                          <p:cTn id="44" fill="hold">
+                          <p:cTn id="32" fill="hold">
                             <p:stCondLst>
                               <p:cond delay="0"/>
                             </p:stCondLst>
                             <p:childTnLst>
                               <p:par>
-                                <p:cTn id="31" presetID="42" presetClass="entr" presetSubtype="0" fill="hold" grpId="0" nodeType="clickEffect">
+                                <p:cTn id="33" presetID="42" presetClass="entr" presetSubtype="0" fill="hold" nodeType="clickEffect">
                                   <p:stCondLst>
                                     <p:cond delay="0"/>
                                   </p:stCondLst>
                                   <p:childTnLst>
                                     <p:set>
                                       <p:cBhvr>
-                                        <p:cTn id="32" dur="1" fill="hold">
+                                        <p:cTn id="34" dur="1" fill="hold">
                                           <p:stCondLst>
                                             <p:cond delay="0"/>
                                           </p:stCondLst>
@@ -3736,7 +3783,7 @@
                                     </p:set>
                                     <p:animEffect transition="in" filter="fade">
                                       <p:cBhvr>
-                                        <p:cTn id="33" dur="1000"/>
+                                        <p:cTn id="35" dur="1000"/>
                                         <p:tgtEl>
                                           <p:spTgt spid="10"/>
                                         </p:tgtEl>
@@ -3744,7 +3791,7 @@
                                     </p:animEffect>
                                     <p:anim calcmode="lin" valueType="num">
                                       <p:cBhvr>
-                                        <p:cTn id="34" dur="1000" fill="hold"/>
+                                        <p:cTn id="36" dur="1000" fill="hold"/>
                                         <p:tgtEl>
                                           <p:spTgt spid="10"/>
                                         </p:tgtEl>
@@ -3769,14 +3816,14 @@
                                 </p:cTn>
                               </p:par>
                               <p:par>
-                                <p:cTn id="35" presetID="42" presetClass="entr" presetSubtype="0" fill="hold" grpId="0" nodeType="withEffect">
+                                <p:cTn id="37" presetID="42" presetClass="entr" presetSubtype="0" fill="hold" nodeType="withEffect">
                                   <p:stCondLst>
                                     <p:cond delay="0"/>
                                   </p:stCondLst>
                                   <p:childTnLst>
                                     <p:set>
                                       <p:cBhvr>
-                                        <p:cTn id="36" dur="1" fill="hold">
+                                        <p:cTn id="38" dur="1" fill="hold">
                                           <p:stCondLst>
                                             <p:cond delay="0"/>
                                           </p:stCondLst>
@@ -3794,7 +3841,7 @@
                                     </p:set>
                                     <p:animEffect transition="in" filter="fade">
                                       <p:cBhvr>
-                                        <p:cTn id="37" dur="1000"/>
+                                        <p:cTn id="39" dur="1000"/>
                                         <p:tgtEl>
                                           <p:spTgt spid="11"/>
                                         </p:tgtEl>
@@ -3802,7 +3849,7 @@
                                     </p:animEffect>
                                     <p:anim calcmode="lin" valueType="num">
                                       <p:cBhvr>
-                                        <p:cTn id="38" dur="1000" fill="hold"/>
+                                        <p:cTn id="40" dur="1000" fill="hold"/>
                                         <p:tgtEl>
                                           <p:spTgt spid="11"/>
                                         </p:tgtEl>
@@ -3827,14 +3874,14 @@
                                 </p:cTn>
                               </p:par>
                               <p:par>
-                                <p:cTn id="39" presetID="42" presetClass="entr" presetSubtype="0" fill="hold" grpId="0" nodeType="withEffect">
+                                <p:cTn id="41" presetID="42" presetClass="entr" presetSubtype="0" fill="hold" nodeType="withEffect">
                                   <p:stCondLst>
                                     <p:cond delay="0"/>
                                   </p:stCondLst>
                                   <p:childTnLst>
                                     <p:set>
                                       <p:cBhvr>
-                                        <p:cTn id="40" dur="1" fill="hold">
+                                        <p:cTn id="42" dur="1" fill="hold">
                                           <p:stCondLst>
                                             <p:cond delay="0"/>
                                           </p:stCondLst>
@@ -3852,7 +3899,7 @@
                                     </p:set>
                                     <p:animEffect transition="in" filter="fade">
                                       <p:cBhvr>
-                                        <p:cTn id="41" dur="1000"/>
+                                        <p:cTn id="43" dur="1000"/>
                                         <p:tgtEl>
                                           <p:spTgt spid="12"/>
                                         </p:tgtEl>
@@ -3860,7 +3907,7 @@
                                     </p:animEffect>
                                     <p:anim calcmode="lin" valueType="num">
                                       <p:cBhvr>
-                                        <p:cTn id="42" dur="1000" fill="hold"/>
+                                        <p:cTn id="44" dur="1000" fill="hold"/>
                                         <p:tgtEl>
                                           <p:spTgt spid="12"/>
                                         </p:tgtEl>
@@ -3891,26 +3938,26 @@
                     </p:cTn>
                   </p:par>
                   <p:par>
-                    <p:cTn id="49" fill="hold">
+                    <p:cTn id="45" fill="hold">
                       <p:stCondLst>
                         <p:cond delay="indefinite"/>
                       </p:stCondLst>
                       <p:childTnLst>
                         <p:par>
-                          <p:cTn id="50" fill="hold">
+                          <p:cTn id="46" fill="hold">
                             <p:stCondLst>
                               <p:cond delay="0"/>
                             </p:stCondLst>
                             <p:childTnLst>
                               <p:par>
-                                <p:cTn id="45" presetID="42" presetClass="entr" presetSubtype="0" fill="hold" grpId="0" nodeType="clickEffect">
+                                <p:cTn id="47" presetID="42" presetClass="entr" presetSubtype="0" fill="hold" nodeType="clickEffect">
                                   <p:stCondLst>
                                     <p:cond delay="0"/>
                                   </p:stCondLst>
                                   <p:childTnLst>
                                     <p:set>
                                       <p:cBhvr>
-                                        <p:cTn id="46" dur="1" fill="hold">
+                                        <p:cTn id="48" dur="1" fill="hold">
                                           <p:stCondLst>
                                             <p:cond delay="0"/>
                                           </p:stCondLst>
@@ -3928,7 +3975,7 @@
                                     </p:set>
                                     <p:animEffect transition="in" filter="fade">
                                       <p:cBhvr>
-                                        <p:cTn id="47" dur="1000"/>
+                                        <p:cTn id="49" dur="1000"/>
                                         <p:tgtEl>
                                           <p:spTgt spid="13"/>
                                         </p:tgtEl>
@@ -3936,7 +3983,7 @@
                                     </p:animEffect>
                                     <p:anim calcmode="lin" valueType="num">
                                       <p:cBhvr>
-                                        <p:cTn id="48" dur="1000" fill="hold"/>
+                                        <p:cTn id="50" dur="1000" fill="hold"/>
                                         <p:tgtEl>
                                           <p:spTgt spid="13"/>
                                         </p:tgtEl>
@@ -4029,7 +4076,7 @@
           <a:bodyPr wrap="square" lIns="0" tIns="0" rIns="0" bIns="0" rtlCol="0" anchor="t"/>
           <a:lstStyle/>
           <a:p>
-            <a:pPr algn="l" indent="0" marL="0">
+            <a:pPr marL="0" indent="0" algn="l">
               <a:buNone/>
             </a:pPr>
             <a:r>
@@ -4068,11 +4115,11 @@
           <a:bodyPr wrap="square" lIns="0" tIns="0" rIns="0" bIns="0" rtlCol="0" anchor="t"/>
           <a:lstStyle/>
           <a:p>
-            <a:pPr algn="l" indent="0" marL="0">
+            <a:pPr marL="0" indent="0" algn="l">
               <a:buNone/>
             </a:pPr>
             <a:r>
-              <a:rPr lang="en-US" sz="1300" b="1" dirty="0">
+              <a:rPr lang="en-US" sz="2000" b="1" dirty="0">
                 <a:solidFill>
                   <a:srgbClr val="4F81BD"/>
                 </a:solidFill>
@@ -4082,7 +4129,7 @@
               </a:rPr>
               <a:t>The load-bearing wall of the whole course</a:t>
             </a:r>
-            <a:endParaRPr lang="en-US" sz="1600" dirty="0"/>
+            <a:endParaRPr lang="en-US" sz="2800" dirty="0"/>
           </a:p>
         </p:txBody>
       </p:sp>
@@ -4094,8 +4141,8 @@
         </p:nvSpPr>
         <p:spPr>
           <a:xfrm>
-            <a:off x="365760" y="1188720"/>
-            <a:ext cx="8412480" cy="960120"/>
+            <a:off x="365760" y="1090246"/>
+            <a:ext cx="8412480" cy="1195754"/>
           </a:xfrm>
           <a:prstGeom prst="rect">
             <a:avLst/>
@@ -4107,25 +4154,68 @@
           <a:bodyPr wrap="square" lIns="0" tIns="0" rIns="0" bIns="0" rtlCol="0" anchor="t"/>
           <a:lstStyle/>
           <a:p>
-            <a:pPr algn="l" indent="0" marL="0">
+            <a:pPr marL="0" indent="0" algn="l">
               <a:buNone/>
             </a:pPr>
             <a:r>
-              <a:rPr lang="en-US" sz="1600" dirty="0">
-                <a:solidFill>
-                  <a:srgbClr val="000000"/>
-                </a:solidFill>
-                <a:latin typeface="Arial" pitchFamily="34" charset="0"/>
-                <a:ea typeface="Arial" pitchFamily="34" charset="-122"/>
-                <a:cs typeface="Arial" pitchFamily="34" charset="-120"/>
-              </a:rPr>
-              <a:t>Everything ahead of us — the covenant tests (Unit III), the living sacrifice, church order, the commission — describes </a:t>
-            </a:r>
-            <a:pPr algn="l" indent="0" marL="0">
-              <a:buNone/>
-            </a:pPr>
-            <a:r>
-              <a:rPr lang="en-US" sz="1600" b="1" dirty="0">
+              <a:rPr lang="en-US" sz="2000" dirty="0">
+                <a:solidFill>
+                  <a:srgbClr val="000000"/>
+                </a:solidFill>
+                <a:latin typeface="Arial" pitchFamily="34" charset="0"/>
+                <a:ea typeface="Arial" pitchFamily="34" charset="-122"/>
+                <a:cs typeface="Arial" pitchFamily="34" charset="-120"/>
+              </a:rPr>
+              <a:t>Everything ahead of us </a:t>
+            </a:r>
+            <a:r>
+              <a:rPr lang="en-US" sz="2000" dirty="0">
+                <a:solidFill>
+                  <a:srgbClr val="000000"/>
+                </a:solidFill>
+                <a:latin typeface="Arial" pitchFamily="34" charset="0"/>
+                <a:ea typeface="Arial" pitchFamily="34" charset="-122"/>
+                <a:cs typeface="Arial" pitchFamily="34" charset="-120"/>
+                <a:sym typeface="Wingdings" pitchFamily="2" charset="2"/>
+              </a:rPr>
+              <a:t> </a:t>
+            </a:r>
+            <a:r>
+              <a:rPr lang="en-US" sz="2000" dirty="0">
+                <a:solidFill>
+                  <a:srgbClr val="000000"/>
+                </a:solidFill>
+                <a:latin typeface="Arial" pitchFamily="34" charset="0"/>
+                <a:ea typeface="Arial" pitchFamily="34" charset="-122"/>
+                <a:cs typeface="Arial" pitchFamily="34" charset="-120"/>
+              </a:rPr>
+              <a:t>the covenant tests (Unit III), the living sacrifice, church order, the commission </a:t>
+            </a:r>
+            <a:r>
+              <a:rPr lang="en-US" sz="2000" dirty="0">
+                <a:solidFill>
+                  <a:srgbClr val="000000"/>
+                </a:solidFill>
+                <a:latin typeface="Arial" pitchFamily="34" charset="0"/>
+                <a:ea typeface="Arial" pitchFamily="34" charset="-122"/>
+                <a:cs typeface="Arial" pitchFamily="34" charset="-120"/>
+                <a:sym typeface="Wingdings" pitchFamily="2" charset="2"/>
+              </a:rPr>
+              <a:t></a:t>
+            </a:r>
+            <a:r>
+              <a:rPr lang="en-US" sz="2000" dirty="0">
+                <a:solidFill>
+                  <a:srgbClr val="000000"/>
+                </a:solidFill>
+                <a:latin typeface="Arial" pitchFamily="34" charset="0"/>
+                <a:ea typeface="Arial" pitchFamily="34" charset="-122"/>
+                <a:cs typeface="Arial" pitchFamily="34" charset="-120"/>
+              </a:rPr>
+              <a:t> describes </a:t>
+            </a:r>
+            <a:r>
+              <a:rPr lang="en-US" sz="2000" b="1" dirty="0">
                 <a:solidFill>
                   <a:srgbClr val="1F497D"/>
                 </a:solidFill>
@@ -4136,11 +4226,8 @@
               <a:t>obedience.
 </a:t>
             </a:r>
-            <a:pPr algn="l" indent="0" marL="0">
-              <a:buNone/>
-            </a:pPr>
-            <a:r>
-              <a:rPr lang="en-US" sz="1500" dirty="0">
+            <a:r>
+              <a:rPr lang="en-US" dirty="0">
                 <a:solidFill>
                   <a:srgbClr val="000000"/>
                 </a:solidFill>
@@ -4150,7 +4237,7 @@
               </a:rPr>
               <a:t>If we place this week wrong, the whole course is heard as: earn your standing with God.</a:t>
             </a:r>
-            <a:endParaRPr lang="en-US" sz="1600" dirty="0"/>
+            <a:endParaRPr lang="en-US" sz="2000" dirty="0"/>
           </a:p>
         </p:txBody>
       </p:sp>
@@ -4162,8 +4249,8 @@
         </p:nvSpPr>
         <p:spPr>
           <a:xfrm>
-            <a:off x="365760" y="2331720"/>
-            <a:ext cx="8412480" cy="868680"/>
+            <a:off x="365760" y="2489278"/>
+            <a:ext cx="8412480" cy="749808"/>
           </a:xfrm>
           <a:prstGeom prst="rect">
             <a:avLst/>
@@ -4175,10 +4262,21 @@
           <a:bodyPr wrap="square" lIns="0" tIns="0" rIns="0" bIns="0" rtlCol="0" anchor="t"/>
           <a:lstStyle/>
           <a:p>
-            <a:pPr algn="l" indent="0" marL="0">
+            <a:pPr marL="0" indent="0" algn="l">
               <a:buNone/>
             </a:pPr>
             <a:r>
+              <a:rPr lang="en-US" dirty="0">
+                <a:solidFill>
+                  <a:srgbClr val="000000"/>
+                </a:solidFill>
+                <a:latin typeface="Arial" pitchFamily="34" charset="0"/>
+                <a:ea typeface="Arial" pitchFamily="34" charset="-122"/>
+                <a:cs typeface="Arial" pitchFamily="34" charset="-120"/>
+              </a:rPr>
+              <a:t>So, hear it now, and hear it at Weeks 7, 9, and 12:</a:t>
+            </a:r>
+            <a:r>
               <a:rPr lang="en-US" sz="1500" dirty="0">
                 <a:solidFill>
                   <a:srgbClr val="000000"/>
@@ -4187,12 +4285,9 @@
                 <a:ea typeface="Arial" pitchFamily="34" charset="-122"/>
                 <a:cs typeface="Arial" pitchFamily="34" charset="-120"/>
               </a:rPr>
-              <a:t>So hear it now, and hear it at Weeks 7, 9, and 12:
+              <a:t>
 </a:t>
             </a:r>
-            <a:pPr algn="l" indent="0" marL="0">
-              <a:buNone/>
-            </a:pPr>
             <a:r>
               <a:rPr lang="en-US" sz="2200" b="1" u="sng" dirty="0">
                 <a:solidFill>
@@ -4202,7 +4297,30 @@
                 <a:ea typeface="Arial" pitchFamily="34" charset="-122"/>
                 <a:cs typeface="Arial" pitchFamily="34" charset="-120"/>
               </a:rPr>
-              <a:t>Obedience is the SHAPE of faith — not its PRICE.</a:t>
+              <a:t>Obedience is the SHAPE of faith </a:t>
+            </a:r>
+            <a:r>
+              <a:rPr lang="en-US" sz="2200" b="1" u="sng" dirty="0">
+                <a:solidFill>
+                  <a:srgbClr val="1F497D"/>
+                </a:solidFill>
+                <a:latin typeface="Arial" pitchFamily="34" charset="0"/>
+                <a:ea typeface="Arial" pitchFamily="34" charset="-122"/>
+                <a:cs typeface="Arial" pitchFamily="34" charset="-120"/>
+                <a:sym typeface="Wingdings" pitchFamily="2" charset="2"/>
+              </a:rPr>
+              <a:t></a:t>
+            </a:r>
+            <a:r>
+              <a:rPr lang="en-US" sz="2200" b="1" u="sng" dirty="0">
+                <a:solidFill>
+                  <a:srgbClr val="1F497D"/>
+                </a:solidFill>
+                <a:latin typeface="Arial" pitchFamily="34" charset="0"/>
+                <a:ea typeface="Arial" pitchFamily="34" charset="-122"/>
+                <a:cs typeface="Arial" pitchFamily="34" charset="-120"/>
+              </a:rPr>
+              <a:t> not its PRICE.</a:t>
             </a:r>
             <a:endParaRPr lang="en-US" sz="1600" dirty="0"/>
           </a:p>
@@ -4216,117 +4334,7 @@
         </p:nvSpPr>
         <p:spPr>
           <a:xfrm>
-            <a:off x="365760" y="3383280"/>
-            <a:ext cx="8412480" cy="1234440"/>
-          </a:xfrm>
-          <a:prstGeom prst="rect">
-            <a:avLst/>
-          </a:prstGeom>
-          <a:noFill/>
-          <a:ln/>
-        </p:spPr>
-        <p:txBody>
-          <a:bodyPr wrap="square" lIns="0" tIns="0" rIns="0" bIns="0" rtlCol="0" anchor="t"/>
-          <a:lstStyle/>
-          <a:p>
-            <a:pPr algn="l" indent="0" marL="0">
-              <a:buNone/>
-            </a:pPr>
-            <a:r>
-              <a:rPr lang="en-US" sz="1500" b="1" dirty="0">
-                <a:solidFill>
-                  <a:srgbClr val="000000"/>
-                </a:solidFill>
-                <a:latin typeface="Arial" pitchFamily="34" charset="0"/>
-                <a:ea typeface="Arial" pitchFamily="34" charset="-122"/>
-                <a:cs typeface="Arial" pitchFamily="34" charset="-120"/>
-              </a:rPr>
-              <a:t>The pattern is fixed in the exodus itself:
-</a:t>
-            </a:r>
-            <a:pPr algn="l" indent="0" marL="0">
-              <a:buNone/>
-            </a:pPr>
-            <a:r>
-              <a:rPr lang="en-US" sz="1500" dirty="0">
-                <a:solidFill>
-                  <a:srgbClr val="000000"/>
-                </a:solidFill>
-                <a:latin typeface="Arial" pitchFamily="34" charset="0"/>
-                <a:ea typeface="Arial" pitchFamily="34" charset="-122"/>
-                <a:cs typeface="Arial" pitchFamily="34" charset="-120"/>
-              </a:rPr>
-              <a:t>God redeemed Israel from Egypt — by blood and grace — </a:t>
-            </a:r>
-            <a:pPr algn="l" indent="0" marL="0">
-              <a:buNone/>
-            </a:pPr>
-            <a:r>
-              <a:rPr lang="en-US" sz="1500" b="1" i="1" dirty="0">
-                <a:solidFill>
-                  <a:srgbClr val="B0413E"/>
-                </a:solidFill>
-                <a:latin typeface="Arial" pitchFamily="34" charset="0"/>
-                <a:ea typeface="Arial" pitchFamily="34" charset="-122"/>
-                <a:cs typeface="Arial" pitchFamily="34" charset="-120"/>
-              </a:rPr>
-              <a:t>and THEN</a:t>
-            </a:r>
-            <a:pPr algn="l" indent="0" marL="0">
-              <a:buNone/>
-            </a:pPr>
-            <a:r>
-              <a:rPr lang="en-US" sz="1500" dirty="0">
-                <a:solidFill>
-                  <a:srgbClr val="000000"/>
-                </a:solidFill>
-                <a:latin typeface="Arial" pitchFamily="34" charset="0"/>
-                <a:ea typeface="Arial" pitchFamily="34" charset="-122"/>
-                <a:cs typeface="Arial" pitchFamily="34" charset="-120"/>
-              </a:rPr>
-              <a:t> brought them to the wilderness to be tested (Deut 8:2). The tests came </a:t>
-            </a:r>
-            <a:pPr algn="l" indent="0" marL="0">
-              <a:buNone/>
-            </a:pPr>
-            <a:r>
-              <a:rPr lang="en-US" sz="1500" b="1" dirty="0">
-                <a:solidFill>
-                  <a:srgbClr val="1F497D"/>
-                </a:solidFill>
-                <a:latin typeface="Arial" pitchFamily="34" charset="0"/>
-                <a:ea typeface="Arial" pitchFamily="34" charset="-122"/>
-                <a:cs typeface="Arial" pitchFamily="34" charset="-120"/>
-              </a:rPr>
-              <a:t>after</a:t>
-            </a:r>
-            <a:pPr algn="l" indent="0" marL="0">
-              <a:buNone/>
-            </a:pPr>
-            <a:r>
-              <a:rPr lang="en-US" sz="1500" dirty="0">
-                <a:solidFill>
-                  <a:srgbClr val="000000"/>
-                </a:solidFill>
-                <a:latin typeface="Arial" pitchFamily="34" charset="0"/>
-                <a:ea typeface="Arial" pitchFamily="34" charset="-122"/>
-                <a:cs typeface="Arial" pitchFamily="34" charset="-120"/>
-              </a:rPr>
-              <a:t> the rescue — never to accomplish it. Law at Sinai followed redemption from Egypt; it did not buy it.</a:t>
-            </a:r>
-            <a:endParaRPr lang="en-US" sz="1600" dirty="0"/>
-          </a:p>
-        </p:txBody>
-      </p:sp>
-      <p:sp>
-        <p:nvSpPr>
-          <p:cNvPr id="7" name="w4"/>
-          <p:cNvSpPr txBox="1"/>
-          <p:nvPr/>
-        </p:nvSpPr>
-        <p:spPr>
-          <a:xfrm>
-            <a:off x="365760" y="4754880"/>
+            <a:off x="365760" y="3429000"/>
             <a:ext cx="8412480" cy="1417320"/>
           </a:xfrm>
           <a:prstGeom prst="rect">
@@ -4339,60 +4347,281 @@
           <a:bodyPr wrap="square" lIns="0" tIns="0" rIns="0" bIns="0" rtlCol="0" anchor="t"/>
           <a:lstStyle/>
           <a:p>
-            <a:pPr algn="l" indent="0" marL="0">
+            <a:pPr algn="l"/>
+            <a:r>
+              <a:rPr lang="en-US" b="1" dirty="0">
+                <a:solidFill>
+                  <a:srgbClr val="000000"/>
+                </a:solidFill>
+                <a:latin typeface="Arial" pitchFamily="34" charset="0"/>
+                <a:ea typeface="Arial" pitchFamily="34" charset="-122"/>
+                <a:cs typeface="Arial" pitchFamily="34" charset="-120"/>
+              </a:rPr>
+              <a:t>The pattern is fixed in the exodus itself:</a:t>
+            </a:r>
+          </a:p>
+          <a:p>
+            <a:pPr marL="285750" indent="-285750" algn="l">
+              <a:buFont typeface="Arial" panose="020B0604020202020204" pitchFamily="34" charset="0"/>
+              <a:buChar char="•"/>
+            </a:pPr>
+            <a:r>
+              <a:rPr lang="en-US" dirty="0">
+                <a:solidFill>
+                  <a:srgbClr val="000000"/>
+                </a:solidFill>
+                <a:latin typeface="Arial" pitchFamily="34" charset="0"/>
+                <a:ea typeface="Arial" pitchFamily="34" charset="-122"/>
+                <a:cs typeface="Arial" pitchFamily="34" charset="-120"/>
+              </a:rPr>
+              <a:t>God redeemed Israel from Egypt </a:t>
+            </a:r>
+            <a:r>
+              <a:rPr lang="en-US" dirty="0">
+                <a:solidFill>
+                  <a:srgbClr val="000000"/>
+                </a:solidFill>
+                <a:latin typeface="Arial" pitchFamily="34" charset="0"/>
+                <a:ea typeface="Arial" pitchFamily="34" charset="-122"/>
+                <a:cs typeface="Arial" pitchFamily="34" charset="-120"/>
+                <a:sym typeface="Wingdings" pitchFamily="2" charset="2"/>
+              </a:rPr>
+              <a:t></a:t>
+            </a:r>
+            <a:r>
+              <a:rPr lang="en-US" dirty="0">
+                <a:solidFill>
+                  <a:srgbClr val="000000"/>
+                </a:solidFill>
+                <a:latin typeface="Arial" pitchFamily="34" charset="0"/>
+                <a:ea typeface="Arial" pitchFamily="34" charset="-122"/>
+                <a:cs typeface="Arial" pitchFamily="34" charset="-120"/>
+              </a:rPr>
+              <a:t> by blood and grace </a:t>
+            </a:r>
+            <a:r>
+              <a:rPr lang="en-US" dirty="0">
+                <a:solidFill>
+                  <a:srgbClr val="000000"/>
+                </a:solidFill>
+                <a:latin typeface="Arial" pitchFamily="34" charset="0"/>
+                <a:ea typeface="Arial" pitchFamily="34" charset="-122"/>
+                <a:cs typeface="Arial" pitchFamily="34" charset="-120"/>
+                <a:sym typeface="Wingdings" pitchFamily="2" charset="2"/>
+              </a:rPr>
+              <a:t></a:t>
+            </a:r>
+            <a:r>
+              <a:rPr lang="en-US" dirty="0">
+                <a:solidFill>
+                  <a:srgbClr val="000000"/>
+                </a:solidFill>
+                <a:latin typeface="Arial" pitchFamily="34" charset="0"/>
+                <a:ea typeface="Arial" pitchFamily="34" charset="-122"/>
+                <a:cs typeface="Arial" pitchFamily="34" charset="-120"/>
+              </a:rPr>
+              <a:t> </a:t>
+            </a:r>
+            <a:r>
+              <a:rPr lang="en-US" b="1" i="1" dirty="0">
+                <a:solidFill>
+                  <a:srgbClr val="B0413E"/>
+                </a:solidFill>
+                <a:latin typeface="Arial" pitchFamily="34" charset="0"/>
+                <a:ea typeface="Arial" pitchFamily="34" charset="-122"/>
+                <a:cs typeface="Arial" pitchFamily="34" charset="-120"/>
+              </a:rPr>
+              <a:t>and THEN</a:t>
+            </a:r>
+            <a:r>
+              <a:rPr lang="en-US" dirty="0">
+                <a:solidFill>
+                  <a:srgbClr val="000000"/>
+                </a:solidFill>
+                <a:latin typeface="Arial" pitchFamily="34" charset="0"/>
+                <a:ea typeface="Arial" pitchFamily="34" charset="-122"/>
+                <a:cs typeface="Arial" pitchFamily="34" charset="-120"/>
+              </a:rPr>
+              <a:t> brought them to the wilderness to be tested (Deut 8:2). </a:t>
+            </a:r>
+          </a:p>
+          <a:p>
+            <a:pPr marL="285750" indent="-285750" algn="l">
+              <a:buFont typeface="Arial" panose="020B0604020202020204" pitchFamily="34" charset="0"/>
+              <a:buChar char="•"/>
+            </a:pPr>
+            <a:r>
+              <a:rPr lang="en-US" dirty="0">
+                <a:solidFill>
+                  <a:srgbClr val="000000"/>
+                </a:solidFill>
+                <a:latin typeface="Arial" pitchFamily="34" charset="0"/>
+                <a:ea typeface="Arial" pitchFamily="34" charset="-122"/>
+                <a:cs typeface="Arial" pitchFamily="34" charset="-120"/>
+              </a:rPr>
+              <a:t>The tests came </a:t>
+            </a:r>
+            <a:r>
+              <a:rPr lang="en-US" b="1" u="sng" dirty="0">
+                <a:solidFill>
+                  <a:srgbClr val="1F497D"/>
+                </a:solidFill>
+                <a:latin typeface="Arial" pitchFamily="34" charset="0"/>
+                <a:ea typeface="Arial" pitchFamily="34" charset="-122"/>
+                <a:cs typeface="Arial" pitchFamily="34" charset="-120"/>
+              </a:rPr>
+              <a:t>after</a:t>
+            </a:r>
+            <a:r>
+              <a:rPr lang="en-US" dirty="0">
+                <a:solidFill>
+                  <a:srgbClr val="000000"/>
+                </a:solidFill>
+                <a:latin typeface="Arial" pitchFamily="34" charset="0"/>
+                <a:ea typeface="Arial" pitchFamily="34" charset="-122"/>
+                <a:cs typeface="Arial" pitchFamily="34" charset="-120"/>
+              </a:rPr>
+              <a:t> the rescue </a:t>
+            </a:r>
+            <a:r>
+              <a:rPr lang="en-US" dirty="0">
+                <a:solidFill>
+                  <a:srgbClr val="000000"/>
+                </a:solidFill>
+                <a:latin typeface="Arial" pitchFamily="34" charset="0"/>
+                <a:ea typeface="Arial" pitchFamily="34" charset="-122"/>
+                <a:cs typeface="Arial" pitchFamily="34" charset="-120"/>
+                <a:sym typeface="Wingdings" pitchFamily="2" charset="2"/>
+              </a:rPr>
+              <a:t></a:t>
+            </a:r>
+            <a:r>
+              <a:rPr lang="en-US" dirty="0">
+                <a:solidFill>
+                  <a:srgbClr val="000000"/>
+                </a:solidFill>
+                <a:latin typeface="Arial" pitchFamily="34" charset="0"/>
+                <a:ea typeface="Arial" pitchFamily="34" charset="-122"/>
+                <a:cs typeface="Arial" pitchFamily="34" charset="-120"/>
+              </a:rPr>
+              <a:t> never to accomplish it.  </a:t>
+            </a:r>
+          </a:p>
+          <a:p>
+            <a:pPr marL="285750" indent="-285750" algn="l">
+              <a:buFont typeface="Arial" panose="020B0604020202020204" pitchFamily="34" charset="0"/>
+              <a:buChar char="•"/>
+            </a:pPr>
+            <a:r>
+              <a:rPr lang="en-US" dirty="0">
+                <a:solidFill>
+                  <a:srgbClr val="000000"/>
+                </a:solidFill>
+                <a:latin typeface="Arial" pitchFamily="34" charset="0"/>
+                <a:ea typeface="Arial" pitchFamily="34" charset="-122"/>
+                <a:cs typeface="Arial" pitchFamily="34" charset="-120"/>
+              </a:rPr>
+              <a:t>Law at Sinai followed redemption from Egypt; it did not buy it.</a:t>
+            </a:r>
+            <a:endParaRPr lang="en-US" sz="2000" dirty="0"/>
+          </a:p>
+        </p:txBody>
+      </p:sp>
+      <p:sp>
+        <p:nvSpPr>
+          <p:cNvPr id="7" name="w4"/>
+          <p:cNvSpPr txBox="1"/>
+          <p:nvPr/>
+        </p:nvSpPr>
+        <p:spPr>
+          <a:xfrm>
+            <a:off x="365760" y="5036234"/>
+            <a:ext cx="8412480" cy="1565533"/>
+          </a:xfrm>
+          <a:prstGeom prst="rect">
+            <a:avLst/>
+          </a:prstGeom>
+          <a:noFill/>
+          <a:ln/>
+        </p:spPr>
+        <p:txBody>
+          <a:bodyPr wrap="square" lIns="0" tIns="0" rIns="0" bIns="0" rtlCol="0" anchor="t"/>
+          <a:lstStyle/>
+          <a:p>
+            <a:pPr marL="0" indent="0" algn="l">
               <a:buNone/>
             </a:pPr>
             <a:r>
-              <a:rPr lang="en-US" sz="1450" b="1" dirty="0">
-                <a:solidFill>
-                  <a:srgbClr val="000000"/>
-                </a:solidFill>
-                <a:latin typeface="Arial" pitchFamily="34" charset="0"/>
-                <a:ea typeface="Arial" pitchFamily="34" charset="-122"/>
-                <a:cs typeface="Arial" pitchFamily="34" charset="-120"/>
-              </a:rPr>
-              <a:t>Same order in the New Covenant — grace first, then the life it produces:
-</a:t>
-            </a:r>
-            <a:pPr algn="l" indent="0" marL="0">
-              <a:buNone/>
-            </a:pPr>
-            <a:r>
-              <a:rPr lang="en-US" sz="1450" b="1" i="1" dirty="0">
-                <a:solidFill>
-                  <a:srgbClr val="000000"/>
-                </a:solidFill>
-                <a:latin typeface="Arial" pitchFamily="34" charset="0"/>
-                <a:ea typeface="Arial" pitchFamily="34" charset="-122"/>
-                <a:cs typeface="Arial" pitchFamily="34" charset="-120"/>
-              </a:rPr>
-              <a:t>“By grace you are saved through faith, and this is not from yourselves; it is the gift of God; it is not from works… For we are his workmanship, created in Christ Jesus for good works.” </a:t>
-            </a:r>
-            <a:pPr algn="l" indent="0" marL="0">
-              <a:buNone/>
-            </a:pPr>
-            <a:r>
-              <a:rPr lang="en-US" sz="1350" b="1" dirty="0">
-                <a:solidFill>
-                  <a:srgbClr val="000000"/>
-                </a:solidFill>
-                <a:latin typeface="Arial" pitchFamily="34" charset="0"/>
-                <a:ea typeface="Arial" pitchFamily="34" charset="-122"/>
-                <a:cs typeface="Arial" pitchFamily="34" charset="-120"/>
-              </a:rPr>
-              <a:t>(Ephesians 2:8–10)</a:t>
-            </a:r>
-            <a:pPr algn="l" indent="0" marL="0">
-              <a:buNone/>
-            </a:pPr>
-            <a:endParaRPr lang="en-US" sz="1600" dirty="0"/>
+              <a:rPr lang="en-US" b="1" dirty="0">
+                <a:solidFill>
+                  <a:srgbClr val="000000"/>
+                </a:solidFill>
+                <a:latin typeface="Arial" pitchFamily="34" charset="0"/>
+                <a:ea typeface="Arial" pitchFamily="34" charset="-122"/>
+                <a:cs typeface="Arial" pitchFamily="34" charset="-120"/>
+              </a:rPr>
+              <a:t>Same order in the New Covenant </a:t>
+            </a:r>
+            <a:r>
+              <a:rPr lang="en-US" b="1" dirty="0">
+                <a:solidFill>
+                  <a:srgbClr val="000000"/>
+                </a:solidFill>
+                <a:latin typeface="Arial" pitchFamily="34" charset="0"/>
+                <a:ea typeface="Arial" pitchFamily="34" charset="-122"/>
+                <a:cs typeface="Arial" pitchFamily="34" charset="-120"/>
+                <a:sym typeface="Wingdings" pitchFamily="2" charset="2"/>
+              </a:rPr>
+              <a:t></a:t>
+            </a:r>
+            <a:r>
+              <a:rPr lang="en-US" b="1" dirty="0">
+                <a:solidFill>
+                  <a:srgbClr val="000000"/>
+                </a:solidFill>
+                <a:latin typeface="Arial" pitchFamily="34" charset="0"/>
+                <a:ea typeface="Arial" pitchFamily="34" charset="-122"/>
+                <a:cs typeface="Arial" pitchFamily="34" charset="-120"/>
+              </a:rPr>
+              <a:t> grace first, then the life it produces:</a:t>
+            </a:r>
           </a:p>
           <a:p>
-            <a:pPr algn="l" indent="0" marL="0">
-              <a:buNone/>
+            <a:pPr marL="285750" indent="-285750" algn="l">
+              <a:buFont typeface="Arial" panose="020B0604020202020204" pitchFamily="34" charset="0"/>
+              <a:buChar char="•"/>
             </a:pPr>
             <a:r>
-              <a:rPr lang="en-US" sz="1500" b="1" dirty="0">
+              <a:rPr lang="en-US" b="1" i="1" dirty="0">
+                <a:solidFill>
+                  <a:srgbClr val="000000"/>
+                </a:solidFill>
+                <a:latin typeface="Arial" pitchFamily="34" charset="0"/>
+                <a:ea typeface="Arial" pitchFamily="34" charset="-122"/>
+                <a:cs typeface="Arial" pitchFamily="34" charset="-120"/>
+              </a:rPr>
+              <a:t>“By grace you are saved through faith, and this is not from yourselves; it is the gift of God; it is not from works… For we are his workmanship, created in Christ Jesus for good works.” </a:t>
+            </a:r>
+            <a:r>
+              <a:rPr lang="en-US" sz="1600" b="1" dirty="0">
+                <a:solidFill>
+                  <a:srgbClr val="000000"/>
+                </a:solidFill>
+                <a:latin typeface="Arial" pitchFamily="34" charset="0"/>
+                <a:ea typeface="Arial" pitchFamily="34" charset="-122"/>
+                <a:cs typeface="Arial" pitchFamily="34" charset="-120"/>
+              </a:rPr>
+              <a:t>(Ephesians 2:8–10)</a:t>
+            </a:r>
+            <a:endParaRPr lang="en-US" sz="2000" dirty="0"/>
+          </a:p>
+          <a:p>
+            <a:pPr marL="285750" indent="-285750" algn="l">
+              <a:buFont typeface="Arial" panose="020B0604020202020204" pitchFamily="34" charset="0"/>
+              <a:buChar char="•"/>
+            </a:pPr>
+            <a:r>
+              <a:rPr lang="en-US" b="1" dirty="0">
                 <a:solidFill>
                   <a:srgbClr val="1F497D"/>
                 </a:solidFill>
@@ -4400,9 +4629,32 @@
                 <a:ea typeface="Arial" pitchFamily="34" charset="-122"/>
                 <a:cs typeface="Arial" pitchFamily="34" charset="-120"/>
               </a:rPr>
-              <a:t>Saved for good works — not by them. Mercy first. Altar second.</a:t>
-            </a:r>
-            <a:endParaRPr lang="en-US" sz="1600" dirty="0"/>
+              <a:t>Saved for good works </a:t>
+            </a:r>
+            <a:r>
+              <a:rPr lang="en-US" b="1" dirty="0">
+                <a:solidFill>
+                  <a:srgbClr val="1F497D"/>
+                </a:solidFill>
+                <a:latin typeface="Arial" pitchFamily="34" charset="0"/>
+                <a:ea typeface="Arial" pitchFamily="34" charset="-122"/>
+                <a:cs typeface="Arial" pitchFamily="34" charset="-120"/>
+                <a:sym typeface="Wingdings" pitchFamily="2" charset="2"/>
+              </a:rPr>
+              <a:t></a:t>
+            </a:r>
+            <a:r>
+              <a:rPr lang="en-US" b="1" dirty="0">
+                <a:solidFill>
+                  <a:srgbClr val="1F497D"/>
+                </a:solidFill>
+                <a:latin typeface="Arial" pitchFamily="34" charset="0"/>
+                <a:ea typeface="Arial" pitchFamily="34" charset="-122"/>
+                <a:cs typeface="Arial" pitchFamily="34" charset="-120"/>
+              </a:rPr>
+              <a:t> not by them. Mercy first. Altar second (Rom 12)</a:t>
+            </a:r>
+            <a:endParaRPr lang="en-US" sz="2000" dirty="0"/>
           </a:p>
         </p:txBody>
       </p:sp>
@@ -4420,26 +4672,26 @@
               <p:cTn id="2" dur="indefinite" nodeType="mainSeq">
                 <p:childTnLst>
                   <p:par>
-                    <p:cTn id="7" fill="hold">
+                    <p:cTn id="3" fill="hold">
                       <p:stCondLst>
                         <p:cond delay="indefinite"/>
                       </p:stCondLst>
                       <p:childTnLst>
                         <p:par>
-                          <p:cTn id="8" fill="hold">
+                          <p:cTn id="4" fill="hold">
                             <p:stCondLst>
                               <p:cond delay="0"/>
                             </p:stCondLst>
                             <p:childTnLst>
                               <p:par>
-                                <p:cTn id="3" presetID="42" presetClass="entr" presetSubtype="0" fill="hold" grpId="0" nodeType="clickEffect">
+                                <p:cTn id="5" presetID="42" presetClass="entr" presetSubtype="0" fill="hold" nodeType="clickEffect">
                                   <p:stCondLst>
                                     <p:cond delay="0"/>
                                   </p:stCondLst>
                                   <p:childTnLst>
                                     <p:set>
                                       <p:cBhvr>
-                                        <p:cTn id="4" dur="1" fill="hold">
+                                        <p:cTn id="6" dur="1" fill="hold">
                                           <p:stCondLst>
                                             <p:cond delay="0"/>
                                           </p:stCondLst>
@@ -4457,7 +4709,7 @@
                                     </p:set>
                                     <p:animEffect transition="in" filter="fade">
                                       <p:cBhvr>
-                                        <p:cTn id="5" dur="1000"/>
+                                        <p:cTn id="7" dur="1000"/>
                                         <p:tgtEl>
                                           <p:spTgt spid="4"/>
                                         </p:tgtEl>
@@ -4465,7 +4717,7 @@
                                     </p:animEffect>
                                     <p:anim calcmode="lin" valueType="num">
                                       <p:cBhvr>
-                                        <p:cTn id="6" dur="1000" fill="hold"/>
+                                        <p:cTn id="8" dur="1000" fill="hold"/>
                                         <p:tgtEl>
                                           <p:spTgt spid="4"/>
                                         </p:tgtEl>
@@ -4496,26 +4748,26 @@
                     </p:cTn>
                   </p:par>
                   <p:par>
-                    <p:cTn id="13" fill="hold">
+                    <p:cTn id="9" fill="hold">
                       <p:stCondLst>
                         <p:cond delay="indefinite"/>
                       </p:stCondLst>
                       <p:childTnLst>
                         <p:par>
-                          <p:cTn id="14" fill="hold">
+                          <p:cTn id="10" fill="hold">
                             <p:stCondLst>
                               <p:cond delay="0"/>
                             </p:stCondLst>
                             <p:childTnLst>
                               <p:par>
-                                <p:cTn id="9" presetID="42" presetClass="entr" presetSubtype="0" fill="hold" grpId="0" nodeType="clickEffect">
+                                <p:cTn id="11" presetID="42" presetClass="entr" presetSubtype="0" fill="hold" nodeType="clickEffect">
                                   <p:stCondLst>
                                     <p:cond delay="0"/>
                                   </p:stCondLst>
                                   <p:childTnLst>
                                     <p:set>
                                       <p:cBhvr>
-                                        <p:cTn id="10" dur="1" fill="hold">
+                                        <p:cTn id="12" dur="1" fill="hold">
                                           <p:stCondLst>
                                             <p:cond delay="0"/>
                                           </p:stCondLst>
@@ -4533,7 +4785,7 @@
                                     </p:set>
                                     <p:animEffect transition="in" filter="fade">
                                       <p:cBhvr>
-                                        <p:cTn id="11" dur="1000"/>
+                                        <p:cTn id="13" dur="1000"/>
                                         <p:tgtEl>
                                           <p:spTgt spid="5"/>
                                         </p:tgtEl>
@@ -4541,7 +4793,7 @@
                                     </p:animEffect>
                                     <p:anim calcmode="lin" valueType="num">
                                       <p:cBhvr>
-                                        <p:cTn id="12" dur="1000" fill="hold"/>
+                                        <p:cTn id="14" dur="1000" fill="hold"/>
                                         <p:tgtEl>
                                           <p:spTgt spid="5"/>
                                         </p:tgtEl>
@@ -4572,26 +4824,26 @@
                     </p:cTn>
                   </p:par>
                   <p:par>
-                    <p:cTn id="19" fill="hold">
+                    <p:cTn id="15" fill="hold">
                       <p:stCondLst>
                         <p:cond delay="indefinite"/>
                       </p:stCondLst>
                       <p:childTnLst>
                         <p:par>
-                          <p:cTn id="20" fill="hold">
+                          <p:cTn id="16" fill="hold">
                             <p:stCondLst>
                               <p:cond delay="0"/>
                             </p:stCondLst>
                             <p:childTnLst>
                               <p:par>
-                                <p:cTn id="15" presetID="42" presetClass="entr" presetSubtype="0" fill="hold" grpId="0" nodeType="clickEffect">
+                                <p:cTn id="17" presetID="42" presetClass="entr" presetSubtype="0" fill="hold" nodeType="clickEffect">
                                   <p:stCondLst>
                                     <p:cond delay="0"/>
                                   </p:stCondLst>
                                   <p:childTnLst>
                                     <p:set>
                                       <p:cBhvr>
-                                        <p:cTn id="16" dur="1" fill="hold">
+                                        <p:cTn id="18" dur="1" fill="hold">
                                           <p:stCondLst>
                                             <p:cond delay="0"/>
                                           </p:stCondLst>
@@ -4609,7 +4861,7 @@
                                     </p:set>
                                     <p:animEffect transition="in" filter="fade">
                                       <p:cBhvr>
-                                        <p:cTn id="17" dur="1000"/>
+                                        <p:cTn id="19" dur="1000"/>
                                         <p:tgtEl>
                                           <p:spTgt spid="6"/>
                                         </p:tgtEl>
@@ -4617,7 +4869,7 @@
                                     </p:animEffect>
                                     <p:anim calcmode="lin" valueType="num">
                                       <p:cBhvr>
-                                        <p:cTn id="18" dur="1000" fill="hold"/>
+                                        <p:cTn id="20" dur="1000" fill="hold"/>
                                         <p:tgtEl>
                                           <p:spTgt spid="6"/>
                                         </p:tgtEl>
@@ -4648,26 +4900,26 @@
                     </p:cTn>
                   </p:par>
                   <p:par>
-                    <p:cTn id="25" fill="hold">
+                    <p:cTn id="21" fill="hold">
                       <p:stCondLst>
                         <p:cond delay="indefinite"/>
                       </p:stCondLst>
                       <p:childTnLst>
                         <p:par>
-                          <p:cTn id="26" fill="hold">
+                          <p:cTn id="22" fill="hold">
                             <p:stCondLst>
                               <p:cond delay="0"/>
                             </p:stCondLst>
                             <p:childTnLst>
                               <p:par>
-                                <p:cTn id="21" presetID="42" presetClass="entr" presetSubtype="0" fill="hold" grpId="0" nodeType="clickEffect">
+                                <p:cTn id="23" presetID="42" presetClass="entr" presetSubtype="0" fill="hold" nodeType="clickEffect">
                                   <p:stCondLst>
                                     <p:cond delay="0"/>
                                   </p:stCondLst>
                                   <p:childTnLst>
                                     <p:set>
                                       <p:cBhvr>
-                                        <p:cTn id="22" dur="1" fill="hold">
+                                        <p:cTn id="24" dur="1" fill="hold">
                                           <p:stCondLst>
                                             <p:cond delay="0"/>
                                           </p:stCondLst>
@@ -4685,7 +4937,7 @@
                                     </p:set>
                                     <p:animEffect transition="in" filter="fade">
                                       <p:cBhvr>
-                                        <p:cTn id="23" dur="1000"/>
+                                        <p:cTn id="25" dur="1000"/>
                                         <p:tgtEl>
                                           <p:spTgt spid="7"/>
                                         </p:tgtEl>
@@ -4693,7 +4945,7 @@
                                     </p:animEffect>
                                     <p:anim calcmode="lin" valueType="num">
                                       <p:cBhvr>
-                                        <p:cTn id="24" dur="1000" fill="hold"/>
+                                        <p:cTn id="26" dur="1000" fill="hold"/>
                                         <p:tgtEl>
                                           <p:spTgt spid="7"/>
                                         </p:tgtEl>
@@ -4786,7 +5038,7 @@
           <a:bodyPr wrap="square" lIns="0" tIns="0" rIns="0" bIns="0" rtlCol="0" anchor="t"/>
           <a:lstStyle/>
           <a:p>
-            <a:pPr algn="l" indent="0" marL="0">
+            <a:pPr marL="0" indent="0" algn="l">
               <a:buNone/>
             </a:pPr>
             <a:r>
@@ -4825,11 +5077,11 @@
           <a:bodyPr wrap="square" lIns="0" tIns="0" rIns="0" bIns="0" rtlCol="0" anchor="t"/>
           <a:lstStyle/>
           <a:p>
-            <a:pPr algn="l" indent="0" marL="0">
+            <a:pPr marL="0" indent="0" algn="l">
               <a:buNone/>
             </a:pPr>
             <a:r>
-              <a:rPr lang="en-US" sz="1300" b="1" dirty="0">
+              <a:rPr lang="en-US" sz="2000" b="1" dirty="0">
                 <a:solidFill>
                   <a:srgbClr val="4F81BD"/>
                 </a:solidFill>
@@ -4839,7 +5091,7 @@
               </a:rPr>
               <a:t>Why self-righteousness fails you either way</a:t>
             </a:r>
-            <a:endParaRPr lang="en-US" sz="1600" dirty="0"/>
+            <a:endParaRPr lang="en-US" sz="2800" dirty="0"/>
           </a:p>
         </p:txBody>
       </p:sp>
@@ -4851,7 +5103,7 @@
         </p:nvSpPr>
         <p:spPr>
           <a:xfrm>
-            <a:off x="640080" y="1463040"/>
+            <a:off x="640080" y="1175004"/>
             <a:ext cx="3291840" cy="1371600"/>
           </a:xfrm>
           <a:prstGeom prst="roundRect">
@@ -4869,6 +5121,13 @@
             <a:prstDash val="solid"/>
           </a:ln>
         </p:spPr>
+        <p:txBody>
+          <a:bodyPr/>
+          <a:lstStyle/>
+          <a:p>
+            <a:endParaRPr lang="en-US"/>
+          </a:p>
+        </p:txBody>
       </p:sp>
       <p:sp>
         <p:nvSpPr>
@@ -4878,7 +5137,7 @@
         </p:nvSpPr>
         <p:spPr>
           <a:xfrm>
-            <a:off x="777240" y="1600200"/>
+            <a:off x="777240" y="1312164"/>
             <a:ext cx="3017520" cy="1143000"/>
           </a:xfrm>
           <a:prstGeom prst="rect">
@@ -4891,11 +5150,11 @@
           <a:bodyPr wrap="square" lIns="0" tIns="0" rIns="0" bIns="0" rtlCol="0" anchor="ctr"/>
           <a:lstStyle/>
           <a:p>
-            <a:pPr algn="l" indent="0" marL="0">
+            <a:pPr marL="0" indent="0" algn="l">
               <a:buNone/>
             </a:pPr>
             <a:r>
-              <a:rPr lang="en-US" sz="1700" b="1" dirty="0">
+              <a:rPr lang="en-US" sz="2400" b="1" dirty="0">
                 <a:solidFill>
                   <a:srgbClr val="B0413E"/>
                 </a:solidFill>
@@ -4906,21 +5165,29 @@
               <a:t>PRIDE
 </a:t>
             </a:r>
-            <a:pPr algn="l" indent="0" marL="0">
-              <a:buNone/>
-            </a:pPr>
-            <a:r>
-              <a:rPr lang="en-US" sz="1300" dirty="0">
-                <a:solidFill>
-                  <a:srgbClr val="000000"/>
-                </a:solidFill>
-                <a:latin typeface="Arial" pitchFamily="34" charset="0"/>
-                <a:ea typeface="Arial" pitchFamily="34" charset="-122"/>
-                <a:cs typeface="Arial" pitchFamily="34" charset="-120"/>
-              </a:rPr>
-              <a:t>when the scorecard reads well: “I’m doing better than they are.”</a:t>
-            </a:r>
-            <a:endParaRPr lang="en-US" sz="1600" dirty="0"/>
+            <a:r>
+              <a:rPr lang="en-US" dirty="0">
+                <a:solidFill>
+                  <a:srgbClr val="000000"/>
+                </a:solidFill>
+                <a:latin typeface="Arial" pitchFamily="34" charset="0"/>
+                <a:ea typeface="Arial" pitchFamily="34" charset="-122"/>
+                <a:cs typeface="Arial" pitchFamily="34" charset="-120"/>
+              </a:rPr>
+              <a:t>when the scorecard reads well: </a:t>
+            </a:r>
+            <a:r>
+              <a:rPr lang="en-US" i="1" dirty="0">
+                <a:solidFill>
+                  <a:srgbClr val="000000"/>
+                </a:solidFill>
+                <a:latin typeface="Arial" pitchFamily="34" charset="0"/>
+                <a:ea typeface="Arial" pitchFamily="34" charset="-122"/>
+                <a:cs typeface="Arial" pitchFamily="34" charset="-120"/>
+              </a:rPr>
+              <a:t>“I’m doing better than they are.”</a:t>
+            </a:r>
+            <a:endParaRPr lang="en-US" sz="2400" i="1" dirty="0"/>
           </a:p>
         </p:txBody>
       </p:sp>
@@ -4932,7 +5199,7 @@
         </p:nvSpPr>
         <p:spPr>
           <a:xfrm>
-            <a:off x="5212080" y="1463040"/>
+            <a:off x="5212080" y="1175004"/>
             <a:ext cx="3291840" cy="1371600"/>
           </a:xfrm>
           <a:prstGeom prst="roundRect">
@@ -4950,6 +5217,13 @@
             <a:prstDash val="solid"/>
           </a:ln>
         </p:spPr>
+        <p:txBody>
+          <a:bodyPr/>
+          <a:lstStyle/>
+          <a:p>
+            <a:endParaRPr lang="en-US"/>
+          </a:p>
+        </p:txBody>
       </p:sp>
       <p:sp>
         <p:nvSpPr>
@@ -4959,7 +5233,7 @@
         </p:nvSpPr>
         <p:spPr>
           <a:xfrm>
-            <a:off x="5349240" y="1600200"/>
+            <a:off x="5349240" y="1312164"/>
             <a:ext cx="3017520" cy="1143000"/>
           </a:xfrm>
           <a:prstGeom prst="rect">
@@ -4972,11 +5246,11 @@
           <a:bodyPr wrap="square" lIns="0" tIns="0" rIns="0" bIns="0" rtlCol="0" anchor="ctr"/>
           <a:lstStyle/>
           <a:p>
-            <a:pPr algn="l" indent="0" marL="0">
+            <a:pPr marL="0" indent="0" algn="l">
               <a:buNone/>
             </a:pPr>
             <a:r>
-              <a:rPr lang="en-US" sz="1700" b="1" dirty="0">
+              <a:rPr lang="en-US" sz="2400" b="1" dirty="0">
                 <a:solidFill>
                   <a:srgbClr val="B0413E"/>
                 </a:solidFill>
@@ -4987,21 +5261,29 @@
               <a:t>DESPAIR
 </a:t>
             </a:r>
-            <a:pPr algn="l" indent="0" marL="0">
-              <a:buNone/>
-            </a:pPr>
-            <a:r>
-              <a:rPr lang="en-US" sz="1300" dirty="0">
-                <a:solidFill>
-                  <a:srgbClr val="000000"/>
-                </a:solidFill>
-                <a:latin typeface="Arial" pitchFamily="34" charset="0"/>
-                <a:ea typeface="Arial" pitchFamily="34" charset="-122"/>
-                <a:cs typeface="Arial" pitchFamily="34" charset="-120"/>
-              </a:rPr>
-              <a:t>when it reads badly: “I’ll never be enough.”</a:t>
-            </a:r>
-            <a:endParaRPr lang="en-US" sz="1600" dirty="0"/>
+            <a:r>
+              <a:rPr lang="en-US" dirty="0">
+                <a:solidFill>
+                  <a:srgbClr val="000000"/>
+                </a:solidFill>
+                <a:latin typeface="Arial" pitchFamily="34" charset="0"/>
+                <a:ea typeface="Arial" pitchFamily="34" charset="-122"/>
+                <a:cs typeface="Arial" pitchFamily="34" charset="-120"/>
+              </a:rPr>
+              <a:t>when it reads badly: </a:t>
+            </a:r>
+            <a:r>
+              <a:rPr lang="en-US" i="1" dirty="0">
+                <a:solidFill>
+                  <a:srgbClr val="000000"/>
+                </a:solidFill>
+                <a:latin typeface="Arial" pitchFamily="34" charset="0"/>
+                <a:ea typeface="Arial" pitchFamily="34" charset="-122"/>
+                <a:cs typeface="Arial" pitchFamily="34" charset="-120"/>
+              </a:rPr>
+              <a:t>“I’ll never be enough.”</a:t>
+            </a:r>
+            <a:endParaRPr lang="en-US" sz="2400" i="1" dirty="0"/>
           </a:p>
         </p:txBody>
       </p:sp>
@@ -5013,7 +5295,7 @@
         </p:nvSpPr>
         <p:spPr>
           <a:xfrm>
-            <a:off x="3977640" y="1965960"/>
+            <a:off x="3977640" y="1677924"/>
             <a:ext cx="1188720" cy="365760"/>
           </a:xfrm>
           <a:prstGeom prst="rightArrow">
@@ -5024,6 +5306,13 @@
           </a:solidFill>
           <a:ln/>
         </p:spPr>
+        <p:txBody>
+          <a:bodyPr/>
+          <a:lstStyle/>
+          <a:p>
+            <a:endParaRPr lang="en-US"/>
+          </a:p>
+        </p:txBody>
       </p:sp>
       <p:sp>
         <p:nvSpPr>
@@ -5033,7 +5322,7 @@
         </p:nvSpPr>
         <p:spPr>
           <a:xfrm>
-            <a:off x="640080" y="3063240"/>
+            <a:off x="640080" y="2788920"/>
             <a:ext cx="7863840" cy="914400"/>
           </a:xfrm>
           <a:prstGeom prst="rect">
@@ -5046,11 +5335,11 @@
           <a:bodyPr wrap="square" lIns="0" tIns="0" rIns="0" bIns="0" rtlCol="0" anchor="t"/>
           <a:lstStyle/>
           <a:p>
-            <a:pPr algn="l" indent="0" marL="0">
+            <a:pPr marL="0" indent="0" algn="l">
               <a:buNone/>
             </a:pPr>
             <a:r>
-              <a:rPr lang="en-US" sz="1600" b="1" dirty="0">
+              <a:rPr lang="en-US" b="1" dirty="0">
                 <a:solidFill>
                   <a:srgbClr val="1F497D"/>
                 </a:solidFill>
@@ -5060,11 +5349,8 @@
               </a:rPr>
               <a:t>Same root: </a:t>
             </a:r>
-            <a:pPr algn="l" indent="0" marL="0">
-              <a:buNone/>
-            </a:pPr>
-            <a:r>
-              <a:rPr lang="en-US" sz="1600" dirty="0">
+            <a:r>
+              <a:rPr lang="en-US" dirty="0">
                 <a:solidFill>
                   <a:srgbClr val="000000"/>
                 </a:solidFill>
@@ -5074,11 +5360,8 @@
               </a:rPr>
               <a:t>both keep score. Both make </a:t>
             </a:r>
-            <a:pPr algn="l" indent="0" marL="0">
-              <a:buNone/>
-            </a:pPr>
-            <a:r>
-              <a:rPr lang="en-US" sz="1600" i="1" dirty="0">
+            <a:r>
+              <a:rPr lang="en-US" i="1" dirty="0">
                 <a:solidFill>
                   <a:srgbClr val="000000"/>
                 </a:solidFill>
@@ -5088,21 +5371,41 @@
               </a:rPr>
               <a:t>my performance</a:t>
             </a:r>
-            <a:pPr algn="l" indent="0" marL="0">
-              <a:buNone/>
-            </a:pPr>
-            <a:r>
-              <a:rPr lang="en-US" sz="1600" dirty="0">
-                <a:solidFill>
-                  <a:srgbClr val="000000"/>
-                </a:solidFill>
-                <a:latin typeface="Arial" pitchFamily="34" charset="0"/>
-                <a:ea typeface="Arial" pitchFamily="34" charset="-122"/>
-                <a:cs typeface="Arial" pitchFamily="34" charset="-120"/>
-              </a:rPr>
-              <a:t> the measure of my standing. Pride and despair are the two readings of one scoreboard — and the gift removes the scoreboard.</a:t>
-            </a:r>
-            <a:endParaRPr lang="en-US" sz="1600" dirty="0"/>
+            <a:r>
+              <a:rPr lang="en-US" dirty="0">
+                <a:solidFill>
+                  <a:srgbClr val="000000"/>
+                </a:solidFill>
+                <a:latin typeface="Arial" pitchFamily="34" charset="0"/>
+                <a:ea typeface="Arial" pitchFamily="34" charset="-122"/>
+                <a:cs typeface="Arial" pitchFamily="34" charset="-120"/>
+              </a:rPr>
+              <a:t> the measure of my standing. Pride and despair are the two readings of one scoreboard </a:t>
+            </a:r>
+            <a:r>
+              <a:rPr lang="en-US" dirty="0">
+                <a:solidFill>
+                  <a:srgbClr val="000000"/>
+                </a:solidFill>
+                <a:latin typeface="Arial" pitchFamily="34" charset="0"/>
+                <a:ea typeface="Arial" pitchFamily="34" charset="-122"/>
+                <a:cs typeface="Arial" pitchFamily="34" charset="-120"/>
+                <a:sym typeface="Wingdings" pitchFamily="2" charset="2"/>
+              </a:rPr>
+              <a:t></a:t>
+            </a:r>
+            <a:r>
+              <a:rPr lang="en-US" dirty="0">
+                <a:solidFill>
+                  <a:srgbClr val="000000"/>
+                </a:solidFill>
+                <a:latin typeface="Arial" pitchFamily="34" charset="0"/>
+                <a:ea typeface="Arial" pitchFamily="34" charset="-122"/>
+                <a:cs typeface="Arial" pitchFamily="34" charset="-120"/>
+              </a:rPr>
+              <a:t> and the gift removes the scoreboard.</a:t>
+            </a:r>
+            <a:endParaRPr lang="en-US" dirty="0"/>
           </a:p>
         </p:txBody>
       </p:sp>
@@ -5114,8 +5417,8 @@
         </p:nvSpPr>
         <p:spPr>
           <a:xfrm>
-            <a:off x="640080" y="4206240"/>
-            <a:ext cx="7863840" cy="1737360"/>
+            <a:off x="640080" y="3827416"/>
+            <a:ext cx="7863840" cy="2372417"/>
           </a:xfrm>
           <a:prstGeom prst="rect">
             <a:avLst/>
@@ -5127,80 +5430,117 @@
           <a:bodyPr wrap="square" lIns="0" tIns="0" rIns="0" bIns="0" rtlCol="0" anchor="t"/>
           <a:lstStyle/>
           <a:p>
-            <a:pPr algn="l" indent="0" marL="0">
-              <a:buNone/>
+            <a:pPr algn="l"/>
+            <a:r>
+              <a:rPr lang="en-US" dirty="0">
+                <a:solidFill>
+                  <a:srgbClr val="000000"/>
+                </a:solidFill>
+                <a:latin typeface="Arial" pitchFamily="34" charset="0"/>
+                <a:ea typeface="Arial" pitchFamily="34" charset="-122"/>
+                <a:cs typeface="Arial" pitchFamily="34" charset="-120"/>
+              </a:rPr>
+              <a:t>The cure is not “score higher” or “stop caring.” It is a different righteousness entirely:</a:t>
+            </a:r>
+          </a:p>
+          <a:p>
+            <a:pPr marL="285750" indent="-285750">
+              <a:buFont typeface="Arial" panose="020B0604020202020204" pitchFamily="34" charset="0"/>
+              <a:buChar char="•"/>
             </a:pPr>
             <a:r>
-              <a:rPr lang="en-US" sz="1500" dirty="0">
-                <a:solidFill>
-                  <a:srgbClr val="000000"/>
-                </a:solidFill>
-                <a:latin typeface="Arial" pitchFamily="34" charset="0"/>
-                <a:ea typeface="Arial" pitchFamily="34" charset="-122"/>
-                <a:cs typeface="Arial" pitchFamily="34" charset="-120"/>
-              </a:rPr>
-              <a:t>The cure is not “score higher” or “stop caring.” It is a different righteousness entirely:
+              <a:rPr lang="en-US" b="1" i="1" dirty="0">
+                <a:solidFill>
+                  <a:srgbClr val="000000"/>
+                </a:solidFill>
+                <a:latin typeface="Arial" pitchFamily="34" charset="0"/>
+                <a:ea typeface="Arial" pitchFamily="34" charset="-122"/>
+                <a:cs typeface="Arial" pitchFamily="34" charset="-120"/>
+              </a:rPr>
+              <a:t>“There is now no condemnation for those who are in Christ Jesus.” </a:t>
+            </a:r>
+            <a:r>
+              <a:rPr lang="en-US" b="1" dirty="0">
+                <a:solidFill>
+                  <a:srgbClr val="000000"/>
+                </a:solidFill>
+                <a:latin typeface="Arial" pitchFamily="34" charset="0"/>
+                <a:ea typeface="Arial" pitchFamily="34" charset="-122"/>
+                <a:cs typeface="Arial" pitchFamily="34" charset="-120"/>
+              </a:rPr>
+              <a:t>(Romans 8:1) </a:t>
+            </a:r>
+            <a:r>
+              <a:rPr lang="en-US" b="1" dirty="0">
+                <a:solidFill>
+                  <a:srgbClr val="1F497D"/>
+                </a:solidFill>
+                <a:latin typeface="Arial" pitchFamily="34" charset="0"/>
+                <a:ea typeface="Arial" pitchFamily="34" charset="-122"/>
+                <a:cs typeface="Arial" pitchFamily="34" charset="-120"/>
+              </a:rPr>
+              <a:t>
+The proud man and the despairing man need the same sentence </a:t>
+            </a:r>
+            <a:r>
+              <a:rPr lang="en-US" b="1" dirty="0">
+                <a:solidFill>
+                  <a:srgbClr val="1F497D"/>
+                </a:solidFill>
+                <a:latin typeface="Arial" pitchFamily="34" charset="0"/>
+                <a:ea typeface="Arial" pitchFamily="34" charset="-122"/>
+                <a:cs typeface="Arial" pitchFamily="34" charset="-120"/>
+                <a:sym typeface="Wingdings" pitchFamily="2" charset="2"/>
+              </a:rPr>
+              <a:t></a:t>
+            </a:r>
+            <a:r>
+              <a:rPr lang="en-US" b="1" dirty="0">
+                <a:solidFill>
+                  <a:srgbClr val="1F497D"/>
+                </a:solidFill>
+                <a:latin typeface="Arial" pitchFamily="34" charset="0"/>
+                <a:ea typeface="Arial" pitchFamily="34" charset="-122"/>
+                <a:cs typeface="Arial" pitchFamily="34" charset="-120"/>
+              </a:rPr>
+              <a:t> not a better score, but Christ’s.
 </a:t>
             </a:r>
-            <a:pPr algn="l" indent="0" marL="0">
-              <a:buNone/>
-            </a:pPr>
-            <a:r>
-              <a:rPr lang="en-US" sz="1600" b="1" i="1" dirty="0">
-                <a:solidFill>
-                  <a:srgbClr val="000000"/>
-                </a:solidFill>
-                <a:latin typeface="Arial" pitchFamily="34" charset="0"/>
-                <a:ea typeface="Arial" pitchFamily="34" charset="-122"/>
-                <a:cs typeface="Arial" pitchFamily="34" charset="-120"/>
-              </a:rPr>
-              <a:t>“There is now no condemnation for those who are in Christ Jesus.” </a:t>
-            </a:r>
-            <a:pPr algn="l" indent="0" marL="0">
-              <a:buNone/>
-            </a:pPr>
-            <a:r>
-              <a:rPr lang="en-US" sz="1500" b="1" dirty="0">
-                <a:solidFill>
-                  <a:srgbClr val="000000"/>
-                </a:solidFill>
-                <a:latin typeface="Arial" pitchFamily="34" charset="0"/>
-                <a:ea typeface="Arial" pitchFamily="34" charset="-122"/>
-                <a:cs typeface="Arial" pitchFamily="34" charset="-120"/>
-              </a:rPr>
-              <a:t>(Romans 8:1)</a:t>
-            </a:r>
-            <a:pPr algn="l" indent="0" marL="0">
-              <a:buNone/>
-            </a:pPr>
-            <a:r>
-              <a:rPr lang="en-US" sz="1500" b="1" dirty="0">
-                <a:solidFill>
-                  <a:srgbClr val="1F497D"/>
-                </a:solidFill>
-                <a:latin typeface="Arial" pitchFamily="34" charset="0"/>
-                <a:ea typeface="Arial" pitchFamily="34" charset="-122"/>
-                <a:cs typeface="Arial" pitchFamily="34" charset="-120"/>
-              </a:rPr>
-              <a:t>
-The proud man and the despairing man need the same sentence — not a better score, but Christ’s.
-</a:t>
-            </a:r>
-            <a:pPr algn="l" indent="0" marL="0">
-              <a:buNone/>
-            </a:pPr>
-            <a:r>
-              <a:rPr lang="en-US" sz="1400" i="1" dirty="0">
-                <a:solidFill>
-                  <a:srgbClr val="000000"/>
-                </a:solidFill>
-                <a:latin typeface="Arial" pitchFamily="34" charset="0"/>
-                <a:ea typeface="Arial" pitchFamily="34" charset="-122"/>
-                <a:cs typeface="Arial" pitchFamily="34" charset="-120"/>
-              </a:rPr>
-              <a:t>Depend on Him daily — not just at the beginning of faith, but all the way through. The same grace that saves is the grace that sustains.</a:t>
-            </a:r>
-            <a:endParaRPr lang="en-US" sz="1600" dirty="0"/>
+            <a:r>
+              <a:rPr lang="en-US" i="1" dirty="0">
+                <a:solidFill>
+                  <a:srgbClr val="000000"/>
+                </a:solidFill>
+                <a:latin typeface="Arial" pitchFamily="34" charset="0"/>
+                <a:ea typeface="Arial" pitchFamily="34" charset="-122"/>
+                <a:cs typeface="Arial" pitchFamily="34" charset="-120"/>
+              </a:rPr>
+              <a:t>Depend on Him daily </a:t>
+            </a:r>
+            <a:r>
+              <a:rPr lang="en-US" i="1" dirty="0">
+                <a:solidFill>
+                  <a:srgbClr val="000000"/>
+                </a:solidFill>
+                <a:latin typeface="Arial" pitchFamily="34" charset="0"/>
+                <a:ea typeface="Arial" pitchFamily="34" charset="-122"/>
+                <a:cs typeface="Arial" pitchFamily="34" charset="-120"/>
+                <a:sym typeface="Wingdings" pitchFamily="2" charset="2"/>
+              </a:rPr>
+              <a:t></a:t>
+            </a:r>
+            <a:r>
+              <a:rPr lang="en-US" i="1" dirty="0">
+                <a:solidFill>
+                  <a:srgbClr val="000000"/>
+                </a:solidFill>
+                <a:latin typeface="Arial" pitchFamily="34" charset="0"/>
+                <a:ea typeface="Arial" pitchFamily="34" charset="-122"/>
+                <a:cs typeface="Arial" pitchFamily="34" charset="-120"/>
+              </a:rPr>
+              <a:t> not just at the beginning of faith, but all the way through. The same grace that saves is the grace that sustains.</a:t>
+            </a:r>
+            <a:endParaRPr lang="en-US" sz="2000" dirty="0"/>
           </a:p>
         </p:txBody>
       </p:sp>
@@ -5218,26 +5558,26 @@
               <p:cTn id="2" dur="indefinite" nodeType="mainSeq">
                 <p:childTnLst>
                   <p:par>
-                    <p:cTn id="11" fill="hold">
+                    <p:cTn id="3" fill="hold">
                       <p:stCondLst>
                         <p:cond delay="indefinite"/>
                       </p:stCondLst>
                       <p:childTnLst>
                         <p:par>
-                          <p:cTn id="12" fill="hold">
+                          <p:cTn id="4" fill="hold">
                             <p:stCondLst>
                               <p:cond delay="0"/>
                             </p:stCondLst>
                             <p:childTnLst>
                               <p:par>
-                                <p:cTn id="3" presetID="42" presetClass="entr" presetSubtype="0" fill="hold" grpId="0" nodeType="clickEffect">
+                                <p:cTn id="5" presetID="42" presetClass="entr" presetSubtype="0" fill="hold" nodeType="clickEffect">
                                   <p:stCondLst>
                                     <p:cond delay="0"/>
                                   </p:stCondLst>
                                   <p:childTnLst>
                                     <p:set>
                                       <p:cBhvr>
-                                        <p:cTn id="4" dur="1" fill="hold">
+                                        <p:cTn id="6" dur="1" fill="hold">
                                           <p:stCondLst>
                                             <p:cond delay="0"/>
                                           </p:stCondLst>
@@ -5255,7 +5595,7 @@
                                     </p:set>
                                     <p:animEffect transition="in" filter="fade">
                                       <p:cBhvr>
-                                        <p:cTn id="5" dur="1000"/>
+                                        <p:cTn id="7" dur="1000"/>
                                         <p:tgtEl>
                                           <p:spTgt spid="4"/>
                                         </p:tgtEl>
@@ -5263,7 +5603,7 @@
                                     </p:animEffect>
                                     <p:anim calcmode="lin" valueType="num">
                                       <p:cBhvr>
-                                        <p:cTn id="6" dur="1000" fill="hold"/>
+                                        <p:cTn id="8" dur="1000" fill="hold"/>
                                         <p:tgtEl>
                                           <p:spTgt spid="4"/>
                                         </p:tgtEl>
@@ -5288,14 +5628,14 @@
                                 </p:cTn>
                               </p:par>
                               <p:par>
-                                <p:cTn id="7" presetID="42" presetClass="entr" presetSubtype="0" fill="hold" grpId="0" nodeType="withEffect">
+                                <p:cTn id="9" presetID="42" presetClass="entr" presetSubtype="0" fill="hold" nodeType="withEffect">
                                   <p:stCondLst>
                                     <p:cond delay="0"/>
                                   </p:stCondLst>
                                   <p:childTnLst>
                                     <p:set>
                                       <p:cBhvr>
-                                        <p:cTn id="8" dur="1" fill="hold">
+                                        <p:cTn id="10" dur="1" fill="hold">
                                           <p:stCondLst>
                                             <p:cond delay="0"/>
                                           </p:stCondLst>
@@ -5313,7 +5653,7 @@
                                     </p:set>
                                     <p:animEffect transition="in" filter="fade">
                                       <p:cBhvr>
-                                        <p:cTn id="9" dur="1000"/>
+                                        <p:cTn id="11" dur="1000"/>
                                         <p:tgtEl>
                                           <p:spTgt spid="5"/>
                                         </p:tgtEl>
@@ -5321,7 +5661,7 @@
                                     </p:animEffect>
                                     <p:anim calcmode="lin" valueType="num">
                                       <p:cBhvr>
-                                        <p:cTn id="10" dur="1000" fill="hold"/>
+                                        <p:cTn id="12" dur="1000" fill="hold"/>
                                         <p:tgtEl>
                                           <p:spTgt spid="5"/>
                                         </p:tgtEl>
@@ -5352,26 +5692,26 @@
                     </p:cTn>
                   </p:par>
                   <p:par>
-                    <p:cTn id="25" fill="hold">
+                    <p:cTn id="13" fill="hold">
                       <p:stCondLst>
                         <p:cond delay="indefinite"/>
                       </p:stCondLst>
                       <p:childTnLst>
                         <p:par>
-                          <p:cTn id="26" fill="hold">
+                          <p:cTn id="14" fill="hold">
                             <p:stCondLst>
                               <p:cond delay="0"/>
                             </p:stCondLst>
                             <p:childTnLst>
                               <p:par>
-                                <p:cTn id="13" presetID="42" presetClass="entr" presetSubtype="0" fill="hold" grpId="0" nodeType="clickEffect">
+                                <p:cTn id="15" presetID="42" presetClass="entr" presetSubtype="0" fill="hold" nodeType="clickEffect">
                                   <p:stCondLst>
                                     <p:cond delay="0"/>
                                   </p:stCondLst>
                                   <p:childTnLst>
                                     <p:set>
                                       <p:cBhvr>
-                                        <p:cTn id="14" dur="1" fill="hold">
+                                        <p:cTn id="16" dur="1" fill="hold">
                                           <p:stCondLst>
                                             <p:cond delay="0"/>
                                           </p:stCondLst>
@@ -5389,7 +5729,7 @@
                                     </p:set>
                                     <p:animEffect transition="in" filter="fade">
                                       <p:cBhvr>
-                                        <p:cTn id="15" dur="1000"/>
+                                        <p:cTn id="17" dur="1000"/>
                                         <p:tgtEl>
                                           <p:spTgt spid="8"/>
                                         </p:tgtEl>
@@ -5397,7 +5737,7 @@
                                     </p:animEffect>
                                     <p:anim calcmode="lin" valueType="num">
                                       <p:cBhvr>
-                                        <p:cTn id="16" dur="1000" fill="hold"/>
+                                        <p:cTn id="18" dur="1000" fill="hold"/>
                                         <p:tgtEl>
                                           <p:spTgt spid="8"/>
                                         </p:tgtEl>
@@ -5422,14 +5762,14 @@
                                 </p:cTn>
                               </p:par>
                               <p:par>
-                                <p:cTn id="17" presetID="42" presetClass="entr" presetSubtype="0" fill="hold" grpId="0" nodeType="withEffect">
+                                <p:cTn id="19" presetID="42" presetClass="entr" presetSubtype="0" fill="hold" nodeType="withEffect">
                                   <p:stCondLst>
                                     <p:cond delay="0"/>
                                   </p:stCondLst>
                                   <p:childTnLst>
                                     <p:set>
                                       <p:cBhvr>
-                                        <p:cTn id="18" dur="1" fill="hold">
+                                        <p:cTn id="20" dur="1" fill="hold">
                                           <p:stCondLst>
                                             <p:cond delay="0"/>
                                           </p:stCondLst>
@@ -5447,7 +5787,7 @@
                                     </p:set>
                                     <p:animEffect transition="in" filter="fade">
                                       <p:cBhvr>
-                                        <p:cTn id="19" dur="1000"/>
+                                        <p:cTn id="21" dur="1000"/>
                                         <p:tgtEl>
                                           <p:spTgt spid="6"/>
                                         </p:tgtEl>
@@ -5455,7 +5795,7 @@
                                     </p:animEffect>
                                     <p:anim calcmode="lin" valueType="num">
                                       <p:cBhvr>
-                                        <p:cTn id="20" dur="1000" fill="hold"/>
+                                        <p:cTn id="22" dur="1000" fill="hold"/>
                                         <p:tgtEl>
                                           <p:spTgt spid="6"/>
                                         </p:tgtEl>
@@ -5480,14 +5820,14 @@
                                 </p:cTn>
                               </p:par>
                               <p:par>
-                                <p:cTn id="21" presetID="42" presetClass="entr" presetSubtype="0" fill="hold" grpId="0" nodeType="withEffect">
+                                <p:cTn id="23" presetID="42" presetClass="entr" presetSubtype="0" fill="hold" nodeType="withEffect">
                                   <p:stCondLst>
                                     <p:cond delay="0"/>
                                   </p:stCondLst>
                                   <p:childTnLst>
                                     <p:set>
                                       <p:cBhvr>
-                                        <p:cTn id="22" dur="1" fill="hold">
+                                        <p:cTn id="24" dur="1" fill="hold">
                                           <p:stCondLst>
                                             <p:cond delay="0"/>
                                           </p:stCondLst>
@@ -5505,7 +5845,7 @@
                                     </p:set>
                                     <p:animEffect transition="in" filter="fade">
                                       <p:cBhvr>
-                                        <p:cTn id="23" dur="1000"/>
+                                        <p:cTn id="25" dur="1000"/>
                                         <p:tgtEl>
                                           <p:spTgt spid="7"/>
                                         </p:tgtEl>
@@ -5513,7 +5853,7 @@
                                     </p:animEffect>
                                     <p:anim calcmode="lin" valueType="num">
                                       <p:cBhvr>
-                                        <p:cTn id="24" dur="1000" fill="hold"/>
+                                        <p:cTn id="26" dur="1000" fill="hold"/>
                                         <p:tgtEl>
                                           <p:spTgt spid="7"/>
                                         </p:tgtEl>
@@ -5544,26 +5884,26 @@
                     </p:cTn>
                   </p:par>
                   <p:par>
-                    <p:cTn id="31" fill="hold">
+                    <p:cTn id="27" fill="hold">
                       <p:stCondLst>
                         <p:cond delay="indefinite"/>
                       </p:stCondLst>
                       <p:childTnLst>
                         <p:par>
-                          <p:cTn id="32" fill="hold">
+                          <p:cTn id="28" fill="hold">
                             <p:stCondLst>
                               <p:cond delay="0"/>
                             </p:stCondLst>
                             <p:childTnLst>
                               <p:par>
-                                <p:cTn id="27" presetID="42" presetClass="entr" presetSubtype="0" fill="hold" grpId="0" nodeType="clickEffect">
+                                <p:cTn id="29" presetID="42" presetClass="entr" presetSubtype="0" fill="hold" nodeType="clickEffect">
                                   <p:stCondLst>
                                     <p:cond delay="0"/>
                                   </p:stCondLst>
                                   <p:childTnLst>
                                     <p:set>
                                       <p:cBhvr>
-                                        <p:cTn id="28" dur="1" fill="hold">
+                                        <p:cTn id="30" dur="1" fill="hold">
                                           <p:stCondLst>
                                             <p:cond delay="0"/>
                                           </p:stCondLst>
@@ -5581,7 +5921,7 @@
                                     </p:set>
                                     <p:animEffect transition="in" filter="fade">
                                       <p:cBhvr>
-                                        <p:cTn id="29" dur="1000"/>
+                                        <p:cTn id="31" dur="1000"/>
                                         <p:tgtEl>
                                           <p:spTgt spid="9"/>
                                         </p:tgtEl>
@@ -5589,7 +5929,7 @@
                                     </p:animEffect>
                                     <p:anim calcmode="lin" valueType="num">
                                       <p:cBhvr>
-                                        <p:cTn id="30" dur="1000" fill="hold"/>
+                                        <p:cTn id="32" dur="1000" fill="hold"/>
                                         <p:tgtEl>
                                           <p:spTgt spid="9"/>
                                         </p:tgtEl>
@@ -5620,26 +5960,26 @@
                     </p:cTn>
                   </p:par>
                   <p:par>
-                    <p:cTn id="37" fill="hold">
+                    <p:cTn id="33" fill="hold">
                       <p:stCondLst>
                         <p:cond delay="indefinite"/>
                       </p:stCondLst>
                       <p:childTnLst>
                         <p:par>
-                          <p:cTn id="38" fill="hold">
+                          <p:cTn id="34" fill="hold">
                             <p:stCondLst>
                               <p:cond delay="0"/>
                             </p:stCondLst>
                             <p:childTnLst>
                               <p:par>
-                                <p:cTn id="33" presetID="42" presetClass="entr" presetSubtype="0" fill="hold" grpId="0" nodeType="clickEffect">
+                                <p:cTn id="35" presetID="42" presetClass="entr" presetSubtype="0" fill="hold" nodeType="clickEffect">
                                   <p:stCondLst>
                                     <p:cond delay="0"/>
                                   </p:stCondLst>
                                   <p:childTnLst>
                                     <p:set>
                                       <p:cBhvr>
-                                        <p:cTn id="34" dur="1" fill="hold">
+                                        <p:cTn id="36" dur="1" fill="hold">
                                           <p:stCondLst>
                                             <p:cond delay="0"/>
                                           </p:stCondLst>
@@ -5657,7 +5997,7 @@
                                     </p:set>
                                     <p:animEffect transition="in" filter="fade">
                                       <p:cBhvr>
-                                        <p:cTn id="35" dur="1000"/>
+                                        <p:cTn id="37" dur="1000"/>
                                         <p:tgtEl>
                                           <p:spTgt spid="10"/>
                                         </p:tgtEl>
@@ -5665,7 +6005,7 @@
                                     </p:animEffect>
                                     <p:anim calcmode="lin" valueType="num">
                                       <p:cBhvr>
-                                        <p:cTn id="36" dur="1000" fill="hold"/>
+                                        <p:cTn id="38" dur="1000" fill="hold"/>
                                         <p:tgtEl>
                                           <p:spTgt spid="10"/>
                                         </p:tgtEl>
@@ -5758,7 +6098,7 @@
           <a:bodyPr wrap="square" lIns="0" tIns="0" rIns="0" bIns="0" rtlCol="0" anchor="t"/>
           <a:lstStyle/>
           <a:p>
-            <a:pPr algn="l" indent="0" marL="0">
+            <a:pPr marL="0" indent="0" algn="l">
               <a:buNone/>
             </a:pPr>
             <a:r>
@@ -5797,11 +6137,11 @@
           <a:bodyPr wrap="square" lIns="0" tIns="0" rIns="0" bIns="0" rtlCol="0" anchor="t"/>
           <a:lstStyle/>
           <a:p>
-            <a:pPr algn="l" indent="0" marL="0">
+            <a:pPr marL="0" indent="0" algn="l">
               <a:buNone/>
             </a:pPr>
             <a:r>
-              <a:rPr lang="en-US" sz="1300" b="1" dirty="0">
+              <a:rPr lang="en-US" sz="2000" b="1" dirty="0">
                 <a:solidFill>
                   <a:srgbClr val="4F81BD"/>
                 </a:solidFill>
@@ -5809,9 +6149,32 @@
                 <a:ea typeface="Arial" pitchFamily="34" charset="-122"/>
                 <a:cs typeface="Arial" pitchFamily="34" charset="-120"/>
               </a:rPr>
-              <a:t>Ten minutes — this is the week’s practice</a:t>
-            </a:r>
-            <a:endParaRPr lang="en-US" sz="1600" dirty="0"/>
+              <a:t>Ten minutes </a:t>
+            </a:r>
+            <a:r>
+              <a:rPr lang="en-US" sz="2000" b="1" dirty="0">
+                <a:solidFill>
+                  <a:srgbClr val="4F81BD"/>
+                </a:solidFill>
+                <a:latin typeface="Arial" pitchFamily="34" charset="0"/>
+                <a:ea typeface="Arial" pitchFamily="34" charset="-122"/>
+                <a:cs typeface="Arial" pitchFamily="34" charset="-120"/>
+                <a:sym typeface="Wingdings" pitchFamily="2" charset="2"/>
+              </a:rPr>
+              <a:t></a:t>
+            </a:r>
+            <a:r>
+              <a:rPr lang="en-US" sz="2000" b="1" dirty="0">
+                <a:solidFill>
+                  <a:srgbClr val="4F81BD"/>
+                </a:solidFill>
+                <a:latin typeface="Arial" pitchFamily="34" charset="0"/>
+                <a:ea typeface="Arial" pitchFamily="34" charset="-122"/>
+                <a:cs typeface="Arial" pitchFamily="34" charset="-120"/>
+              </a:rPr>
+              <a:t> this is the week’s practice</a:t>
+            </a:r>
+            <a:endParaRPr lang="en-US" sz="2800" dirty="0"/>
           </a:p>
         </p:txBody>
       </p:sp>
@@ -5836,11 +6199,11 @@
           <a:bodyPr wrap="square" lIns="0" tIns="0" rIns="0" bIns="0" rtlCol="0" anchor="t"/>
           <a:lstStyle/>
           <a:p>
-            <a:pPr algn="l" indent="0" marL="0">
+            <a:pPr marL="0" indent="0" algn="l">
               <a:buNone/>
             </a:pPr>
             <a:r>
-              <a:rPr lang="en-US" sz="2000" b="1" dirty="0">
+              <a:rPr lang="en-US" sz="2800" b="1" dirty="0">
                 <a:solidFill>
                   <a:srgbClr val="1F497D"/>
                 </a:solidFill>
@@ -5850,11 +6213,8 @@
               </a:rPr>
               <a:t>1.  </a:t>
             </a:r>
-            <a:pPr algn="l" indent="0" marL="0">
-              <a:buNone/>
-            </a:pPr>
-            <a:r>
-              <a:rPr lang="en-US" sz="1800" dirty="0">
+            <a:r>
+              <a:rPr lang="en-US" sz="2400" dirty="0">
                 <a:solidFill>
                   <a:srgbClr val="000000"/>
                 </a:solidFill>
@@ -5864,7 +6224,7 @@
               </a:rPr>
               <a:t>How do pride and despair both grow from the same root of self-righteousness? Which one is your own default?</a:t>
             </a:r>
-            <a:endParaRPr lang="en-US" sz="1600" dirty="0"/>
+            <a:endParaRPr lang="en-US" sz="2000" dirty="0"/>
           </a:p>
         </p:txBody>
       </p:sp>
@@ -5889,11 +6249,11 @@
           <a:bodyPr wrap="square" lIns="0" tIns="0" rIns="0" bIns="0" rtlCol="0" anchor="t"/>
           <a:lstStyle/>
           <a:p>
-            <a:pPr algn="l" indent="0" marL="0">
+            <a:pPr marL="0" indent="0" algn="l">
               <a:buNone/>
             </a:pPr>
             <a:r>
-              <a:rPr lang="en-US" sz="2000" b="1" dirty="0">
+              <a:rPr lang="en-US" sz="2800" b="1" dirty="0">
                 <a:solidFill>
                   <a:srgbClr val="1F497D"/>
                 </a:solidFill>
@@ -5903,21 +6263,41 @@
               </a:rPr>
               <a:t>2.  </a:t>
             </a:r>
-            <a:pPr algn="l" indent="0" marL="0">
-              <a:buNone/>
-            </a:pPr>
-            <a:r>
-              <a:rPr lang="en-US" sz="1800" dirty="0">
-                <a:solidFill>
-                  <a:srgbClr val="000000"/>
-                </a:solidFill>
-                <a:latin typeface="Arial" pitchFamily="34" charset="0"/>
-                <a:ea typeface="Arial" pitchFamily="34" charset="-122"/>
-                <a:cs typeface="Arial" pitchFamily="34" charset="-120"/>
-              </a:rPr>
-              <a:t>What does daily dependence on given-righteousness actually look like — on an ordinary Tuesday, not just at conversion?</a:t>
-            </a:r>
-            <a:endParaRPr lang="en-US" sz="1600" dirty="0"/>
+            <a:r>
+              <a:rPr lang="en-US" sz="2400" dirty="0">
+                <a:solidFill>
+                  <a:srgbClr val="000000"/>
+                </a:solidFill>
+                <a:latin typeface="Arial" pitchFamily="34" charset="0"/>
+                <a:ea typeface="Arial" pitchFamily="34" charset="-122"/>
+                <a:cs typeface="Arial" pitchFamily="34" charset="-120"/>
+              </a:rPr>
+              <a:t>What does daily dependence on given-righteousness actually look like </a:t>
+            </a:r>
+            <a:r>
+              <a:rPr lang="en-US" sz="2400" dirty="0">
+                <a:solidFill>
+                  <a:srgbClr val="000000"/>
+                </a:solidFill>
+                <a:latin typeface="Arial" pitchFamily="34" charset="0"/>
+                <a:ea typeface="Arial" pitchFamily="34" charset="-122"/>
+                <a:cs typeface="Arial" pitchFamily="34" charset="-120"/>
+                <a:sym typeface="Wingdings" pitchFamily="2" charset="2"/>
+              </a:rPr>
+              <a:t></a:t>
+            </a:r>
+            <a:r>
+              <a:rPr lang="en-US" sz="2400" dirty="0">
+                <a:solidFill>
+                  <a:srgbClr val="000000"/>
+                </a:solidFill>
+                <a:latin typeface="Arial" pitchFamily="34" charset="0"/>
+                <a:ea typeface="Arial" pitchFamily="34" charset="-122"/>
+                <a:cs typeface="Arial" pitchFamily="34" charset="-120"/>
+              </a:rPr>
+              <a:t> on an ordinary Tuesday, not just at conversion?</a:t>
+            </a:r>
+            <a:endParaRPr lang="en-US" sz="2000" dirty="0"/>
           </a:p>
         </p:txBody>
       </p:sp>
@@ -5942,11 +6322,11 @@
           <a:bodyPr wrap="square" lIns="0" tIns="0" rIns="0" bIns="0" rtlCol="0" anchor="t"/>
           <a:lstStyle/>
           <a:p>
-            <a:pPr algn="l" indent="0" marL="0">
+            <a:pPr marL="0" indent="0" algn="l">
               <a:buNone/>
             </a:pPr>
             <a:r>
-              <a:rPr lang="en-US" sz="1400" b="1" dirty="0">
+              <a:rPr lang="en-US" sz="2400" b="1" dirty="0">
                 <a:solidFill>
                   <a:srgbClr val="000000"/>
                 </a:solidFill>
@@ -5956,21 +6336,41 @@
               </a:rPr>
               <a:t>Berean rule stands: </a:t>
             </a:r>
-            <a:pPr algn="l" indent="0" marL="0">
-              <a:buNone/>
-            </a:pPr>
-            <a:r>
-              <a:rPr lang="en-US" sz="1400" i="1" dirty="0">
-                <a:solidFill>
-                  <a:srgbClr val="000000"/>
-                </a:solidFill>
-                <a:latin typeface="Arial" pitchFamily="34" charset="0"/>
-                <a:ea typeface="Arial" pitchFamily="34" charset="-122"/>
-                <a:cs typeface="Arial" pitchFamily="34" charset="-120"/>
-              </a:rPr>
-              <a:t>every claim goes back to the text — eager, and examining.</a:t>
-            </a:r>
-            <a:endParaRPr lang="en-US" sz="1600" dirty="0"/>
+            <a:r>
+              <a:rPr lang="en-US" sz="2400" i="1" dirty="0">
+                <a:solidFill>
+                  <a:srgbClr val="000000"/>
+                </a:solidFill>
+                <a:latin typeface="Arial" pitchFamily="34" charset="0"/>
+                <a:ea typeface="Arial" pitchFamily="34" charset="-122"/>
+                <a:cs typeface="Arial" pitchFamily="34" charset="-120"/>
+              </a:rPr>
+              <a:t>every claim goes back to the text </a:t>
+            </a:r>
+            <a:r>
+              <a:rPr lang="en-US" sz="2400" i="1" dirty="0">
+                <a:solidFill>
+                  <a:srgbClr val="000000"/>
+                </a:solidFill>
+                <a:latin typeface="Arial" pitchFamily="34" charset="0"/>
+                <a:ea typeface="Arial" pitchFamily="34" charset="-122"/>
+                <a:cs typeface="Arial" pitchFamily="34" charset="-120"/>
+                <a:sym typeface="Wingdings" pitchFamily="2" charset="2"/>
+              </a:rPr>
+              <a:t></a:t>
+            </a:r>
+            <a:r>
+              <a:rPr lang="en-US" sz="2400" i="1" dirty="0">
+                <a:solidFill>
+                  <a:srgbClr val="000000"/>
+                </a:solidFill>
+                <a:latin typeface="Arial" pitchFamily="34" charset="0"/>
+                <a:ea typeface="Arial" pitchFamily="34" charset="-122"/>
+                <a:cs typeface="Arial" pitchFamily="34" charset="-120"/>
+              </a:rPr>
+              <a:t> eager, and examining.</a:t>
+            </a:r>
+            <a:endParaRPr lang="en-US" sz="2800" dirty="0"/>
           </a:p>
         </p:txBody>
       </p:sp>
@@ -5988,26 +6388,26 @@
               <p:cTn id="2" dur="indefinite" nodeType="mainSeq">
                 <p:childTnLst>
                   <p:par>
-                    <p:cTn id="7" fill="hold">
+                    <p:cTn id="3" fill="hold">
                       <p:stCondLst>
                         <p:cond delay="indefinite"/>
                       </p:stCondLst>
                       <p:childTnLst>
                         <p:par>
-                          <p:cTn id="8" fill="hold">
+                          <p:cTn id="4" fill="hold">
                             <p:stCondLst>
                               <p:cond delay="0"/>
                             </p:stCondLst>
                             <p:childTnLst>
                               <p:par>
-                                <p:cTn id="3" presetID="42" presetClass="entr" presetSubtype="0" fill="hold" grpId="0" nodeType="clickEffect">
+                                <p:cTn id="5" presetID="42" presetClass="entr" presetSubtype="0" fill="hold" nodeType="clickEffect">
                                   <p:stCondLst>
                                     <p:cond delay="0"/>
                                   </p:stCondLst>
                                   <p:childTnLst>
                                     <p:set>
                                       <p:cBhvr>
-                                        <p:cTn id="4" dur="1" fill="hold">
+                                        <p:cTn id="6" dur="1" fill="hold">
                                           <p:stCondLst>
                                             <p:cond delay="0"/>
                                           </p:stCondLst>
@@ -6025,7 +6425,7 @@
                                     </p:set>
                                     <p:animEffect transition="in" filter="fade">
                                       <p:cBhvr>
-                                        <p:cTn id="5" dur="1000"/>
+                                        <p:cTn id="7" dur="1000"/>
                                         <p:tgtEl>
                                           <p:spTgt spid="4"/>
                                         </p:tgtEl>
@@ -6033,7 +6433,7 @@
                                     </p:animEffect>
                                     <p:anim calcmode="lin" valueType="num">
                                       <p:cBhvr>
-                                        <p:cTn id="6" dur="1000" fill="hold"/>
+                                        <p:cTn id="8" dur="1000" fill="hold"/>
                                         <p:tgtEl>
                                           <p:spTgt spid="4"/>
                                         </p:tgtEl>
@@ -6064,26 +6464,26 @@
                     </p:cTn>
                   </p:par>
                   <p:par>
-                    <p:cTn id="13" fill="hold">
+                    <p:cTn id="9" fill="hold">
                       <p:stCondLst>
                         <p:cond delay="indefinite"/>
                       </p:stCondLst>
                       <p:childTnLst>
                         <p:par>
-                          <p:cTn id="14" fill="hold">
+                          <p:cTn id="10" fill="hold">
                             <p:stCondLst>
                               <p:cond delay="0"/>
                             </p:stCondLst>
                             <p:childTnLst>
                               <p:par>
-                                <p:cTn id="9" presetID="42" presetClass="entr" presetSubtype="0" fill="hold" grpId="0" nodeType="clickEffect">
+                                <p:cTn id="11" presetID="42" presetClass="entr" presetSubtype="0" fill="hold" nodeType="clickEffect">
                                   <p:stCondLst>
                                     <p:cond delay="0"/>
                                   </p:stCondLst>
                                   <p:childTnLst>
                                     <p:set>
                                       <p:cBhvr>
-                                        <p:cTn id="10" dur="1" fill="hold">
+                                        <p:cTn id="12" dur="1" fill="hold">
                                           <p:stCondLst>
                                             <p:cond delay="0"/>
                                           </p:stCondLst>
@@ -6101,7 +6501,7 @@
                                     </p:set>
                                     <p:animEffect transition="in" filter="fade">
                                       <p:cBhvr>
-                                        <p:cTn id="11" dur="1000"/>
+                                        <p:cTn id="13" dur="1000"/>
                                         <p:tgtEl>
                                           <p:spTgt spid="5"/>
                                         </p:tgtEl>
@@ -6109,7 +6509,7 @@
                                     </p:animEffect>
                                     <p:anim calcmode="lin" valueType="num">
                                       <p:cBhvr>
-                                        <p:cTn id="12" dur="1000" fill="hold"/>
+                                        <p:cTn id="14" dur="1000" fill="hold"/>
                                         <p:tgtEl>
                                           <p:spTgt spid="5"/>
                                         </p:tgtEl>
@@ -6140,26 +6540,26 @@
                     </p:cTn>
                   </p:par>
                   <p:par>
-                    <p:cTn id="19" fill="hold">
+                    <p:cTn id="15" fill="hold">
                       <p:stCondLst>
                         <p:cond delay="indefinite"/>
                       </p:stCondLst>
                       <p:childTnLst>
                         <p:par>
-                          <p:cTn id="20" fill="hold">
+                          <p:cTn id="16" fill="hold">
                             <p:stCondLst>
                               <p:cond delay="0"/>
                             </p:stCondLst>
                             <p:childTnLst>
                               <p:par>
-                                <p:cTn id="15" presetID="42" presetClass="entr" presetSubtype="0" fill="hold" grpId="0" nodeType="clickEffect">
+                                <p:cTn id="17" presetID="42" presetClass="entr" presetSubtype="0" fill="hold" nodeType="clickEffect">
                                   <p:stCondLst>
                                     <p:cond delay="0"/>
                                   </p:stCondLst>
                                   <p:childTnLst>
                                     <p:set>
                                       <p:cBhvr>
-                                        <p:cTn id="16" dur="1" fill="hold">
+                                        <p:cTn id="18" dur="1" fill="hold">
                                           <p:stCondLst>
                                             <p:cond delay="0"/>
                                           </p:stCondLst>
@@ -6177,7 +6577,7 @@
                                     </p:set>
                                     <p:animEffect transition="in" filter="fade">
                                       <p:cBhvr>
-                                        <p:cTn id="17" dur="1000"/>
+                                        <p:cTn id="19" dur="1000"/>
                                         <p:tgtEl>
                                           <p:spTgt spid="6"/>
                                         </p:tgtEl>
@@ -6185,7 +6585,7 @@
                                     </p:animEffect>
                                     <p:anim calcmode="lin" valueType="num">
                                       <p:cBhvr>
-                                        <p:cTn id="18" dur="1000" fill="hold"/>
+                                        <p:cTn id="20" dur="1000" fill="hold"/>
                                         <p:tgtEl>
                                           <p:spTgt spid="6"/>
                                         </p:tgtEl>
@@ -6278,7 +6678,7 @@
           <a:bodyPr wrap="square" lIns="0" tIns="0" rIns="0" bIns="0" rtlCol="0" anchor="t"/>
           <a:lstStyle/>
           <a:p>
-            <a:pPr algn="l" indent="0" marL="0">
+            <a:pPr marL="0" indent="0" algn="l">
               <a:buNone/>
             </a:pPr>
             <a:r>
@@ -6317,11 +6717,11 @@
           <a:bodyPr wrap="square" lIns="0" tIns="0" rIns="0" bIns="0" rtlCol="0" anchor="t"/>
           <a:lstStyle/>
           <a:p>
-            <a:pPr algn="l" indent="0" marL="0">
+            <a:pPr marL="0" indent="0" algn="l">
               <a:buNone/>
             </a:pPr>
             <a:r>
-              <a:rPr lang="en-US" sz="1300" b="1" dirty="0">
+              <a:rPr lang="en-US" sz="2000" b="1" dirty="0">
                 <a:solidFill>
                   <a:srgbClr val="4F81BD"/>
                 </a:solidFill>
@@ -6329,9 +6729,32 @@
                 <a:ea typeface="Arial" pitchFamily="34" charset="-122"/>
                 <a:cs typeface="Arial" pitchFamily="34" charset="-120"/>
               </a:rPr>
-              <a:t>For next week — eager, and examining</a:t>
-            </a:r>
-            <a:endParaRPr lang="en-US" sz="1600" dirty="0"/>
+              <a:t>For next week </a:t>
+            </a:r>
+            <a:r>
+              <a:rPr lang="en-US" sz="2000" b="1" dirty="0">
+                <a:solidFill>
+                  <a:srgbClr val="4F81BD"/>
+                </a:solidFill>
+                <a:latin typeface="Arial" pitchFamily="34" charset="0"/>
+                <a:ea typeface="Arial" pitchFamily="34" charset="-122"/>
+                <a:cs typeface="Arial" pitchFamily="34" charset="-120"/>
+                <a:sym typeface="Wingdings" pitchFamily="2" charset="2"/>
+              </a:rPr>
+              <a:t></a:t>
+            </a:r>
+            <a:r>
+              <a:rPr lang="en-US" sz="2000" b="1" dirty="0">
+                <a:solidFill>
+                  <a:srgbClr val="4F81BD"/>
+                </a:solidFill>
+                <a:latin typeface="Arial" pitchFamily="34" charset="0"/>
+                <a:ea typeface="Arial" pitchFamily="34" charset="-122"/>
+                <a:cs typeface="Arial" pitchFamily="34" charset="-120"/>
+              </a:rPr>
+              <a:t> eager, and examining</a:t>
+            </a:r>
+            <a:endParaRPr lang="en-US" sz="2800" dirty="0"/>
           </a:p>
         </p:txBody>
       </p:sp>
@@ -6356,11 +6779,11 @@
           <a:bodyPr wrap="square" lIns="0" tIns="0" rIns="0" bIns="0" rtlCol="0" anchor="t"/>
           <a:lstStyle/>
           <a:p>
-            <a:pPr algn="l" indent="0" marL="0">
+            <a:pPr marL="0" indent="0" algn="l">
               <a:buNone/>
             </a:pPr>
             <a:r>
-              <a:rPr lang="en-US" sz="1700" b="1" dirty="0">
+              <a:rPr lang="en-US" sz="2000" b="1" dirty="0">
                 <a:solidFill>
                   <a:srgbClr val="1F497D"/>
                 </a:solidFill>
@@ -6371,36 +6794,109 @@
               <a:t>For next week, read:
 </a:t>
             </a:r>
-            <a:pPr algn="l" indent="0" marL="0">
-              <a:buNone/>
-            </a:pPr>
-            <a:r>
-              <a:rPr lang="en-US" sz="1550" dirty="0">
-                <a:solidFill>
-                  <a:srgbClr val="000000"/>
-                </a:solidFill>
-                <a:latin typeface="Arial" pitchFamily="34" charset="0"/>
-                <a:ea typeface="Arial" pitchFamily="34" charset="-122"/>
-                <a:cs typeface="Arial" pitchFamily="34" charset="-120"/>
-              </a:rPr>
-              <a:t>•  Acts 17:10–12  — what exactly made the Bereans “more open-minded”? Notice both halves of what they did.
-</a:t>
-            </a:r>
-            <a:pPr algn="l" indent="0" marL="0">
-              <a:buNone/>
-            </a:pPr>
-            <a:r>
-              <a:rPr lang="en-US" sz="1550" dirty="0">
-                <a:solidFill>
-                  <a:srgbClr val="000000"/>
-                </a:solidFill>
-                <a:latin typeface="Arial" pitchFamily="34" charset="0"/>
-                <a:ea typeface="Arial" pitchFamily="34" charset="-122"/>
-                <a:cs typeface="Arial" pitchFamily="34" charset="-120"/>
-              </a:rPr>
-              <a:t>•  1 Corinthians 2:6–16  — how is spiritual truth known? Why can’t it be reasoned to from the outside?</a:t>
-            </a:r>
-            <a:endParaRPr lang="en-US" sz="1600" dirty="0"/>
+            <a:r>
+              <a:rPr lang="en-US" dirty="0">
+                <a:solidFill>
+                  <a:srgbClr val="000000"/>
+                </a:solidFill>
+                <a:latin typeface="Arial" pitchFamily="34" charset="0"/>
+                <a:ea typeface="Arial" pitchFamily="34" charset="-122"/>
+                <a:cs typeface="Arial" pitchFamily="34" charset="-120"/>
+              </a:rPr>
+              <a:t>•  </a:t>
+            </a:r>
+            <a:r>
+              <a:rPr lang="en-US" b="1" dirty="0">
+                <a:solidFill>
+                  <a:srgbClr val="000000"/>
+                </a:solidFill>
+                <a:latin typeface="Arial" pitchFamily="34" charset="0"/>
+                <a:ea typeface="Arial" pitchFamily="34" charset="-122"/>
+                <a:cs typeface="Arial" pitchFamily="34" charset="-120"/>
+              </a:rPr>
+              <a:t>Acts 17:10–12</a:t>
+            </a:r>
+            <a:r>
+              <a:rPr lang="en-US" dirty="0">
+                <a:solidFill>
+                  <a:srgbClr val="000000"/>
+                </a:solidFill>
+                <a:latin typeface="Arial" pitchFamily="34" charset="0"/>
+                <a:ea typeface="Arial" pitchFamily="34" charset="-122"/>
+                <a:cs typeface="Arial" pitchFamily="34" charset="-120"/>
+              </a:rPr>
+              <a:t>  </a:t>
+            </a:r>
+            <a:r>
+              <a:rPr lang="en-US" dirty="0">
+                <a:solidFill>
+                  <a:srgbClr val="000000"/>
+                </a:solidFill>
+                <a:latin typeface="Arial" pitchFamily="34" charset="0"/>
+                <a:ea typeface="Arial" pitchFamily="34" charset="-122"/>
+                <a:cs typeface="Arial" pitchFamily="34" charset="-120"/>
+                <a:sym typeface="Wingdings" pitchFamily="2" charset="2"/>
+              </a:rPr>
+              <a:t></a:t>
+            </a:r>
+            <a:r>
+              <a:rPr lang="en-US" dirty="0">
+                <a:solidFill>
+                  <a:srgbClr val="000000"/>
+                </a:solidFill>
+                <a:latin typeface="Arial" pitchFamily="34" charset="0"/>
+                <a:ea typeface="Arial" pitchFamily="34" charset="-122"/>
+                <a:cs typeface="Arial" pitchFamily="34" charset="-120"/>
+              </a:rPr>
+              <a:t> what exactly made the Bereans “more open-minded”? Notice both halves of what they did.
+•  </a:t>
+            </a:r>
+            <a:r>
+              <a:rPr lang="en-US" b="1" dirty="0">
+                <a:solidFill>
+                  <a:srgbClr val="000000"/>
+                </a:solidFill>
+                <a:latin typeface="Arial" pitchFamily="34" charset="0"/>
+                <a:ea typeface="Arial" pitchFamily="34" charset="-122"/>
+                <a:cs typeface="Arial" pitchFamily="34" charset="-120"/>
+              </a:rPr>
+              <a:t>1 Corinthians 2:6–16</a:t>
+            </a:r>
+            <a:r>
+              <a:rPr lang="en-US" dirty="0">
+                <a:solidFill>
+                  <a:srgbClr val="000000"/>
+                </a:solidFill>
+                <a:latin typeface="Arial" pitchFamily="34" charset="0"/>
+                <a:ea typeface="Arial" pitchFamily="34" charset="-122"/>
+                <a:cs typeface="Arial" pitchFamily="34" charset="-120"/>
+              </a:rPr>
+              <a:t>  </a:t>
+            </a:r>
+            <a:r>
+              <a:rPr lang="en-US" dirty="0">
+                <a:solidFill>
+                  <a:srgbClr val="000000"/>
+                </a:solidFill>
+                <a:latin typeface="Arial" pitchFamily="34" charset="0"/>
+                <a:ea typeface="Arial" pitchFamily="34" charset="-122"/>
+                <a:cs typeface="Arial" pitchFamily="34" charset="-120"/>
+                <a:sym typeface="Wingdings" pitchFamily="2" charset="2"/>
+              </a:rPr>
+              <a:t></a:t>
+            </a:r>
+            <a:r>
+              <a:rPr lang="en-US" dirty="0">
+                <a:solidFill>
+                  <a:srgbClr val="000000"/>
+                </a:solidFill>
+                <a:latin typeface="Arial" pitchFamily="34" charset="0"/>
+                <a:ea typeface="Arial" pitchFamily="34" charset="-122"/>
+                <a:cs typeface="Arial" pitchFamily="34" charset="-120"/>
+              </a:rPr>
+              <a:t> how is spiritual truth known? Why can’t it be reasoned to from the outside?</a:t>
+            </a:r>
+            <a:endParaRPr lang="en-US" sz="2000" dirty="0"/>
           </a:p>
         </p:txBody>
       </p:sp>
@@ -6413,7 +6909,7 @@
         <p:spPr>
           <a:xfrm>
             <a:off x="365760" y="2834640"/>
-            <a:ext cx="8412480" cy="914400"/>
+            <a:ext cx="8412480" cy="594360"/>
           </a:xfrm>
           <a:prstGeom prst="rect">
             <a:avLst/>
@@ -6425,11 +6921,11 @@
           <a:bodyPr wrap="square" lIns="0" tIns="0" rIns="0" bIns="0" rtlCol="0" anchor="t"/>
           <a:lstStyle/>
           <a:p>
-            <a:pPr algn="l" indent="0" marL="0">
+            <a:pPr marL="0" indent="0" algn="l">
               <a:buNone/>
             </a:pPr>
             <a:r>
-              <a:rPr lang="en-US" sz="1600" b="1" dirty="0">
+              <a:rPr lang="en-US" b="1" dirty="0">
                 <a:solidFill>
                   <a:srgbClr val="000000"/>
                 </a:solidFill>
@@ -6439,21 +6935,41 @@
               </a:rPr>
               <a:t>Next week: </a:t>
             </a:r>
-            <a:pPr algn="l" indent="0" marL="0">
-              <a:buNone/>
-            </a:pPr>
-            <a:r>
-              <a:rPr lang="en-US" sz="1600" i="1" dirty="0">
-                <a:solidFill>
-                  <a:srgbClr val="000000"/>
-                </a:solidFill>
-                <a:latin typeface="Arial" pitchFamily="34" charset="0"/>
-                <a:ea typeface="Arial" pitchFamily="34" charset="-122"/>
-                <a:cs typeface="Arial" pitchFamily="34" charset="-120"/>
-              </a:rPr>
-              <a:t>The Berean Method — discerning the sacred and the true. A gift this valuable must be told apart from its counterfeits.</a:t>
-            </a:r>
-            <a:endParaRPr lang="en-US" sz="1600" dirty="0"/>
+            <a:r>
+              <a:rPr lang="en-US" i="1" dirty="0">
+                <a:solidFill>
+                  <a:srgbClr val="000000"/>
+                </a:solidFill>
+                <a:latin typeface="Arial" pitchFamily="34" charset="0"/>
+                <a:ea typeface="Arial" pitchFamily="34" charset="-122"/>
+                <a:cs typeface="Arial" pitchFamily="34" charset="-120"/>
+              </a:rPr>
+              <a:t>The Berean Method </a:t>
+            </a:r>
+            <a:r>
+              <a:rPr lang="en-US" i="1" dirty="0">
+                <a:solidFill>
+                  <a:srgbClr val="000000"/>
+                </a:solidFill>
+                <a:latin typeface="Arial" pitchFamily="34" charset="0"/>
+                <a:ea typeface="Arial" pitchFamily="34" charset="-122"/>
+                <a:cs typeface="Arial" pitchFamily="34" charset="-120"/>
+                <a:sym typeface="Wingdings" pitchFamily="2" charset="2"/>
+              </a:rPr>
+              <a:t></a:t>
+            </a:r>
+            <a:r>
+              <a:rPr lang="en-US" i="1" dirty="0">
+                <a:solidFill>
+                  <a:srgbClr val="000000"/>
+                </a:solidFill>
+                <a:latin typeface="Arial" pitchFamily="34" charset="0"/>
+                <a:ea typeface="Arial" pitchFamily="34" charset="-122"/>
+                <a:cs typeface="Arial" pitchFamily="34" charset="-120"/>
+              </a:rPr>
+              <a:t> discerning the sacred and the true. A gift this valuable must be told apart from its counterfeits.</a:t>
+            </a:r>
+            <a:endParaRPr lang="en-US" dirty="0"/>
           </a:p>
         </p:txBody>
       </p:sp>
@@ -6465,7 +6981,7 @@
         </p:nvSpPr>
         <p:spPr>
           <a:xfrm>
-            <a:off x="365760" y="3977640"/>
+            <a:off x="365760" y="3749040"/>
             <a:ext cx="8412480" cy="1051560"/>
           </a:xfrm>
           <a:prstGeom prst="rect">
@@ -6478,26 +6994,23 @@
           <a:bodyPr wrap="square" lIns="0" tIns="0" rIns="0" bIns="0" rtlCol="0" anchor="t"/>
           <a:lstStyle/>
           <a:p>
-            <a:pPr algn="l" indent="0" marL="0">
+            <a:pPr marL="0" indent="0" algn="l">
               <a:buNone/>
             </a:pPr>
             <a:r>
-              <a:rPr lang="en-US" sz="1500" b="1" dirty="0">
-                <a:solidFill>
-                  <a:srgbClr val="000000"/>
-                </a:solidFill>
-                <a:latin typeface="Arial" pitchFamily="34" charset="0"/>
-                <a:ea typeface="Arial" pitchFamily="34" charset="-122"/>
-                <a:cs typeface="Arial" pitchFamily="34" charset="-120"/>
-              </a:rPr>
-              <a:t>Carry this week in one sentence:
+              <a:rPr lang="en-US" b="1" dirty="0">
+                <a:solidFill>
+                  <a:srgbClr val="000000"/>
+                </a:solidFill>
+                <a:latin typeface="Arial" pitchFamily="34" charset="0"/>
+                <a:ea typeface="Arial" pitchFamily="34" charset="-122"/>
+                <a:cs typeface="Arial" pitchFamily="34" charset="-120"/>
+              </a:rPr>
+              <a:t>This lesson in one sentence:
 </a:t>
             </a:r>
-            <a:pPr algn="l" indent="0" marL="0">
-              <a:buNone/>
-            </a:pPr>
-            <a:r>
-              <a:rPr lang="en-US" sz="1700" b="1" i="1" dirty="0">
+            <a:r>
+              <a:rPr lang="en-US" sz="2400" b="1" i="1" dirty="0">
                 <a:solidFill>
                   <a:srgbClr val="1F497D"/>
                 </a:solidFill>
@@ -6507,7 +7020,7 @@
               </a:rPr>
               <a:t>Obedience is the shape of faith, not its price. Mercy first. Altar second.</a:t>
             </a:r>
-            <a:endParaRPr lang="en-US" sz="1600" dirty="0"/>
+            <a:endParaRPr lang="en-US" sz="2000" dirty="0"/>
           </a:p>
         </p:txBody>
       </p:sp>
@@ -6532,11 +7045,11 @@
           <a:bodyPr wrap="square" lIns="0" tIns="0" rIns="0" bIns="0" rtlCol="0" anchor="t"/>
           <a:lstStyle/>
           <a:p>
-            <a:pPr algn="ctr" indent="0" marL="0">
+            <a:pPr marL="0" indent="0" algn="ctr">
               <a:buNone/>
             </a:pPr>
             <a:r>
-              <a:rPr lang="en-US" sz="1700" b="1" i="1" dirty="0">
+              <a:rPr lang="en-US" sz="2000" b="1" i="1" dirty="0">
                 <a:solidFill>
                   <a:srgbClr val="1F497D"/>
                 </a:solidFill>
@@ -6546,7 +7059,7 @@
               </a:rPr>
               <a:t>“There is now no condemnation for those who are in Christ Jesus.”  (Romans 8:1)</a:t>
             </a:r>
-            <a:endParaRPr lang="en-US" sz="1600" dirty="0"/>
+            <a:endParaRPr lang="en-US" sz="2000" dirty="0"/>
           </a:p>
         </p:txBody>
       </p:sp>
@@ -6558,7 +7071,7 @@
         </p:nvSpPr>
         <p:spPr>
           <a:xfrm>
-            <a:off x="365760" y="6035040"/>
+            <a:off x="365760" y="6108192"/>
             <a:ext cx="8412480" cy="365760"/>
           </a:xfrm>
           <a:prstGeom prst="rect">
@@ -6571,18 +7084,18 @@
           <a:bodyPr wrap="square" lIns="0" tIns="0" rIns="0" bIns="0" rtlCol="0" anchor="t"/>
           <a:lstStyle/>
           <a:p>
-            <a:pPr algn="ctr" indent="0" marL="0">
+            <a:pPr marL="0" indent="0" algn="ctr">
               <a:buNone/>
             </a:pPr>
             <a:r>
-              <a:rPr lang="en-US" sz="1300" b="1" u="sng" dirty="0">
+              <a:rPr lang="en-US" b="1" u="sng" dirty="0">
                 <a:solidFill>
                   <a:srgbClr val="4F81BD"/>
                 </a:solidFill>
                 <a:latin typeface="Arial" pitchFamily="34" charset="0"/>
                 <a:ea typeface="Arial" pitchFamily="34" charset="-122"/>
                 <a:cs typeface="Arial" pitchFamily="34" charset="-120"/>
-                <a:hlinkClick r:id="rId1" invalidUrl="" action="" tgtFrame="" tooltip="" history="1" highlightClick="0" endSnd="0">
+                <a:hlinkClick r:id="rId3">
                   <a:extLst>
                     <a:ext uri="{A12FA001-AC4F-418D-AE19-62706E023703}">
                       <ahyp:hlinkClr xmlns:ahyp="http://schemas.microsoft.com/office/drawing/2018/hyperlinkcolor" val="tx"/>
@@ -6590,9 +7103,38 @@
                   </a:extLst>
                 </a:hlinkClick>
               </a:rPr>
-              <a:t>https://tinyurl.com/TeachTheWord</a:t>
-            </a:r>
-            <a:endParaRPr lang="en-US" sz="1600" dirty="0"/>
+              <a:t>https://</a:t>
+            </a:r>
+            <a:r>
+              <a:rPr lang="en-US" b="1" u="sng" dirty="0" err="1">
+                <a:solidFill>
+                  <a:srgbClr val="4F81BD"/>
+                </a:solidFill>
+                <a:latin typeface="Arial" pitchFamily="34" charset="0"/>
+                <a:ea typeface="Arial" pitchFamily="34" charset="-122"/>
+                <a:cs typeface="Arial" pitchFamily="34" charset="-120"/>
+                <a:hlinkClick r:id="rId3">
+                  <a:extLst>
+                    <a:ext uri="{A12FA001-AC4F-418D-AE19-62706E023703}">
+                      <ahyp:hlinkClr xmlns:ahyp="http://schemas.microsoft.com/office/drawing/2018/hyperlinkcolor" val="tx"/>
+                    </a:ext>
+                  </a:extLst>
+                </a:hlinkClick>
+              </a:rPr>
+              <a:t>TeachTheWord</a:t>
+            </a:r>
+            <a:r>
+              <a:rPr lang="en-US" b="1" u="sng" dirty="0" err="1">
+                <a:solidFill>
+                  <a:srgbClr val="4F81BD"/>
+                </a:solidFill>
+                <a:latin typeface="Arial" pitchFamily="34" charset="0"/>
+                <a:ea typeface="Arial" pitchFamily="34" charset="-122"/>
+                <a:cs typeface="Arial" pitchFamily="34" charset="-120"/>
+              </a:rPr>
+              <a:t>.Church</a:t>
+            </a:r>
+            <a:endParaRPr lang="en-US" sz="2400" dirty="0"/>
           </a:p>
         </p:txBody>
       </p:sp>
@@ -6610,26 +7152,26 @@
               <p:cTn id="2" dur="indefinite" nodeType="mainSeq">
                 <p:childTnLst>
                   <p:par>
-                    <p:cTn id="7" fill="hold">
+                    <p:cTn id="3" fill="hold">
                       <p:stCondLst>
                         <p:cond delay="indefinite"/>
                       </p:stCondLst>
                       <p:childTnLst>
                         <p:par>
-                          <p:cTn id="8" fill="hold">
+                          <p:cTn id="4" fill="hold">
                             <p:stCondLst>
                               <p:cond delay="0"/>
                             </p:stCondLst>
                             <p:childTnLst>
                               <p:par>
-                                <p:cTn id="3" presetID="42" presetClass="entr" presetSubtype="0" fill="hold" grpId="0" nodeType="clickEffect">
+                                <p:cTn id="5" presetID="42" presetClass="entr" presetSubtype="0" fill="hold" nodeType="clickEffect">
                                   <p:stCondLst>
                                     <p:cond delay="0"/>
                                   </p:stCondLst>
                                   <p:childTnLst>
                                     <p:set>
                                       <p:cBhvr>
-                                        <p:cTn id="4" dur="1" fill="hold">
+                                        <p:cTn id="6" dur="1" fill="hold">
                                           <p:stCondLst>
                                             <p:cond delay="0"/>
                                           </p:stCondLst>
@@ -6647,7 +7189,7 @@
                                     </p:set>
                                     <p:animEffect transition="in" filter="fade">
                                       <p:cBhvr>
-                                        <p:cTn id="5" dur="1000"/>
+                                        <p:cTn id="7" dur="1000"/>
                                         <p:tgtEl>
                                           <p:spTgt spid="4"/>
                                         </p:tgtEl>
@@ -6655,7 +7197,7 @@
                                     </p:animEffect>
                                     <p:anim calcmode="lin" valueType="num">
                                       <p:cBhvr>
-                                        <p:cTn id="6" dur="1000" fill="hold"/>
+                                        <p:cTn id="8" dur="1000" fill="hold"/>
                                         <p:tgtEl>
                                           <p:spTgt spid="4"/>
                                         </p:tgtEl>
@@ -6686,26 +7228,26 @@
                     </p:cTn>
                   </p:par>
                   <p:par>
-                    <p:cTn id="13" fill="hold">
+                    <p:cTn id="9" fill="hold">
                       <p:stCondLst>
                         <p:cond delay="indefinite"/>
                       </p:stCondLst>
                       <p:childTnLst>
                         <p:par>
-                          <p:cTn id="14" fill="hold">
+                          <p:cTn id="10" fill="hold">
                             <p:stCondLst>
                               <p:cond delay="0"/>
                             </p:stCondLst>
                             <p:childTnLst>
                               <p:par>
-                                <p:cTn id="9" presetID="42" presetClass="entr" presetSubtype="0" fill="hold" grpId="0" nodeType="clickEffect">
+                                <p:cTn id="11" presetID="42" presetClass="entr" presetSubtype="0" fill="hold" nodeType="clickEffect">
                                   <p:stCondLst>
                                     <p:cond delay="0"/>
                                   </p:stCondLst>
                                   <p:childTnLst>
                                     <p:set>
                                       <p:cBhvr>
-                                        <p:cTn id="10" dur="1" fill="hold">
+                                        <p:cTn id="12" dur="1" fill="hold">
                                           <p:stCondLst>
                                             <p:cond delay="0"/>
                                           </p:stCondLst>
@@ -6723,7 +7265,7 @@
                                     </p:set>
                                     <p:animEffect transition="in" filter="fade">
                                       <p:cBhvr>
-                                        <p:cTn id="11" dur="1000"/>
+                                        <p:cTn id="13" dur="1000"/>
                                         <p:tgtEl>
                                           <p:spTgt spid="5"/>
                                         </p:tgtEl>
@@ -6731,7 +7273,7 @@
                                     </p:animEffect>
                                     <p:anim calcmode="lin" valueType="num">
                                       <p:cBhvr>
-                                        <p:cTn id="12" dur="1000" fill="hold"/>
+                                        <p:cTn id="14" dur="1000" fill="hold"/>
                                         <p:tgtEl>
                                           <p:spTgt spid="5"/>
                                         </p:tgtEl>
@@ -6762,26 +7304,26 @@
                     </p:cTn>
                   </p:par>
                   <p:par>
-                    <p:cTn id="19" fill="hold">
+                    <p:cTn id="15" fill="hold">
                       <p:stCondLst>
                         <p:cond delay="indefinite"/>
                       </p:stCondLst>
                       <p:childTnLst>
                         <p:par>
-                          <p:cTn id="20" fill="hold">
+                          <p:cTn id="16" fill="hold">
                             <p:stCondLst>
                               <p:cond delay="0"/>
                             </p:stCondLst>
                             <p:childTnLst>
                               <p:par>
-                                <p:cTn id="15" presetID="42" presetClass="entr" presetSubtype="0" fill="hold" grpId="0" nodeType="clickEffect">
+                                <p:cTn id="17" presetID="42" presetClass="entr" presetSubtype="0" fill="hold" nodeType="clickEffect">
                                   <p:stCondLst>
                                     <p:cond delay="0"/>
                                   </p:stCondLst>
                                   <p:childTnLst>
                                     <p:set>
                                       <p:cBhvr>
-                                        <p:cTn id="16" dur="1" fill="hold">
+                                        <p:cTn id="18" dur="1" fill="hold">
                                           <p:stCondLst>
                                             <p:cond delay="0"/>
                                           </p:stCondLst>
@@ -6799,7 +7341,7 @@
                                     </p:set>
                                     <p:animEffect transition="in" filter="fade">
                                       <p:cBhvr>
-                                        <p:cTn id="17" dur="1000"/>
+                                        <p:cTn id="19" dur="1000"/>
                                         <p:tgtEl>
                                           <p:spTgt spid="6"/>
                                         </p:tgtEl>
@@ -6807,7 +7349,7 @@
                                     </p:animEffect>
                                     <p:anim calcmode="lin" valueType="num">
                                       <p:cBhvr>
-                                        <p:cTn id="18" dur="1000" fill="hold"/>
+                                        <p:cTn id="20" dur="1000" fill="hold"/>
                                         <p:tgtEl>
                                           <p:spTgt spid="6"/>
                                         </p:tgtEl>
@@ -6838,26 +7380,26 @@
                     </p:cTn>
                   </p:par>
                   <p:par>
-                    <p:cTn id="25" fill="hold">
+                    <p:cTn id="21" fill="hold">
                       <p:stCondLst>
                         <p:cond delay="indefinite"/>
                       </p:stCondLst>
                       <p:childTnLst>
                         <p:par>
-                          <p:cTn id="26" fill="hold">
+                          <p:cTn id="22" fill="hold">
                             <p:stCondLst>
                               <p:cond delay="0"/>
                             </p:stCondLst>
                             <p:childTnLst>
                               <p:par>
-                                <p:cTn id="21" presetID="42" presetClass="entr" presetSubtype="0" fill="hold" grpId="0" nodeType="clickEffect">
+                                <p:cTn id="23" presetID="42" presetClass="entr" presetSubtype="0" fill="hold" nodeType="clickEffect">
                                   <p:stCondLst>
                                     <p:cond delay="0"/>
                                   </p:stCondLst>
                                   <p:childTnLst>
                                     <p:set>
                                       <p:cBhvr>
-                                        <p:cTn id="22" dur="1" fill="hold">
+                                        <p:cTn id="24" dur="1" fill="hold">
                                           <p:stCondLst>
                                             <p:cond delay="0"/>
                                           </p:stCondLst>
@@ -6875,7 +7417,7 @@
                                     </p:set>
                                     <p:animEffect transition="in" filter="fade">
                                       <p:cBhvr>
-                                        <p:cTn id="23" dur="1000"/>
+                                        <p:cTn id="25" dur="1000"/>
                                         <p:tgtEl>
                                           <p:spTgt spid="7"/>
                                         </p:tgtEl>
@@ -6883,7 +7425,7 @@
                                     </p:animEffect>
                                     <p:anim calcmode="lin" valueType="num">
                                       <p:cBhvr>
-                                        <p:cTn id="24" dur="1000" fill="hold"/>
+                                        <p:cTn id="26" dur="1000" fill="hold"/>
                                         <p:tgtEl>
                                           <p:spTgt spid="7"/>
                                         </p:tgtEl>
@@ -7231,4 +7773,319 @@
     </a:ext>
   </a:extLst>
 </a:theme>
+</file>
+
+<file path=ppt/theme/theme2.xml><?xml version="1.0" encoding="utf-8"?>
+<a:theme xmlns:a="http://schemas.openxmlformats.org/drawingml/2006/main" name="Office Theme">
+  <a:themeElements>
+    <a:clrScheme name="Office">
+      <a:dk1>
+        <a:sysClr val="windowText" lastClr="000000"/>
+      </a:dk1>
+      <a:lt1>
+        <a:sysClr val="window" lastClr="FFFFFF"/>
+      </a:lt1>
+      <a:dk2>
+        <a:srgbClr val="0E2841"/>
+      </a:dk2>
+      <a:lt2>
+        <a:srgbClr val="E8E8E8"/>
+      </a:lt2>
+      <a:accent1>
+        <a:srgbClr val="156082"/>
+      </a:accent1>
+      <a:accent2>
+        <a:srgbClr val="E97132"/>
+      </a:accent2>
+      <a:accent3>
+        <a:srgbClr val="196B24"/>
+      </a:accent3>
+      <a:accent4>
+        <a:srgbClr val="0F9ED5"/>
+      </a:accent4>
+      <a:accent5>
+        <a:srgbClr val="A02B93"/>
+      </a:accent5>
+      <a:accent6>
+        <a:srgbClr val="4EA72E"/>
+      </a:accent6>
+      <a:hlink>
+        <a:srgbClr val="467886"/>
+      </a:hlink>
+      <a:folHlink>
+        <a:srgbClr val="96607D"/>
+      </a:folHlink>
+    </a:clrScheme>
+    <a:fontScheme name="Office">
+      <a:majorFont>
+        <a:latin typeface="Aptos Display" panose="02110004020202020204"/>
+        <a:ea typeface=""/>
+        <a:cs typeface=""/>
+        <a:font script="Jpan" typeface="游ゴシック Light"/>
+        <a:font script="Hang" typeface="맑은 고딕"/>
+        <a:font script="Hans" typeface="等线 Light"/>
+        <a:font script="Hant" typeface="新細明體"/>
+        <a:font script="Arab" typeface="Times New Roman"/>
+        <a:font script="Hebr" typeface="Times New Roman"/>
+        <a:font script="Thai" typeface="Angsana New"/>
+        <a:font script="Ethi" typeface="Nyala"/>
+        <a:font script="Beng" typeface="Vrinda"/>
+        <a:font script="Gujr" typeface="Shruti"/>
+        <a:font script="Khmr" typeface="MoolBoran"/>
+        <a:font script="Knda" typeface="Tunga"/>
+        <a:font script="Guru" typeface="Raavi"/>
+        <a:font script="Cans" typeface="Euphemia"/>
+        <a:font script="Cher" typeface="Plantagenet Cherokee"/>
+        <a:font script="Yiii" typeface="Microsoft Yi Baiti"/>
+        <a:font script="Tibt" typeface="Microsoft Himalaya"/>
+        <a:font script="Thaa" typeface="MV Boli"/>
+        <a:font script="Deva" typeface="Mangal"/>
+        <a:font script="Telu" typeface="Gautami"/>
+        <a:font script="Taml" typeface="Latha"/>
+        <a:font script="Syrc" typeface="Estrangelo Edessa"/>
+        <a:font script="Orya" typeface="Kalinga"/>
+        <a:font script="Mlym" typeface="Kartika"/>
+        <a:font script="Laoo" typeface="DokChampa"/>
+        <a:font script="Sinh" typeface="Iskoola Pota"/>
+        <a:font script="Mong" typeface="Mongolian Baiti"/>
+        <a:font script="Viet" typeface="Times New Roman"/>
+        <a:font script="Uigh" typeface="Microsoft Uighur"/>
+        <a:font script="Geor" typeface="Sylfaen"/>
+        <a:font script="Armn" typeface="Arial"/>
+        <a:font script="Bugi" typeface="Leelawadee UI"/>
+        <a:font script="Bopo" typeface="Microsoft JhengHei"/>
+        <a:font script="Java" typeface="Javanese Text"/>
+        <a:font script="Lisu" typeface="Segoe UI"/>
+        <a:font script="Mymr" typeface="Myanmar Text"/>
+        <a:font script="Nkoo" typeface="Ebrima"/>
+        <a:font script="Olck" typeface="Nirmala UI"/>
+        <a:font script="Osma" typeface="Ebrima"/>
+        <a:font script="Phag" typeface="Phagspa"/>
+        <a:font script="Syrn" typeface="Estrangelo Edessa"/>
+        <a:font script="Syrj" typeface="Estrangelo Edessa"/>
+        <a:font script="Syre" typeface="Estrangelo Edessa"/>
+        <a:font script="Sora" typeface="Nirmala UI"/>
+        <a:font script="Tale" typeface="Microsoft Tai Le"/>
+        <a:font script="Talu" typeface="Microsoft New Tai Lue"/>
+        <a:font script="Tfng" typeface="Ebrima"/>
+      </a:majorFont>
+      <a:minorFont>
+        <a:latin typeface="Aptos" panose="02110004020202020204"/>
+        <a:ea typeface=""/>
+        <a:cs typeface=""/>
+        <a:font script="Jpan" typeface="游ゴシック"/>
+        <a:font script="Hang" typeface="맑은 고딕"/>
+        <a:font script="Hans" typeface="等线"/>
+        <a:font script="Hant" typeface="新細明體"/>
+        <a:font script="Arab" typeface="Arial"/>
+        <a:font script="Hebr" typeface="Arial"/>
+        <a:font script="Thai" typeface="Cordia New"/>
+        <a:font script="Ethi" typeface="Nyala"/>
+        <a:font script="Beng" typeface="Vrinda"/>
+        <a:font script="Gujr" typeface="Shruti"/>
+        <a:font script="Khmr" typeface="DaunPenh"/>
+        <a:font script="Knda" typeface="Tunga"/>
+        <a:font script="Guru" typeface="Raavi"/>
+        <a:font script="Cans" typeface="Euphemia"/>
+        <a:font script="Cher" typeface="Plantagenet Cherokee"/>
+        <a:font script="Yiii" typeface="Microsoft Yi Baiti"/>
+        <a:font script="Tibt" typeface="Microsoft Himalaya"/>
+        <a:font script="Thaa" typeface="MV Boli"/>
+        <a:font script="Deva" typeface="Mangal"/>
+        <a:font script="Telu" typeface="Gautami"/>
+        <a:font script="Taml" typeface="Latha"/>
+        <a:font script="Syrc" typeface="Estrangelo Edessa"/>
+        <a:font script="Orya" typeface="Kalinga"/>
+        <a:font script="Mlym" typeface="Kartika"/>
+        <a:font script="Laoo" typeface="DokChampa"/>
+        <a:font script="Sinh" typeface="Iskoola Pota"/>
+        <a:font script="Mong" typeface="Mongolian Baiti"/>
+        <a:font script="Viet" typeface="Arial"/>
+        <a:font script="Uigh" typeface="Microsoft Uighur"/>
+        <a:font script="Geor" typeface="Sylfaen"/>
+        <a:font script="Armn" typeface="Arial"/>
+        <a:font script="Bugi" typeface="Leelawadee UI"/>
+        <a:font script="Bopo" typeface="Microsoft JhengHei"/>
+        <a:font script="Java" typeface="Javanese Text"/>
+        <a:font script="Lisu" typeface="Segoe UI"/>
+        <a:font script="Mymr" typeface="Myanmar Text"/>
+        <a:font script="Nkoo" typeface="Ebrima"/>
+        <a:font script="Olck" typeface="Nirmala UI"/>
+        <a:font script="Osma" typeface="Ebrima"/>
+        <a:font script="Phag" typeface="Phagspa"/>
+        <a:font script="Syrn" typeface="Estrangelo Edessa"/>
+        <a:font script="Syrj" typeface="Estrangelo Edessa"/>
+        <a:font script="Syre" typeface="Estrangelo Edessa"/>
+        <a:font script="Sora" typeface="Nirmala UI"/>
+        <a:font script="Tale" typeface="Microsoft Tai Le"/>
+        <a:font script="Talu" typeface="Microsoft New Tai Lue"/>
+        <a:font script="Tfng" typeface="Ebrima"/>
+      </a:minorFont>
+    </a:fontScheme>
+    <a:fmtScheme name="Office">
+      <a:fillStyleLst>
+        <a:solidFill>
+          <a:schemeClr val="phClr"/>
+        </a:solidFill>
+        <a:gradFill rotWithShape="1">
+          <a:gsLst>
+            <a:gs pos="0">
+              <a:schemeClr val="phClr">
+                <a:lumMod val="110000"/>
+                <a:satMod val="105000"/>
+                <a:tint val="67000"/>
+              </a:schemeClr>
+            </a:gs>
+            <a:gs pos="50000">
+              <a:schemeClr val="phClr">
+                <a:lumMod val="105000"/>
+                <a:satMod val="103000"/>
+                <a:tint val="73000"/>
+              </a:schemeClr>
+            </a:gs>
+            <a:gs pos="100000">
+              <a:schemeClr val="phClr">
+                <a:lumMod val="105000"/>
+                <a:satMod val="109000"/>
+                <a:tint val="81000"/>
+              </a:schemeClr>
+            </a:gs>
+          </a:gsLst>
+          <a:lin ang="5400000" scaled="0"/>
+        </a:gradFill>
+        <a:gradFill rotWithShape="1">
+          <a:gsLst>
+            <a:gs pos="0">
+              <a:schemeClr val="phClr">
+                <a:satMod val="103000"/>
+                <a:lumMod val="102000"/>
+                <a:tint val="94000"/>
+              </a:schemeClr>
+            </a:gs>
+            <a:gs pos="50000">
+              <a:schemeClr val="phClr">
+                <a:satMod val="110000"/>
+                <a:lumMod val="100000"/>
+                <a:shade val="100000"/>
+              </a:schemeClr>
+            </a:gs>
+            <a:gs pos="100000">
+              <a:schemeClr val="phClr">
+                <a:lumMod val="99000"/>
+                <a:satMod val="120000"/>
+                <a:shade val="78000"/>
+              </a:schemeClr>
+            </a:gs>
+          </a:gsLst>
+          <a:lin ang="5400000" scaled="0"/>
+        </a:gradFill>
+      </a:fillStyleLst>
+      <a:lnStyleLst>
+        <a:ln w="12700" cap="flat" cmpd="sng" algn="ctr">
+          <a:solidFill>
+            <a:schemeClr val="phClr"/>
+          </a:solidFill>
+          <a:prstDash val="solid"/>
+          <a:miter lim="800000"/>
+        </a:ln>
+        <a:ln w="19050" cap="flat" cmpd="sng" algn="ctr">
+          <a:solidFill>
+            <a:schemeClr val="phClr"/>
+          </a:solidFill>
+          <a:prstDash val="solid"/>
+          <a:miter lim="800000"/>
+        </a:ln>
+        <a:ln w="25400" cap="flat" cmpd="sng" algn="ctr">
+          <a:solidFill>
+            <a:schemeClr val="phClr"/>
+          </a:solidFill>
+          <a:prstDash val="solid"/>
+          <a:miter lim="800000"/>
+        </a:ln>
+      </a:lnStyleLst>
+      <a:effectStyleLst>
+        <a:effectStyle>
+          <a:effectLst/>
+        </a:effectStyle>
+        <a:effectStyle>
+          <a:effectLst/>
+        </a:effectStyle>
+        <a:effectStyle>
+          <a:effectLst>
+            <a:outerShdw blurRad="57150" dist="19050" dir="5400000" algn="ctr" rotWithShape="0">
+              <a:srgbClr val="000000">
+                <a:alpha val="63000"/>
+              </a:srgbClr>
+            </a:outerShdw>
+          </a:effectLst>
+        </a:effectStyle>
+      </a:effectStyleLst>
+      <a:bgFillStyleLst>
+        <a:solidFill>
+          <a:schemeClr val="phClr"/>
+        </a:solidFill>
+        <a:solidFill>
+          <a:schemeClr val="phClr">
+            <a:tint val="95000"/>
+            <a:satMod val="170000"/>
+          </a:schemeClr>
+        </a:solidFill>
+        <a:gradFill rotWithShape="1">
+          <a:gsLst>
+            <a:gs pos="0">
+              <a:schemeClr val="phClr">
+                <a:tint val="93000"/>
+                <a:satMod val="150000"/>
+                <a:shade val="98000"/>
+                <a:lumMod val="102000"/>
+              </a:schemeClr>
+            </a:gs>
+            <a:gs pos="50000">
+              <a:schemeClr val="phClr">
+                <a:tint val="98000"/>
+                <a:satMod val="130000"/>
+                <a:shade val="90000"/>
+                <a:lumMod val="103000"/>
+              </a:schemeClr>
+            </a:gs>
+            <a:gs pos="100000">
+              <a:schemeClr val="phClr">
+                <a:shade val="63000"/>
+                <a:satMod val="120000"/>
+              </a:schemeClr>
+            </a:gs>
+          </a:gsLst>
+          <a:lin ang="5400000" scaled="0"/>
+        </a:gradFill>
+      </a:bgFillStyleLst>
+    </a:fmtScheme>
+  </a:themeElements>
+  <a:objectDefaults>
+    <a:lnDef>
+      <a:spPr/>
+      <a:bodyPr/>
+      <a:lstStyle/>
+      <a:style>
+        <a:lnRef idx="2">
+          <a:schemeClr val="accent1"/>
+        </a:lnRef>
+        <a:fillRef idx="0">
+          <a:schemeClr val="accent1"/>
+        </a:fillRef>
+        <a:effectRef idx="1">
+          <a:schemeClr val="accent1"/>
+        </a:effectRef>
+        <a:fontRef idx="minor">
+          <a:schemeClr val="tx1"/>
+        </a:fontRef>
+      </a:style>
+    </a:lnDef>
+  </a:objectDefaults>
+  <a:extraClrSchemeLst/>
+  <a:extLst>
+    <a:ext uri="{05A4C25C-085E-4340-85A3-A5531E510DB2}">
+      <thm15:themeFamily xmlns:thm15="http://schemas.microsoft.com/office/thememl/2012/main" name="Office Theme" id="{2E142A2C-CD16-42D6-873A-C26D2A0506FA}" vid="{1BDDFF52-6CD6-40A5-AB3C-68EB2F1E4D0A}"/>
+    </a:ext>
+  </a:extLst>
+</a:theme>
 </file>